--- a/presentations/lab_seminar/nv_eit_seminar.pptx
+++ b/presentations/lab_seminar/nv_eit_seminar.pptx
@@ -8560,7 +8560,7 @@
         </p:nvSpPr>
         <p:spPr>
           <a:xfrm>
-            <a:off x="5202936" y="6492240"/>
+            <a:off x="5202936" y="6419088"/>
             <a:ext cx="3794760" cy="292608"/>
           </a:xfrm>
           <a:prstGeom prst="rect">
@@ -8613,8 +8613,8 @@
         </p:nvSpPr>
         <p:spPr>
           <a:xfrm>
-            <a:off x="411480" y="292608"/>
-            <a:ext cx="6400800" cy="731520"/>
+            <a:off x="128016" y="100584"/>
+            <a:ext cx="7479792" cy="694944"/>
           </a:xfrm>
           <a:prstGeom prst="rect">
             <a:avLst/>
@@ -8642,14 +8642,48 @@
       </p:sp>
       <p:sp>
         <p:nvSpPr>
-          <p:cNvPr id="3" name="Rounded Rectangle 2"/>
+          <p:cNvPr id="3" name="TitleLine"/>
+          <p:cNvSpPr txBox="1"/>
+          <p:nvPr/>
+        </p:nvSpPr>
+        <p:spPr>
+          <a:xfrm>
+            <a:off x="128016" y="859536"/>
+            <a:ext cx="8887968" cy="457200"/>
+          </a:xfrm>
+          <a:prstGeom prst="rect">
+            <a:avLst/>
+          </a:prstGeom>
+          <a:noFill/>
+        </p:spPr>
+        <p:txBody>
+          <a:bodyPr wrap="square" anchor="ctr" lIns="0" rIns="0" tIns="18288" bIns="18288">
+            <a:spAutoFit/>
+          </a:bodyPr>
+          <a:lstStyle/>
+          <a:p>
+            <a:r>
+              <a:rPr sz="2200" b="1" i="0">
+                <a:solidFill>
+                  <a:srgbClr val="1A1A1A"/>
+                </a:solidFill>
+                <a:latin typeface="Arial"/>
+              </a:rPr>
+              <a:t>Method 3: How each operating point is judged</a:t>
+            </a:r>
+          </a:p>
+        </p:txBody>
+      </p:sp>
+      <p:sp>
+        <p:nvSpPr>
+          <p:cNvPr id="4" name="Rounded Rectangle 3"/>
           <p:cNvSpPr/>
           <p:nvPr/>
         </p:nvSpPr>
         <p:spPr>
           <a:xfrm>
-            <a:off x="411480" y="1371600"/>
-            <a:ext cx="2590800" cy="2331720"/>
+            <a:off x="128016" y="1481328"/>
+            <a:ext cx="2779776" cy="2011680"/>
           </a:xfrm>
           <a:prstGeom prst="roundRect">
             <a:avLst>
@@ -8657,7 +8691,7 @@
             </a:avLst>
           </a:prstGeom>
           <a:solidFill>
-            <a:srgbClr val="EEF2FA"/>
+            <a:srgbClr val="EEF4FF"/>
           </a:solidFill>
           <a:ln>
             <a:noFill/>
@@ -8679,7 +8713,7 @@
           </a:fontRef>
         </p:style>
         <p:txBody>
-          <a:bodyPr rtlCol="0" anchor="ctr" wrap="square" lIns="128016" rIns="128016" tIns="91440" bIns="91440"/>
+          <a:bodyPr rtlCol="0" anchor="ctr" wrap="square" lIns="128016" rIns="128016" tIns="82296" bIns="82296"/>
           <a:lstStyle/>
           <a:p>
             <a:pPr algn="ctr"/>
@@ -8696,7 +8730,7 @@
           <a:p>
             <a:pPr>
               <a:spcBef>
-                <a:spcPts val="400"/>
+                <a:spcPts val="300"/>
               </a:spcBef>
             </a:pPr>
             <a:r>
@@ -8712,7 +8746,7 @@
           <a:p>
             <a:pPr>
               <a:spcBef>
-                <a:spcPts val="400"/>
+                <a:spcPts val="300"/>
               </a:spcBef>
             </a:pPr>
             <a:r>
@@ -8728,7 +8762,7 @@
           <a:p>
             <a:pPr>
               <a:spcBef>
-                <a:spcPts val="400"/>
+                <a:spcPts val="300"/>
               </a:spcBef>
             </a:pPr>
             <a:r>
@@ -8744,7 +8778,7 @@
           <a:p>
             <a:pPr>
               <a:spcBef>
-                <a:spcPts val="400"/>
+                <a:spcPts val="300"/>
               </a:spcBef>
             </a:pPr>
             <a:r>
@@ -8761,14 +8795,14 @@
       </p:sp>
       <p:sp>
         <p:nvSpPr>
-          <p:cNvPr id="4" name="Rounded Rectangle 3"/>
+          <p:cNvPr id="5" name="Rounded Rectangle 4"/>
           <p:cNvSpPr/>
           <p:nvPr/>
         </p:nvSpPr>
         <p:spPr>
           <a:xfrm>
-            <a:off x="3276600" y="1371600"/>
-            <a:ext cx="2590800" cy="2331720"/>
+            <a:off x="3182112" y="1481328"/>
+            <a:ext cx="2779776" cy="2011680"/>
           </a:xfrm>
           <a:prstGeom prst="roundRect">
             <a:avLst>
@@ -8776,7 +8810,7 @@
             </a:avLst>
           </a:prstGeom>
           <a:solidFill>
-            <a:srgbClr val="EEF2FA"/>
+            <a:srgbClr val="EEF4FF"/>
           </a:solidFill>
           <a:ln>
             <a:noFill/>
@@ -8798,7 +8832,7 @@
           </a:fontRef>
         </p:style>
         <p:txBody>
-          <a:bodyPr rtlCol="0" anchor="ctr" wrap="square" lIns="128016" rIns="128016" tIns="91440" bIns="91440"/>
+          <a:bodyPr rtlCol="0" anchor="ctr" wrap="square" lIns="128016" rIns="128016" tIns="82296" bIns="82296"/>
           <a:lstStyle/>
           <a:p>
             <a:pPr algn="ctr"/>
@@ -8815,7 +8849,7 @@
           <a:p>
             <a:pPr>
               <a:spcBef>
-                <a:spcPts val="400"/>
+                <a:spcPts val="300"/>
               </a:spcBef>
             </a:pPr>
             <a:r>
@@ -8831,7 +8865,7 @@
           <a:p>
             <a:pPr>
               <a:spcBef>
-                <a:spcPts val="400"/>
+                <a:spcPts val="300"/>
               </a:spcBef>
             </a:pPr>
             <a:r>
@@ -8847,7 +8881,7 @@
           <a:p>
             <a:pPr>
               <a:spcBef>
-                <a:spcPts val="400"/>
+                <a:spcPts val="300"/>
               </a:spcBef>
             </a:pPr>
             <a:r>
@@ -8863,7 +8897,7 @@
           <a:p>
             <a:pPr>
               <a:spcBef>
-                <a:spcPts val="400"/>
+                <a:spcPts val="300"/>
               </a:spcBef>
             </a:pPr>
             <a:r>
@@ -8880,14 +8914,14 @@
       </p:sp>
       <p:sp>
         <p:nvSpPr>
-          <p:cNvPr id="5" name="Rounded Rectangle 4"/>
+          <p:cNvPr id="6" name="Rounded Rectangle 5"/>
           <p:cNvSpPr/>
           <p:nvPr/>
         </p:nvSpPr>
         <p:spPr>
           <a:xfrm>
-            <a:off x="6141720" y="1371600"/>
-            <a:ext cx="2590800" cy="2331720"/>
+            <a:off x="6236208" y="1481328"/>
+            <a:ext cx="2779776" cy="2011680"/>
           </a:xfrm>
           <a:prstGeom prst="roundRect">
             <a:avLst>
@@ -8895,7 +8929,7 @@
             </a:avLst>
           </a:prstGeom>
           <a:solidFill>
-            <a:srgbClr val="EEF2FA"/>
+            <a:srgbClr val="EEF4FF"/>
           </a:solidFill>
           <a:ln>
             <a:noFill/>
@@ -8917,7 +8951,7 @@
           </a:fontRef>
         </p:style>
         <p:txBody>
-          <a:bodyPr rtlCol="0" anchor="ctr" wrap="square" lIns="128016" rIns="128016" tIns="91440" bIns="91440"/>
+          <a:bodyPr rtlCol="0" anchor="ctr" wrap="square" lIns="128016" rIns="128016" tIns="82296" bIns="82296"/>
           <a:lstStyle/>
           <a:p>
             <a:pPr algn="ctr"/>
@@ -8934,7 +8968,7 @@
           <a:p>
             <a:pPr>
               <a:spcBef>
-                <a:spcPts val="400"/>
+                <a:spcPts val="300"/>
               </a:spcBef>
             </a:pPr>
             <a:r>
@@ -8950,7 +8984,7 @@
           <a:p>
             <a:pPr>
               <a:spcBef>
-                <a:spcPts val="400"/>
+                <a:spcPts val="300"/>
               </a:spcBef>
             </a:pPr>
             <a:r>
@@ -8966,7 +9000,7 @@
           <a:p>
             <a:pPr>
               <a:spcBef>
-                <a:spcPts val="400"/>
+                <a:spcPts val="300"/>
               </a:spcBef>
             </a:pPr>
             <a:r>
@@ -8982,7 +9016,7 @@
           <a:p>
             <a:pPr>
               <a:spcBef>
-                <a:spcPts val="400"/>
+                <a:spcPts val="300"/>
               </a:spcBef>
             </a:pPr>
             <a:r>
@@ -8999,14 +9033,14 @@
       </p:sp>
       <p:sp>
         <p:nvSpPr>
-          <p:cNvPr id="6" name="TextBox 5"/>
+          <p:cNvPr id="7" name="TextBox 6"/>
           <p:cNvSpPr txBox="1"/>
           <p:nvPr/>
         </p:nvSpPr>
         <p:spPr>
           <a:xfrm>
-            <a:off x="411480" y="3977639"/>
-            <a:ext cx="8321040" cy="1737360"/>
+            <a:off x="128016" y="3657600"/>
+            <a:ext cx="8887968" cy="1143000"/>
           </a:xfrm>
           <a:prstGeom prst="rect">
             <a:avLst/>
@@ -9090,14 +9124,14 @@
       </p:sp>
       <p:sp>
         <p:nvSpPr>
-          <p:cNvPr id="7" name="Rounded Rectangle 6"/>
+          <p:cNvPr id="8" name="Rounded Rectangle 7"/>
           <p:cNvSpPr/>
           <p:nvPr/>
         </p:nvSpPr>
         <p:spPr>
           <a:xfrm>
-            <a:off x="411480" y="5742432"/>
-            <a:ext cx="8321040" cy="731520"/>
+            <a:off x="128016" y="4919472"/>
+            <a:ext cx="8887968" cy="731520"/>
           </a:xfrm>
           <a:prstGeom prst="roundRect">
             <a:avLst>
@@ -9105,7 +9139,7 @@
             </a:avLst>
           </a:prstGeom>
           <a:solidFill>
-            <a:srgbClr val="EEF2FA"/>
+            <a:srgbClr val="EEF4FF"/>
           </a:solidFill>
           <a:ln>
             <a:noFill/>
@@ -9139,6 +9173,75 @@
                 <a:latin typeface="Arial"/>
               </a:rPr>
               <a:t>A strong control gives an Autler–Townes doublet even with zero ground coherence, so a dip alone cannot establish EIT.</a:t>
+            </a:r>
+          </a:p>
+        </p:txBody>
+      </p:sp>
+      <p:cxnSp>
+        <p:nvCxnSpPr>
+          <p:cNvPr id="9" name="Connector 8"/>
+          <p:cNvCxnSpPr/>
+          <p:nvPr/>
+        </p:nvCxnSpPr>
+        <p:spPr>
+          <a:xfrm>
+            <a:off x="128016" y="5870448"/>
+            <a:ext cx="8887968" cy="0"/>
+          </a:xfrm>
+          <a:prstGeom prst="line">
+            <a:avLst/>
+          </a:prstGeom>
+          <a:ln w="9525">
+            <a:solidFill>
+              <a:srgbClr val="BBBBBB"/>
+            </a:solidFill>
+          </a:ln>
+        </p:spPr>
+        <p:style>
+          <a:lnRef idx="2">
+            <a:schemeClr val="accent1"/>
+          </a:lnRef>
+          <a:fillRef idx="0">
+            <a:schemeClr val="accent1"/>
+          </a:fillRef>
+          <a:effectRef idx="1">
+            <a:schemeClr val="accent1"/>
+          </a:effectRef>
+          <a:fontRef idx="minor">
+            <a:schemeClr val="tx1"/>
+          </a:fontRef>
+        </p:style>
+      </p:cxnSp>
+      <p:sp>
+        <p:nvSpPr>
+          <p:cNvPr id="10" name="RefBand"/>
+          <p:cNvSpPr txBox="1"/>
+          <p:nvPr/>
+        </p:nvSpPr>
+        <p:spPr>
+          <a:xfrm>
+            <a:off x="128016" y="5916168"/>
+            <a:ext cx="8321040" cy="548640"/>
+          </a:xfrm>
+          <a:prstGeom prst="rect">
+            <a:avLst/>
+          </a:prstGeom>
+          <a:noFill/>
+        </p:spPr>
+        <p:txBody>
+          <a:bodyPr wrap="square" anchor="t" lIns="0" rIns="0" tIns="18288" bIns="18288">
+            <a:spAutoFit/>
+          </a:bodyPr>
+          <a:lstStyle/>
+          <a:p>
+            <a:r>
+              <a:rPr sz="1000" b="0" i="1">
+                <a:solidFill>
+                  <a:srgbClr val="555555"/>
+                </a:solidFill>
+                <a:latin typeface="Arial"/>
+              </a:rPr>
+              <a:t>[9] P. M. Anisimov, J. P. Dowling and B. C. Sanders, Phys. Rev. Lett. 107, 163604 (2011).</a:t>
             </a:r>
           </a:p>
         </p:txBody>
@@ -9230,8 +9333,8 @@
         </p:nvSpPr>
         <p:spPr>
           <a:xfrm>
-            <a:off x="411480" y="292608"/>
-            <a:ext cx="6400800" cy="731520"/>
+            <a:off x="128016" y="100584"/>
+            <a:ext cx="7479792" cy="694944"/>
           </a:xfrm>
           <a:prstGeom prst="rect">
             <a:avLst/>
@@ -9259,14 +9362,48 @@
       </p:sp>
       <p:sp>
         <p:nvSpPr>
-          <p:cNvPr id="3" name="Rounded Rectangle 2"/>
+          <p:cNvPr id="3" name="TitleLine"/>
+          <p:cNvSpPr txBox="1"/>
+          <p:nvPr/>
+        </p:nvSpPr>
+        <p:spPr>
+          <a:xfrm>
+            <a:off x="128016" y="859536"/>
+            <a:ext cx="8887968" cy="457200"/>
+          </a:xfrm>
+          <a:prstGeom prst="rect">
+            <a:avLst/>
+          </a:prstGeom>
+          <a:noFill/>
+        </p:spPr>
+        <p:txBody>
+          <a:bodyPr wrap="square" anchor="ctr" lIns="0" rIns="0" tIns="18288" bIns="18288">
+            <a:spAutoFit/>
+          </a:bodyPr>
+          <a:lstStyle/>
+          <a:p>
+            <a:r>
+              <a:rPr sz="2200" b="1" i="0">
+                <a:solidFill>
+                  <a:srgbClr val="1A1A1A"/>
+                </a:solidFill>
+                <a:latin typeface="Arial"/>
+              </a:rPr>
+              <a:t>Result 1: Reduction to the textbook Λ system</a:t>
+            </a:r>
+          </a:p>
+        </p:txBody>
+      </p:sp>
+      <p:sp>
+        <p:nvSpPr>
+          <p:cNvPr id="4" name="Rounded Rectangle 3"/>
           <p:cNvSpPr/>
           <p:nvPr/>
         </p:nvSpPr>
         <p:spPr>
           <a:xfrm>
-            <a:off x="411480" y="1325880"/>
-            <a:ext cx="8321040" cy="1737360"/>
+            <a:off x="128016" y="1481328"/>
+            <a:ext cx="8887968" cy="1554480"/>
           </a:xfrm>
           <a:prstGeom prst="roundRect">
             <a:avLst>
@@ -9274,7 +9411,7 @@
             </a:avLst>
           </a:prstGeom>
           <a:solidFill>
-            <a:srgbClr val="F7F9FC"/>
+            <a:srgbClr val="F6F8FC"/>
           </a:solidFill>
           <a:ln>
             <a:noFill/>
@@ -9296,7 +9433,7 @@
           </a:fontRef>
         </p:style>
         <p:txBody>
-          <a:bodyPr rtlCol="0" anchor="ctr" wrap="square" lIns="128016" rIns="128016" tIns="91440" bIns="91440"/>
+          <a:bodyPr rtlCol="0" anchor="ctr" wrap="square" lIns="128016" rIns="128016" tIns="82296" bIns="82296"/>
           <a:lstStyle/>
           <a:p>
             <a:pPr algn="ctr"/>
@@ -9329,7 +9466,7 @@
           <a:p>
             <a:pPr>
               <a:spcBef>
-                <a:spcPts val="1000"/>
+                <a:spcPts val="800"/>
               </a:spcBef>
             </a:pPr>
             <a:r>
@@ -9364,14 +9501,14 @@
       </p:sp>
       <p:sp>
         <p:nvSpPr>
-          <p:cNvPr id="4" name="TextBox 3"/>
+          <p:cNvPr id="5" name="TextBox 4"/>
           <p:cNvSpPr txBox="1"/>
           <p:nvPr/>
         </p:nvSpPr>
         <p:spPr>
           <a:xfrm>
-            <a:off x="411480" y="3291840"/>
-            <a:ext cx="8321040" cy="2377440"/>
+            <a:off x="128016" y="3182112"/>
+            <a:ext cx="8887968" cy="1645920"/>
           </a:xfrm>
           <a:prstGeom prst="rect">
             <a:avLst/>
@@ -9460,7 +9597,7 @@
             <a:r>
               <a:rPr sz="1600" b="1" i="0">
                 <a:solidFill>
-                  <a:srgbClr val="C00000"/>
+                  <a:srgbClr val="1C3077"/>
                 </a:solidFill>
                 <a:latin typeface="Arial"/>
               </a:rPr>
@@ -9480,14 +9617,14 @@
       </p:sp>
       <p:sp>
         <p:nvSpPr>
-          <p:cNvPr id="5" name="Rounded Rectangle 4"/>
+          <p:cNvPr id="6" name="Rounded Rectangle 5"/>
           <p:cNvSpPr/>
           <p:nvPr/>
         </p:nvSpPr>
         <p:spPr>
           <a:xfrm>
-            <a:off x="411480" y="5742432"/>
-            <a:ext cx="8321040" cy="731520"/>
+            <a:off x="128016" y="4919472"/>
+            <a:ext cx="8887968" cy="731520"/>
           </a:xfrm>
           <a:prstGeom prst="roundRect">
             <a:avLst>
@@ -9495,7 +9632,7 @@
             </a:avLst>
           </a:prstGeom>
           <a:solidFill>
-            <a:srgbClr val="EEF2FA"/>
+            <a:srgbClr val="EEF4FF"/>
           </a:solidFill>
           <a:ln>
             <a:noFill/>
@@ -9529,6 +9666,75 @@
                 <a:latin typeface="Arial"/>
               </a:rPr>
               <a:t>Textbook Λ susceptibility recovered as a special case; 70 K contrast C = 0.01387 against the archived 0.01384.</a:t>
+            </a:r>
+          </a:p>
+        </p:txBody>
+      </p:sp>
+      <p:cxnSp>
+        <p:nvCxnSpPr>
+          <p:cNvPr id="7" name="Connector 6"/>
+          <p:cNvCxnSpPr/>
+          <p:nvPr/>
+        </p:nvCxnSpPr>
+        <p:spPr>
+          <a:xfrm>
+            <a:off x="128016" y="5870448"/>
+            <a:ext cx="8887968" cy="0"/>
+          </a:xfrm>
+          <a:prstGeom prst="line">
+            <a:avLst/>
+          </a:prstGeom>
+          <a:ln w="9525">
+            <a:solidFill>
+              <a:srgbClr val="BBBBBB"/>
+            </a:solidFill>
+          </a:ln>
+        </p:spPr>
+        <p:style>
+          <a:lnRef idx="2">
+            <a:schemeClr val="accent1"/>
+          </a:lnRef>
+          <a:fillRef idx="0">
+            <a:schemeClr val="accent1"/>
+          </a:fillRef>
+          <a:effectRef idx="1">
+            <a:schemeClr val="accent1"/>
+          </a:effectRef>
+          <a:fontRef idx="minor">
+            <a:schemeClr val="tx1"/>
+          </a:fontRef>
+        </p:style>
+      </p:cxnSp>
+      <p:sp>
+        <p:nvSpPr>
+          <p:cNvPr id="8" name="RefBand"/>
+          <p:cNvSpPr txBox="1"/>
+          <p:nvPr/>
+        </p:nvSpPr>
+        <p:spPr>
+          <a:xfrm>
+            <a:off x="128016" y="5916168"/>
+            <a:ext cx="8321040" cy="548640"/>
+          </a:xfrm>
+          <a:prstGeom prst="rect">
+            <a:avLst/>
+          </a:prstGeom>
+          <a:noFill/>
+        </p:spPr>
+        <p:txBody>
+          <a:bodyPr wrap="square" anchor="t" lIns="0" rIns="0" tIns="18288" bIns="18288">
+            <a:spAutoFit/>
+          </a:bodyPr>
+          <a:lstStyle/>
+          <a:p>
+            <a:r>
+              <a:rPr sz="1000" b="0" i="1">
+                <a:solidFill>
+                  <a:srgbClr val="555555"/>
+                </a:solidFill>
+                <a:latin typeface="Arial"/>
+              </a:rPr>
+              <a:t>[1] M. Fleischhauer, A. Imamoğlu and J. P. Marangos, Rev. Mod. Phys. 77, 633 (2005).   Benchmark: [4].</a:t>
             </a:r>
           </a:p>
         </p:txBody>
@@ -9559,8 +9765,8 @@
         </p:nvSpPr>
         <p:spPr>
           <a:xfrm>
-            <a:off x="411480" y="292608"/>
-            <a:ext cx="6400800" cy="731520"/>
+            <a:off x="128016" y="100584"/>
+            <a:ext cx="7479792" cy="694944"/>
           </a:xfrm>
           <a:prstGeom prst="rect">
             <a:avLst/>
@@ -9586,9 +9792,43 @@
           </a:p>
         </p:txBody>
       </p:sp>
+      <p:sp>
+        <p:nvSpPr>
+          <p:cNvPr id="3" name="TitleLine"/>
+          <p:cNvSpPr txBox="1"/>
+          <p:nvPr/>
+        </p:nvSpPr>
+        <p:spPr>
+          <a:xfrm>
+            <a:off x="128016" y="859536"/>
+            <a:ext cx="8887968" cy="457200"/>
+          </a:xfrm>
+          <a:prstGeom prst="rect">
+            <a:avLst/>
+          </a:prstGeom>
+          <a:noFill/>
+        </p:spPr>
+        <p:txBody>
+          <a:bodyPr wrap="square" anchor="ctr" lIns="0" rIns="0" tIns="18288" bIns="18288">
+            <a:spAutoFit/>
+          </a:bodyPr>
+          <a:lstStyle/>
+          <a:p>
+            <a:r>
+              <a:rPr sz="2200" b="1" i="0">
+                <a:solidFill>
+                  <a:srgbClr val="1A1A1A"/>
+                </a:solidFill>
+                <a:latin typeface="Arial"/>
+              </a:rPr>
+              <a:t>Result 2: The temperature–field island</a:t>
+            </a:r>
+          </a:p>
+        </p:txBody>
+      </p:sp>
       <p:pic>
         <p:nvPicPr>
-          <p:cNvPr id="3" name="Picture 2" descr="fig3_phase_diagram.png"/>
+          <p:cNvPr id="4" name="Picture 3" descr="sf_island.png"/>
           <p:cNvPicPr>
             <a:picLocks noChangeAspect="1"/>
           </p:cNvPicPr>
@@ -9602,141 +9842,14 @@
         </p:blipFill>
         <p:spPr>
           <a:xfrm>
-            <a:off x="920115" y="1234440"/>
-            <a:ext cx="7303770" cy="3246120"/>
+            <a:off x="128015" y="1801025"/>
+            <a:ext cx="8887968" cy="2707309"/>
           </a:xfrm>
           <a:prstGeom prst="rect">
             <a:avLst/>
           </a:prstGeom>
         </p:spPr>
       </p:pic>
-      <p:sp>
-        <p:nvSpPr>
-          <p:cNvPr id="4" name="TextBox 3"/>
-          <p:cNvSpPr txBox="1"/>
-          <p:nvPr/>
-        </p:nvSpPr>
-        <p:spPr>
-          <a:xfrm>
-            <a:off x="411480" y="4590288"/>
-            <a:ext cx="8321040" cy="1097280"/>
-          </a:xfrm>
-          <a:prstGeom prst="rect">
-            <a:avLst/>
-          </a:prstGeom>
-          <a:noFill/>
-        </p:spPr>
-        <p:txBody>
-          <a:bodyPr wrap="square" anchor="t" lIns="0" rIns="0" tIns="18288" bIns="18288">
-            <a:spAutoFit/>
-          </a:bodyPr>
-          <a:lstStyle/>
-          <a:p>
-            <a:pPr>
-              <a:spcAft>
-                <a:spcPts val="400"/>
-              </a:spcAft>
-            </a:pPr>
-            <a:r>
-              <a:rPr sz="1600" b="0" i="0">
-                <a:solidFill>
-                  <a:srgbClr val="1A1A1A"/>
-                </a:solidFill>
-                <a:latin typeface="Arial"/>
-              </a:rPr>
-              <a:t>•  </a:t>
-            </a:r>
-            <a:r>
-              <a:rPr sz="1600" b="0" i="0">
-                <a:solidFill>
-                  <a:srgbClr val="1A1A1A"/>
-                </a:solidFill>
-                <a:latin typeface="Arial"/>
-              </a:rPr>
-              <a:t>Needs </a:t>
-            </a:r>
-            <a:r>
-              <a:rPr sz="1600" b="1" i="0">
-                <a:solidFill>
-                  <a:srgbClr val="C00000"/>
-                </a:solidFill>
-                <a:latin typeface="Arial"/>
-              </a:rPr>
-              <a:t>B⊥ ≳ 0.15 T</a:t>
-            </a:r>
-            <a:r>
-              <a:rPr sz="1600" b="0" i="0">
-                <a:solidFill>
-                  <a:srgbClr val="1A1A1A"/>
-                </a:solidFill>
-                <a:latin typeface="Arial"/>
-              </a:rPr>
-              <a:t> to open the Raman pathway at all — at zero field the two Λ legs reach orthogonal spin states.</a:t>
-            </a:r>
-          </a:p>
-          <a:p>
-            <a:pPr>
-              <a:spcAft>
-                <a:spcPts val="400"/>
-              </a:spcAft>
-            </a:pPr>
-            <a:r>
-              <a:rPr sz="1600" b="0" i="0">
-                <a:solidFill>
-                  <a:srgbClr val="1A1A1A"/>
-                </a:solidFill>
-                <a:latin typeface="Arial"/>
-              </a:rPr>
-              <a:t>•  </a:t>
-            </a:r>
-            <a:r>
-              <a:rPr sz="1600" b="0" i="0">
-                <a:solidFill>
-                  <a:srgbClr val="1A1A1A"/>
-                </a:solidFill>
-                <a:latin typeface="Arial"/>
-              </a:rPr>
-              <a:t>Closed </a:t>
-            </a:r>
-            <a:r>
-              <a:rPr sz="1600" b="1" i="0">
-                <a:solidFill>
-                  <a:srgbClr val="C00000"/>
-                </a:solidFill>
-                <a:latin typeface="Arial"/>
-              </a:rPr>
-              <a:t>below ≈ 22 K</a:t>
-            </a:r>
-            <a:r>
-              <a:rPr sz="1600" b="0" i="0">
-                <a:solidFill>
-                  <a:srgbClr val="1A1A1A"/>
-                </a:solidFill>
-                <a:latin typeface="Arial"/>
-              </a:rPr>
-              <a:t> by an Autler–Townes crossover, and </a:t>
-            </a:r>
-            <a:r>
-              <a:rPr sz="1600" b="1" i="0">
-                <a:solidFill>
-                  <a:srgbClr val="C00000"/>
-                </a:solidFill>
-                <a:latin typeface="Arial"/>
-              </a:rPr>
-              <a:t>above 90–95 K</a:t>
-            </a:r>
-            <a:r>
-              <a:rPr sz="1600" b="0" i="0">
-                <a:solidFill>
-                  <a:srgbClr val="1A1A1A"/>
-                </a:solidFill>
-                <a:latin typeface="Arial"/>
-              </a:rPr>
-              <a:t> by phonon-driven collapse.</a:t>
-            </a:r>
-          </a:p>
-        </p:txBody>
-      </p:sp>
       <p:sp>
         <p:nvSpPr>
           <p:cNvPr id="5" name="Rounded Rectangle 4"/>
@@ -9745,8 +9858,8 @@
         </p:nvSpPr>
         <p:spPr>
           <a:xfrm>
-            <a:off x="411480" y="5742432"/>
-            <a:ext cx="8321040" cy="731520"/>
+            <a:off x="128016" y="4919472"/>
+            <a:ext cx="8887968" cy="731520"/>
           </a:xfrm>
           <a:prstGeom prst="roundRect">
             <a:avLst>
@@ -9754,7 +9867,7 @@
             </a:avLst>
           </a:prstGeom>
           <a:solidFill>
-            <a:srgbClr val="EEF2FA"/>
+            <a:srgbClr val="EEF4FF"/>
           </a:solidFill>
           <a:ln>
             <a:noFill/>
@@ -9787,7 +9900,76 @@
                 </a:solidFill>
                 <a:latin typeface="Arial"/>
               </a:rPr>
-              <a:t>148 of 240 grid points are classified genuine transparency, 68 control-induced absorption, 3 Autler–Townes, 21 unresolved.</a:t>
+              <a:t>Transparency needs B⊥ ≳ 0.15 T and 22–95 K: 148 of 240 grid points are genuine transparency, 68 induced absorption.</a:t>
+            </a:r>
+          </a:p>
+        </p:txBody>
+      </p:sp>
+      <p:cxnSp>
+        <p:nvCxnSpPr>
+          <p:cNvPr id="6" name="Connector 5"/>
+          <p:cNvCxnSpPr/>
+          <p:nvPr/>
+        </p:nvCxnSpPr>
+        <p:spPr>
+          <a:xfrm>
+            <a:off x="128016" y="5870448"/>
+            <a:ext cx="8887968" cy="0"/>
+          </a:xfrm>
+          <a:prstGeom prst="line">
+            <a:avLst/>
+          </a:prstGeom>
+          <a:ln w="9525">
+            <a:solidFill>
+              <a:srgbClr val="BBBBBB"/>
+            </a:solidFill>
+          </a:ln>
+        </p:spPr>
+        <p:style>
+          <a:lnRef idx="2">
+            <a:schemeClr val="accent1"/>
+          </a:lnRef>
+          <a:fillRef idx="0">
+            <a:schemeClr val="accent1"/>
+          </a:fillRef>
+          <a:effectRef idx="1">
+            <a:schemeClr val="accent1"/>
+          </a:effectRef>
+          <a:fontRef idx="minor">
+            <a:schemeClr val="tx1"/>
+          </a:fontRef>
+        </p:style>
+      </p:cxnSp>
+      <p:sp>
+        <p:nvSpPr>
+          <p:cNvPr id="7" name="RefBand"/>
+          <p:cNvSpPr txBox="1"/>
+          <p:nvPr/>
+        </p:nvSpPr>
+        <p:spPr>
+          <a:xfrm>
+            <a:off x="128016" y="5916168"/>
+            <a:ext cx="8321040" cy="548640"/>
+          </a:xfrm>
+          <a:prstGeom prst="rect">
+            <a:avLst/>
+          </a:prstGeom>
+          <a:noFill/>
+        </p:spPr>
+        <p:txBody>
+          <a:bodyPr wrap="square" anchor="t" lIns="0" rIns="0" tIns="18288" bIns="18288">
+            <a:spAutoFit/>
+          </a:bodyPr>
+          <a:lstStyle/>
+          <a:p>
+            <a:r>
+              <a:rPr sz="1000" b="0" i="1">
+                <a:solidFill>
+                  <a:srgbClr val="555555"/>
+                </a:solidFill>
+                <a:latin typeface="Arial"/>
+              </a:rPr>
+              <a:t>Phonon-induced orbital hopping: [10] K.-M. C. Fu et al., Phys. Rev. Lett. 103, 256404 (2009).   [11] M. L. Goldman et al., Phys. Rev. Lett. 114, 145502 (2015).</a:t>
             </a:r>
           </a:p>
         </p:txBody>
@@ -9818,8 +10000,8 @@
         </p:nvSpPr>
         <p:spPr>
           <a:xfrm>
-            <a:off x="411480" y="292608"/>
-            <a:ext cx="6400800" cy="731520"/>
+            <a:off x="128016" y="100584"/>
+            <a:ext cx="7479792" cy="694944"/>
           </a:xfrm>
           <a:prstGeom prst="rect">
             <a:avLst/>
@@ -9845,9 +10027,43 @@
           </a:p>
         </p:txBody>
       </p:sp>
+      <p:sp>
+        <p:nvSpPr>
+          <p:cNvPr id="3" name="TitleLine"/>
+          <p:cNvSpPr txBox="1"/>
+          <p:nvPr/>
+        </p:nvSpPr>
+        <p:spPr>
+          <a:xfrm>
+            <a:off x="128016" y="859536"/>
+            <a:ext cx="8887968" cy="457200"/>
+          </a:xfrm>
+          <a:prstGeom prst="rect">
+            <a:avLst/>
+          </a:prstGeom>
+          <a:noFill/>
+        </p:spPr>
+        <p:txBody>
+          <a:bodyPr wrap="square" anchor="ctr" lIns="0" rIns="0" tIns="18288" bIns="18288">
+            <a:spAutoFit/>
+          </a:bodyPr>
+          <a:lstStyle/>
+          <a:p>
+            <a:r>
+              <a:rPr sz="2200" b="1" i="0">
+                <a:solidFill>
+                  <a:srgbClr val="1A1A1A"/>
+                </a:solidFill>
+                <a:latin typeface="Arial"/>
+              </a:rPr>
+              <a:t>Result 3: Room temperature</a:t>
+            </a:r>
+          </a:p>
+        </p:txBody>
+      </p:sp>
       <p:pic>
         <p:nvPicPr>
-          <p:cNvPr id="3" name="Picture 2" descr="fig4_contrast_vs_T.png"/>
+          <p:cNvPr id="4" name="Picture 3" descr="sf_contrast_T.png"/>
           <p:cNvPicPr>
             <a:picLocks noChangeAspect="1"/>
           </p:cNvPicPr>
@@ -9861,8 +10077,8 @@
         </p:blipFill>
         <p:spPr>
           <a:xfrm>
-            <a:off x="342900" y="1298448"/>
-            <a:ext cx="5806440" cy="3327801"/>
+            <a:off x="128016" y="1481328"/>
+            <a:ext cx="6217920" cy="3344812"/>
           </a:xfrm>
           <a:prstGeom prst="rect">
             <a:avLst/>
@@ -9871,14 +10087,14 @@
       </p:pic>
       <p:sp>
         <p:nvSpPr>
-          <p:cNvPr id="4" name="Rounded Rectangle 3"/>
+          <p:cNvPr id="5" name="Rounded Rectangle 4"/>
           <p:cNvSpPr/>
           <p:nvPr/>
         </p:nvSpPr>
         <p:spPr>
           <a:xfrm>
-            <a:off x="6355080" y="1417320"/>
-            <a:ext cx="2377440" cy="3703320"/>
+            <a:off x="6455664" y="1554480"/>
+            <a:ext cx="2560320" cy="3108960"/>
           </a:xfrm>
           <a:prstGeom prst="roundRect">
             <a:avLst>
@@ -9886,7 +10102,7 @@
             </a:avLst>
           </a:prstGeom>
           <a:solidFill>
-            <a:srgbClr val="EEF2FA"/>
+            <a:srgbClr val="EEF4FF"/>
           </a:solidFill>
           <a:ln>
             <a:noFill/>
@@ -9908,7 +10124,7 @@
           </a:fontRef>
         </p:style>
         <p:txBody>
-          <a:bodyPr rtlCol="0" anchor="ctr" wrap="square" lIns="128016" rIns="128016" tIns="91440" bIns="91440"/>
+          <a:bodyPr rtlCol="0" anchor="ctr" wrap="square" lIns="128016" rIns="128016" tIns="82296" bIns="82296"/>
           <a:lstStyle/>
           <a:p>
             <a:pPr algn="ctr"/>
@@ -9925,7 +10141,7 @@
           <a:p>
             <a:pPr>
               <a:spcBef>
-                <a:spcPts val="900"/>
+                <a:spcPts val="700"/>
               </a:spcBef>
             </a:pPr>
             <a:r>
@@ -9961,7 +10177,7 @@
           <a:p>
             <a:pPr>
               <a:spcBef>
-                <a:spcPts val="900"/>
+                <a:spcPts val="700"/>
               </a:spcBef>
             </a:pPr>
             <a:r>
@@ -9997,7 +10213,7 @@
           <a:p>
             <a:pPr>
               <a:spcBef>
-                <a:spcPts val="900"/>
+                <a:spcPts val="700"/>
               </a:spcBef>
             </a:pPr>
             <a:r>
@@ -10033,7 +10249,7 @@
           <a:p>
             <a:pPr>
               <a:spcBef>
-                <a:spcPts val="900"/>
+                <a:spcPts val="700"/>
               </a:spcBef>
             </a:pPr>
             <a:r>
@@ -10070,14 +10286,14 @@
       </p:sp>
       <p:sp>
         <p:nvSpPr>
-          <p:cNvPr id="5" name="Rounded Rectangle 4"/>
+          <p:cNvPr id="6" name="Rounded Rectangle 5"/>
           <p:cNvSpPr/>
           <p:nvPr/>
         </p:nvSpPr>
         <p:spPr>
           <a:xfrm>
-            <a:off x="411480" y="5742432"/>
-            <a:ext cx="8321040" cy="731520"/>
+            <a:off x="128016" y="4919472"/>
+            <a:ext cx="8887968" cy="731520"/>
           </a:xfrm>
           <a:prstGeom prst="roundRect">
             <a:avLst>
@@ -10085,7 +10301,7 @@
             </a:avLst>
           </a:prstGeom>
           <a:solidFill>
-            <a:srgbClr val="EEF2FA"/>
+            <a:srgbClr val="EEF4FF"/>
           </a:solidFill>
           <a:ln>
             <a:noFill/>
@@ -10119,6 +10335,75 @@
                 <a:latin typeface="Arial"/>
               </a:rPr>
               <a:t>At 300 K the residual contrast is 1.1×10⁻⁹ and of the wrong sign; no integration time reaches SNR = 5.</a:t>
+            </a:r>
+          </a:p>
+        </p:txBody>
+      </p:sp>
+      <p:cxnSp>
+        <p:nvCxnSpPr>
+          <p:cNvPr id="7" name="Connector 6"/>
+          <p:cNvCxnSpPr/>
+          <p:nvPr/>
+        </p:nvCxnSpPr>
+        <p:spPr>
+          <a:xfrm>
+            <a:off x="128016" y="5870448"/>
+            <a:ext cx="8887968" cy="0"/>
+          </a:xfrm>
+          <a:prstGeom prst="line">
+            <a:avLst/>
+          </a:prstGeom>
+          <a:ln w="9525">
+            <a:solidFill>
+              <a:srgbClr val="BBBBBB"/>
+            </a:solidFill>
+          </a:ln>
+        </p:spPr>
+        <p:style>
+          <a:lnRef idx="2">
+            <a:schemeClr val="accent1"/>
+          </a:lnRef>
+          <a:fillRef idx="0">
+            <a:schemeClr val="accent1"/>
+          </a:fillRef>
+          <a:effectRef idx="1">
+            <a:schemeClr val="accent1"/>
+          </a:effectRef>
+          <a:fontRef idx="minor">
+            <a:schemeClr val="tx1"/>
+          </a:fontRef>
+        </p:style>
+      </p:cxnSp>
+      <p:sp>
+        <p:nvSpPr>
+          <p:cNvPr id="8" name="RefBand"/>
+          <p:cNvSpPr txBox="1"/>
+          <p:nvPr/>
+        </p:nvSpPr>
+        <p:spPr>
+          <a:xfrm>
+            <a:off x="128016" y="5916168"/>
+            <a:ext cx="8321040" cy="548640"/>
+          </a:xfrm>
+          <a:prstGeom prst="rect">
+            <a:avLst/>
+          </a:prstGeom>
+          <a:noFill/>
+        </p:spPr>
+        <p:txBody>
+          <a:bodyPr wrap="square" anchor="t" lIns="0" rIns="0" tIns="18288" bIns="18288">
+            <a:spAutoFit/>
+          </a:bodyPr>
+          <a:lstStyle/>
+          <a:p>
+            <a:r>
+              <a:rPr sz="1000" b="0" i="1">
+                <a:solidFill>
+                  <a:srgbClr val="555555"/>
+                </a:solidFill>
+                <a:latin typeface="Arial"/>
+              </a:rPr>
+              <a:t>³E structure: [3] M. W. Doherty et al., Phys. Rep. 528, 1 (2013).   Contrasts and detection chain: this work.</a:t>
             </a:r>
           </a:p>
         </p:txBody>
@@ -10149,8 +10434,8 @@
         </p:nvSpPr>
         <p:spPr>
           <a:xfrm>
-            <a:off x="411480" y="292608"/>
-            <a:ext cx="6400800" cy="731520"/>
+            <a:off x="128016" y="100584"/>
+            <a:ext cx="7479792" cy="694944"/>
           </a:xfrm>
           <a:prstGeom prst="rect">
             <a:avLst/>
@@ -10176,9 +10461,43 @@
           </a:p>
         </p:txBody>
       </p:sp>
+      <p:sp>
+        <p:nvSpPr>
+          <p:cNvPr id="3" name="TitleLine"/>
+          <p:cNvSpPr txBox="1"/>
+          <p:nvPr/>
+        </p:nvSpPr>
+        <p:spPr>
+          <a:xfrm>
+            <a:off x="128016" y="859536"/>
+            <a:ext cx="8887968" cy="457200"/>
+          </a:xfrm>
+          <a:prstGeom prst="rect">
+            <a:avLst/>
+          </a:prstGeom>
+          <a:noFill/>
+        </p:spPr>
+        <p:txBody>
+          <a:bodyPr wrap="square" anchor="ctr" lIns="0" rIns="0" tIns="18288" bIns="18288">
+            <a:spAutoFit/>
+          </a:bodyPr>
+          <a:lstStyle/>
+          <a:p>
+            <a:r>
+              <a:rPr sz="2200" b="1" i="0">
+                <a:solidFill>
+                  <a:srgbClr val="1A1A1A"/>
+                </a:solidFill>
+                <a:latin typeface="Arial"/>
+              </a:rPr>
+              <a:t>Result 4: Sign reversal at 103 K</a:t>
+            </a:r>
+          </a:p>
+        </p:txBody>
+      </p:sp>
       <p:pic>
         <p:nvPicPr>
-          <p:cNvPr id="3" name="Picture 2" descr="fig2_spectra.png"/>
+          <p:cNvPr id="4" name="Picture 3" descr="sf_lineshape.png"/>
           <p:cNvPicPr>
             <a:picLocks noChangeAspect="1"/>
           </p:cNvPicPr>
@@ -10192,8 +10511,8 @@
         </p:blipFill>
         <p:spPr>
           <a:xfrm>
-            <a:off x="1885950" y="1261872"/>
-            <a:ext cx="5372100" cy="2148840"/>
+            <a:off x="132847" y="1481328"/>
+            <a:ext cx="4379456" cy="3346704"/>
           </a:xfrm>
           <a:prstGeom prst="rect">
             <a:avLst/>
@@ -10202,14 +10521,14 @@
       </p:pic>
       <p:sp>
         <p:nvSpPr>
-          <p:cNvPr id="4" name="Rounded Rectangle 3"/>
+          <p:cNvPr id="5" name="Rounded Rectangle 4"/>
           <p:cNvSpPr/>
           <p:nvPr/>
         </p:nvSpPr>
         <p:spPr>
           <a:xfrm>
-            <a:off x="411480" y="3611880"/>
-            <a:ext cx="3977639" cy="2057400"/>
+            <a:off x="4700016" y="1481328"/>
+            <a:ext cx="4315968" cy="1572768"/>
           </a:xfrm>
           <a:prstGeom prst="roundRect">
             <a:avLst>
@@ -10217,7 +10536,7 @@
             </a:avLst>
           </a:prstGeom>
           <a:solidFill>
-            <a:srgbClr val="EEF2FA"/>
+            <a:srgbClr val="EEF4FF"/>
           </a:solidFill>
           <a:ln>
             <a:noFill/>
@@ -10239,7 +10558,7 @@
           </a:fontRef>
         </p:style>
         <p:txBody>
-          <a:bodyPr rtlCol="0" anchor="ctr" wrap="square" lIns="128016" rIns="128016" tIns="91440" bIns="91440"/>
+          <a:bodyPr rtlCol="0" anchor="ctr" wrap="square" lIns="128016" rIns="128016" tIns="82296" bIns="82296"/>
           <a:lstStyle/>
           <a:p>
             <a:pPr algn="ctr"/>
@@ -10285,6 +10604,61 @@
               <a:t>•  So it directly tests the interference account</a:t>
             </a:r>
           </a:p>
+        </p:txBody>
+      </p:sp>
+      <p:sp>
+        <p:nvSpPr>
+          <p:cNvPr id="6" name="Rounded Rectangle 5"/>
+          <p:cNvSpPr/>
+          <p:nvPr/>
+        </p:nvSpPr>
+        <p:spPr>
+          <a:xfrm>
+            <a:off x="4700016" y="3255264"/>
+            <a:ext cx="4315968" cy="1572768"/>
+          </a:xfrm>
+          <a:prstGeom prst="roundRect">
+            <a:avLst>
+              <a:gd name="adj" fmla="val 6000"/>
+            </a:avLst>
+          </a:prstGeom>
+          <a:solidFill>
+            <a:srgbClr val="F6F8FC"/>
+          </a:solidFill>
+          <a:ln>
+            <a:noFill/>
+          </a:ln>
+          <a:effectLst/>
+        </p:spPr>
+        <p:style>
+          <a:lnRef idx="1">
+            <a:schemeClr val="accent1"/>
+          </a:lnRef>
+          <a:fillRef idx="3">
+            <a:schemeClr val="accent1"/>
+          </a:fillRef>
+          <a:effectRef idx="2">
+            <a:schemeClr val="accent1"/>
+          </a:effectRef>
+          <a:fontRef idx="minor">
+            <a:schemeClr val="lt1"/>
+          </a:fontRef>
+        </p:style>
+        <p:txBody>
+          <a:bodyPr rtlCol="0" anchor="ctr" wrap="square" lIns="128016" rIns="128016" tIns="82296" bIns="82296"/>
+          <a:lstStyle/>
+          <a:p>
+            <a:pPr algn="ctr"/>
+            <a:r>
+              <a:rPr sz="1700" b="1" i="0">
+                <a:solidFill>
+                  <a:srgbClr val="1C3077"/>
+                </a:solidFill>
+                <a:latin typeface="Arial"/>
+              </a:rPr>
+              <a:t>Where it happens</a:t>
+            </a:r>
+          </a:p>
           <a:p>
             <a:pPr>
               <a:spcBef>
@@ -10298,29 +10672,54 @@
                 </a:solidFill>
                 <a:latin typeface="Arial"/>
               </a:rPr>
-              <a:t>•  Detectable: 1.6 s at 105 K</a:t>
-            </a:r>
-          </a:p>
-        </p:txBody>
-      </p:sp>
-      <p:sp>
-        <p:nvSpPr>
-          <p:cNvPr id="5" name="Rounded Rectangle 4"/>
+              <a:t>T_sign = </a:t>
+            </a:r>
+            <a:r>
+              <a:rPr sz="1800" b="1" i="0">
+                <a:solidFill>
+                  <a:srgbClr val="C00000"/>
+                </a:solidFill>
+                <a:latin typeface="Arial"/>
+              </a:rPr>
+              <a:t>103 [97, 108] K</a:t>
+            </a:r>
+          </a:p>
+          <a:p>
+            <a:pPr>
+              <a:spcBef>
+                <a:spcPts val="400"/>
+              </a:spcBef>
+            </a:pPr>
+            <a:r>
+              <a:rPr sz="1600" b="0" i="0">
+                <a:solidFill>
+                  <a:srgbClr val="555555"/>
+                </a:solidFill>
+                <a:latin typeface="Arial"/>
+              </a:rPr>
+              <a:t>full Liouvillian, 68 % interval, 80 samples</a:t>
+            </a:r>
+          </a:p>
+        </p:txBody>
+      </p:sp>
+      <p:sp>
+        <p:nvSpPr>
+          <p:cNvPr id="7" name="Rounded Rectangle 6"/>
           <p:cNvSpPr/>
           <p:nvPr/>
         </p:nvSpPr>
         <p:spPr>
           <a:xfrm>
-            <a:off x="4663440" y="3611880"/>
-            <a:ext cx="3977639" cy="2057400"/>
+            <a:off x="128016" y="4919472"/>
+            <a:ext cx="8887968" cy="731520"/>
           </a:xfrm>
           <a:prstGeom prst="roundRect">
             <a:avLst>
-              <a:gd name="adj" fmla="val 6000"/>
+              <a:gd name="adj" fmla="val 12000"/>
             </a:avLst>
           </a:prstGeom>
           <a:solidFill>
-            <a:srgbClr val="F7F9FC"/>
+            <a:srgbClr val="EEF4FF"/>
           </a:solidFill>
           <a:ln>
             <a:noFill/>
@@ -10342,125 +10741,87 @@
           </a:fontRef>
         </p:style>
         <p:txBody>
-          <a:bodyPr rtlCol="0" anchor="ctr" wrap="square" lIns="128016" rIns="128016" tIns="91440" bIns="91440"/>
+          <a:bodyPr rtlCol="0" anchor="ctr" wrap="square" lIns="146304" rIns="146304" tIns="36576" bIns="36576"/>
           <a:lstStyle/>
           <a:p>
-            <a:pPr algn="ctr"/>
-            <a:r>
-              <a:rPr sz="1700" b="1" i="0">
-                <a:solidFill>
-                  <a:srgbClr val="1C3077"/>
-                </a:solidFill>
-                <a:latin typeface="Arial"/>
-              </a:rPr>
-              <a:t>Where it happens</a:t>
-            </a:r>
-          </a:p>
-          <a:p>
-            <a:pPr>
-              <a:spcBef>
-                <a:spcPts val="800"/>
-              </a:spcBef>
-            </a:pPr>
-            <a:r>
-              <a:rPr sz="1600" b="0" i="0">
+            <a:pPr algn="l"/>
+            <a:r>
+              <a:rPr sz="2000" b="0" i="0">
                 <a:solidFill>
                   <a:srgbClr val="1A1A1A"/>
                 </a:solidFill>
                 <a:latin typeface="Arial"/>
               </a:rPr>
-              <a:t>T_sign = </a:t>
-            </a:r>
-            <a:r>
-              <a:rPr sz="1800" b="1" i="0">
-                <a:solidFill>
-                  <a:srgbClr val="C00000"/>
-                </a:solidFill>
-                <a:latin typeface="Arial"/>
-              </a:rPr>
-              <a:t>103 [97, 108] K</a:t>
-            </a:r>
-          </a:p>
-          <a:p>
-            <a:pPr>
-              <a:spcBef>
-                <a:spcPts val="600"/>
-              </a:spcBef>
-            </a:pPr>
-            <a:r>
-              <a:rPr sz="1600" b="0" i="0">
-                <a:solidFill>
-                  <a:srgbClr val="555555"/>
-                </a:solidFill>
-                <a:latin typeface="Arial"/>
-              </a:rPr>
-              <a:t>full Liouvillian, 68 % interval,</a:t>
-            </a:r>
-          </a:p>
-          <a:p>
-            <a:r>
-              <a:rPr sz="1600" b="0" i="0">
-                <a:solidFill>
-                  <a:srgbClr val="555555"/>
-                </a:solidFill>
-                <a:latin typeface="Arial"/>
-              </a:rPr>
-              <a:t>80 Monte-Carlo samples</a:t>
-            </a:r>
-          </a:p>
-        </p:txBody>
-      </p:sp>
-      <p:sp>
-        <p:nvSpPr>
-          <p:cNvPr id="6" name="Rounded Rectangle 5"/>
-          <p:cNvSpPr/>
+              <a:t>Peak contrast turns negative between 100 and 105 K above 0.15 T; at 105 K the transmission signal is −1.2×10⁻⁵.</a:t>
+            </a:r>
+          </a:p>
+        </p:txBody>
+      </p:sp>
+      <p:cxnSp>
+        <p:nvCxnSpPr>
+          <p:cNvPr id="8" name="Connector 7"/>
+          <p:cNvCxnSpPr/>
           <p:nvPr/>
-        </p:nvSpPr>
-        <p:spPr>
-          <a:xfrm>
-            <a:off x="411480" y="5742432"/>
-            <a:ext cx="8321040" cy="731520"/>
-          </a:xfrm>
-          <a:prstGeom prst="roundRect">
-            <a:avLst>
-              <a:gd name="adj" fmla="val 12000"/>
-            </a:avLst>
-          </a:prstGeom>
-          <a:solidFill>
-            <a:srgbClr val="EEF2FA"/>
-          </a:solidFill>
-          <a:ln>
-            <a:noFill/>
+        </p:nvCxnSpPr>
+        <p:spPr>
+          <a:xfrm>
+            <a:off x="128016" y="5870448"/>
+            <a:ext cx="8887968" cy="0"/>
+          </a:xfrm>
+          <a:prstGeom prst="line">
+            <a:avLst/>
+          </a:prstGeom>
+          <a:ln w="9525">
+            <a:solidFill>
+              <a:srgbClr val="BBBBBB"/>
+            </a:solidFill>
           </a:ln>
-          <a:effectLst/>
         </p:spPr>
         <p:style>
-          <a:lnRef idx="1">
+          <a:lnRef idx="2">
             <a:schemeClr val="accent1"/>
           </a:lnRef>
-          <a:fillRef idx="3">
+          <a:fillRef idx="0">
             <a:schemeClr val="accent1"/>
           </a:fillRef>
-          <a:effectRef idx="2">
+          <a:effectRef idx="1">
             <a:schemeClr val="accent1"/>
           </a:effectRef>
           <a:fontRef idx="minor">
-            <a:schemeClr val="lt1"/>
+            <a:schemeClr val="tx1"/>
           </a:fontRef>
         </p:style>
-        <p:txBody>
-          <a:bodyPr rtlCol="0" anchor="ctr" wrap="square" lIns="146304" rIns="146304" tIns="36576" bIns="36576"/>
+      </p:cxnSp>
+      <p:sp>
+        <p:nvSpPr>
+          <p:cNvPr id="9" name="RefBand"/>
+          <p:cNvSpPr txBox="1"/>
+          <p:nvPr/>
+        </p:nvSpPr>
+        <p:spPr>
+          <a:xfrm>
+            <a:off x="128016" y="5916168"/>
+            <a:ext cx="8321040" cy="548640"/>
+          </a:xfrm>
+          <a:prstGeom prst="rect">
+            <a:avLst/>
+          </a:prstGeom>
+          <a:noFill/>
+        </p:spPr>
+        <p:txBody>
+          <a:bodyPr wrap="square" anchor="t" lIns="0" rIns="0" tIns="18288" bIns="18288">
+            <a:spAutoFit/>
+          </a:bodyPr>
           <a:lstStyle/>
           <a:p>
-            <a:pPr algn="l"/>
-            <a:r>
-              <a:rPr sz="2000" b="0" i="0">
-                <a:solidFill>
-                  <a:srgbClr val="1A1A1A"/>
-                </a:solidFill>
-                <a:latin typeface="Arial"/>
-              </a:rPr>
-              <a:t>Peak contrast turns negative between 100 and 105 K above 0.15 T; at 105 K the transmission signal is −1.2×10⁻⁵.</a:t>
+            <a:r>
+              <a:rPr sz="1000" b="0" i="1">
+                <a:solidFill>
+                  <a:srgbClr val="555555"/>
+                </a:solidFill>
+                <a:latin typeface="Arial"/>
+              </a:rPr>
+              <a:t>Induced absorption in Λ systems: [12] P. Valente, H. Failache and A. Lezama, Phys. Rev. A 67, 013806 (2003).</a:t>
             </a:r>
           </a:p>
         </p:txBody>
@@ -10491,8 +10852,8 @@
         </p:nvSpPr>
         <p:spPr>
           <a:xfrm>
-            <a:off x="411480" y="292608"/>
-            <a:ext cx="6400800" cy="731520"/>
+            <a:off x="128016" y="100584"/>
+            <a:ext cx="7479792" cy="694944"/>
           </a:xfrm>
           <a:prstGeom prst="rect">
             <a:avLst/>
@@ -10520,14 +10881,48 @@
       </p:sp>
       <p:sp>
         <p:nvSpPr>
-          <p:cNvPr id="3" name="Rounded Rectangle 2"/>
+          <p:cNvPr id="3" name="TitleLine"/>
+          <p:cNvSpPr txBox="1"/>
+          <p:nvPr/>
+        </p:nvSpPr>
+        <p:spPr>
+          <a:xfrm>
+            <a:off x="128016" y="859536"/>
+            <a:ext cx="8887968" cy="457200"/>
+          </a:xfrm>
+          <a:prstGeom prst="rect">
+            <a:avLst/>
+          </a:prstGeom>
+          <a:noFill/>
+        </p:spPr>
+        <p:txBody>
+          <a:bodyPr wrap="square" anchor="ctr" lIns="0" rIns="0" tIns="18288" bIns="18288">
+            <a:spAutoFit/>
+          </a:bodyPr>
+          <a:lstStyle/>
+          <a:p>
+            <a:r>
+              <a:rPr sz="2200" b="1" i="0">
+                <a:solidFill>
+                  <a:srgbClr val="1A1A1A"/>
+                </a:solidFill>
+                <a:latin typeface="Arial"/>
+              </a:rPr>
+              <a:t>Result 5: The role of the transverse field</a:t>
+            </a:r>
+          </a:p>
+        </p:txBody>
+      </p:sp>
+      <p:sp>
+        <p:nvSpPr>
+          <p:cNvPr id="4" name="Rounded Rectangle 3"/>
           <p:cNvSpPr/>
           <p:nvPr/>
         </p:nvSpPr>
         <p:spPr>
           <a:xfrm>
-            <a:off x="411480" y="1371600"/>
-            <a:ext cx="1600200" cy="603504"/>
+            <a:off x="128016" y="1481328"/>
+            <a:ext cx="1554480" cy="566928"/>
           </a:xfrm>
           <a:prstGeom prst="roundRect">
             <a:avLst>
@@ -10557,7 +10952,7 @@
           </a:fontRef>
         </p:style>
         <p:txBody>
-          <a:bodyPr rtlCol="0" anchor="ctr" wrap="square" lIns="128016" rIns="128016" tIns="91440" bIns="91440"/>
+          <a:bodyPr rtlCol="0" anchor="ctr" wrap="square" lIns="128016" rIns="128016" tIns="82296" bIns="82296"/>
           <a:lstStyle/>
           <a:p>
             <a:pPr algn="ctr"/>
@@ -10575,14 +10970,14 @@
       </p:sp>
       <p:sp>
         <p:nvSpPr>
-          <p:cNvPr id="4" name="Rounded Rectangle 3"/>
+          <p:cNvPr id="5" name="Rounded Rectangle 4"/>
           <p:cNvSpPr/>
           <p:nvPr/>
         </p:nvSpPr>
         <p:spPr>
           <a:xfrm>
-            <a:off x="2103120" y="1371600"/>
-            <a:ext cx="1508760" cy="603504"/>
+            <a:off x="1773936" y="1481328"/>
+            <a:ext cx="1463040" cy="566928"/>
           </a:xfrm>
           <a:prstGeom prst="roundRect">
             <a:avLst>
@@ -10612,7 +11007,7 @@
           </a:fontRef>
         </p:style>
         <p:txBody>
-          <a:bodyPr rtlCol="0" anchor="ctr" wrap="square" lIns="128016" rIns="128016" tIns="91440" bIns="91440"/>
+          <a:bodyPr rtlCol="0" anchor="ctr" wrap="square" lIns="128016" rIns="128016" tIns="82296" bIns="82296"/>
           <a:lstStyle/>
           <a:p>
             <a:pPr algn="ctr"/>
@@ -10630,14 +11025,14 @@
       </p:sp>
       <p:sp>
         <p:nvSpPr>
-          <p:cNvPr id="5" name="Rounded Rectangle 4"/>
+          <p:cNvPr id="6" name="Rounded Rectangle 5"/>
           <p:cNvSpPr/>
           <p:nvPr/>
         </p:nvSpPr>
         <p:spPr>
           <a:xfrm>
-            <a:off x="3703320" y="1371600"/>
-            <a:ext cx="2606040" cy="603504"/>
+            <a:off x="3328416" y="1481328"/>
+            <a:ext cx="2331720" cy="566928"/>
           </a:xfrm>
           <a:prstGeom prst="roundRect">
             <a:avLst>
@@ -10667,7 +11062,7 @@
           </a:fontRef>
         </p:style>
         <p:txBody>
-          <a:bodyPr rtlCol="0" anchor="ctr" wrap="square" lIns="128016" rIns="128016" tIns="91440" bIns="91440"/>
+          <a:bodyPr rtlCol="0" anchor="ctr" wrap="square" lIns="128016" rIns="128016" tIns="82296" bIns="82296"/>
           <a:lstStyle/>
           <a:p>
             <a:pPr algn="ctr"/>
@@ -10685,14 +11080,14 @@
       </p:sp>
       <p:sp>
         <p:nvSpPr>
-          <p:cNvPr id="6" name="Rounded Rectangle 5"/>
+          <p:cNvPr id="7" name="Rounded Rectangle 6"/>
           <p:cNvSpPr/>
           <p:nvPr/>
         </p:nvSpPr>
         <p:spPr>
           <a:xfrm>
-            <a:off x="411480" y="2029967"/>
-            <a:ext cx="1600200" cy="603504"/>
+            <a:off x="128016" y="2103120"/>
+            <a:ext cx="1554480" cy="566928"/>
           </a:xfrm>
           <a:prstGeom prst="roundRect">
             <a:avLst>
@@ -10700,7 +11095,7 @@
             </a:avLst>
           </a:prstGeom>
           <a:solidFill>
-            <a:srgbClr val="EEF2FA"/>
+            <a:srgbClr val="EEF4FF"/>
           </a:solidFill>
           <a:ln>
             <a:noFill/>
@@ -10722,7 +11117,7 @@
           </a:fontRef>
         </p:style>
         <p:txBody>
-          <a:bodyPr rtlCol="0" anchor="ctr" wrap="square" lIns="128016" rIns="128016" tIns="91440" bIns="91440"/>
+          <a:bodyPr rtlCol="0" anchor="ctr" wrap="square" lIns="128016" rIns="128016" tIns="82296" bIns="82296"/>
           <a:lstStyle/>
           <a:p>
             <a:pPr algn="ctr"/>
@@ -10740,14 +11135,14 @@
       </p:sp>
       <p:sp>
         <p:nvSpPr>
-          <p:cNvPr id="7" name="Rounded Rectangle 6"/>
+          <p:cNvPr id="8" name="Rounded Rectangle 7"/>
           <p:cNvSpPr/>
           <p:nvPr/>
         </p:nvSpPr>
         <p:spPr>
           <a:xfrm>
-            <a:off x="2103120" y="2029967"/>
-            <a:ext cx="1508760" cy="603504"/>
+            <a:off x="1773936" y="2103120"/>
+            <a:ext cx="1463040" cy="566928"/>
           </a:xfrm>
           <a:prstGeom prst="roundRect">
             <a:avLst>
@@ -10755,7 +11150,7 @@
             </a:avLst>
           </a:prstGeom>
           <a:solidFill>
-            <a:srgbClr val="EEF2FA"/>
+            <a:srgbClr val="EEF4FF"/>
           </a:solidFill>
           <a:ln>
             <a:noFill/>
@@ -10777,7 +11172,7 @@
           </a:fontRef>
         </p:style>
         <p:txBody>
-          <a:bodyPr rtlCol="0" anchor="ctr" wrap="square" lIns="128016" rIns="128016" tIns="91440" bIns="91440"/>
+          <a:bodyPr rtlCol="0" anchor="ctr" wrap="square" lIns="128016" rIns="128016" tIns="82296" bIns="82296"/>
           <a:lstStyle/>
           <a:p>
             <a:pPr algn="ctr"/>
@@ -10795,14 +11190,14 @@
       </p:sp>
       <p:sp>
         <p:nvSpPr>
-          <p:cNvPr id="8" name="Rounded Rectangle 7"/>
+          <p:cNvPr id="9" name="Rounded Rectangle 8"/>
           <p:cNvSpPr/>
           <p:nvPr/>
         </p:nvSpPr>
         <p:spPr>
           <a:xfrm>
-            <a:off x="3703320" y="2029967"/>
-            <a:ext cx="2606040" cy="603504"/>
+            <a:off x="3328416" y="2103120"/>
+            <a:ext cx="2331720" cy="566928"/>
           </a:xfrm>
           <a:prstGeom prst="roundRect">
             <a:avLst>
@@ -10810,7 +11205,7 @@
             </a:avLst>
           </a:prstGeom>
           <a:solidFill>
-            <a:srgbClr val="EEF2FA"/>
+            <a:srgbClr val="EEF4FF"/>
           </a:solidFill>
           <a:ln>
             <a:noFill/>
@@ -10832,7 +11227,7 @@
           </a:fontRef>
         </p:style>
         <p:txBody>
-          <a:bodyPr rtlCol="0" anchor="ctr" wrap="square" lIns="128016" rIns="128016" tIns="91440" bIns="91440"/>
+          <a:bodyPr rtlCol="0" anchor="ctr" wrap="square" lIns="128016" rIns="128016" tIns="82296" bIns="82296"/>
           <a:lstStyle/>
           <a:p>
             <a:pPr algn="ctr"/>
@@ -10850,14 +11245,14 @@
       </p:sp>
       <p:sp>
         <p:nvSpPr>
-          <p:cNvPr id="9" name="Rounded Rectangle 8"/>
+          <p:cNvPr id="10" name="Rounded Rectangle 9"/>
           <p:cNvSpPr/>
           <p:nvPr/>
         </p:nvSpPr>
         <p:spPr>
           <a:xfrm>
-            <a:off x="411480" y="2688336"/>
-            <a:ext cx="1600200" cy="603504"/>
+            <a:off x="128016" y="2724912"/>
+            <a:ext cx="1554480" cy="566928"/>
           </a:xfrm>
           <a:prstGeom prst="roundRect">
             <a:avLst>
@@ -10889,7 +11284,7 @@
           </a:fontRef>
         </p:style>
         <p:txBody>
-          <a:bodyPr rtlCol="0" anchor="ctr" wrap="square" lIns="128016" rIns="128016" tIns="91440" bIns="91440"/>
+          <a:bodyPr rtlCol="0" anchor="ctr" wrap="square" lIns="128016" rIns="128016" tIns="82296" bIns="82296"/>
           <a:lstStyle/>
           <a:p>
             <a:pPr algn="ctr"/>
@@ -10907,14 +11302,14 @@
       </p:sp>
       <p:sp>
         <p:nvSpPr>
-          <p:cNvPr id="10" name="Rounded Rectangle 9"/>
+          <p:cNvPr id="11" name="Rounded Rectangle 10"/>
           <p:cNvSpPr/>
           <p:nvPr/>
         </p:nvSpPr>
         <p:spPr>
           <a:xfrm>
-            <a:off x="2103120" y="2688336"/>
-            <a:ext cx="1508760" cy="603504"/>
+            <a:off x="1773936" y="2724912"/>
+            <a:ext cx="1463040" cy="566928"/>
           </a:xfrm>
           <a:prstGeom prst="roundRect">
             <a:avLst>
@@ -10946,7 +11341,7 @@
           </a:fontRef>
         </p:style>
         <p:txBody>
-          <a:bodyPr rtlCol="0" anchor="ctr" wrap="square" lIns="128016" rIns="128016" tIns="91440" bIns="91440"/>
+          <a:bodyPr rtlCol="0" anchor="ctr" wrap="square" lIns="128016" rIns="128016" tIns="82296" bIns="82296"/>
           <a:lstStyle/>
           <a:p>
             <a:pPr algn="ctr"/>
@@ -10964,14 +11359,14 @@
       </p:sp>
       <p:sp>
         <p:nvSpPr>
-          <p:cNvPr id="11" name="Rounded Rectangle 10"/>
+          <p:cNvPr id="12" name="Rounded Rectangle 11"/>
           <p:cNvSpPr/>
           <p:nvPr/>
         </p:nvSpPr>
         <p:spPr>
           <a:xfrm>
-            <a:off x="3703320" y="2688336"/>
-            <a:ext cx="2606040" cy="603504"/>
+            <a:off x="3328416" y="2724912"/>
+            <a:ext cx="2331720" cy="566928"/>
           </a:xfrm>
           <a:prstGeom prst="roundRect">
             <a:avLst>
@@ -11003,14 +11398,14 @@
           </a:fontRef>
         </p:style>
         <p:txBody>
-          <a:bodyPr rtlCol="0" anchor="ctr" wrap="square" lIns="128016" rIns="128016" tIns="91440" bIns="91440"/>
+          <a:bodyPr rtlCol="0" anchor="ctr" wrap="square" lIns="128016" rIns="128016" tIns="82296" bIns="82296"/>
           <a:lstStyle/>
           <a:p>
             <a:pPr algn="ctr"/>
             <a:r>
               <a:rPr sz="1600" b="0" i="0">
                 <a:solidFill>
-                  <a:srgbClr val="C00000"/>
+                  <a:srgbClr val="1A1A1A"/>
                 </a:solidFill>
                 <a:latin typeface="Arial"/>
               </a:rPr>
@@ -11021,14 +11416,14 @@
       </p:sp>
       <p:sp>
         <p:nvSpPr>
-          <p:cNvPr id="12" name="Rounded Rectangle 11"/>
+          <p:cNvPr id="13" name="Rounded Rectangle 12"/>
           <p:cNvSpPr/>
           <p:nvPr/>
         </p:nvSpPr>
         <p:spPr>
           <a:xfrm>
-            <a:off x="411480" y="3346704"/>
-            <a:ext cx="1600200" cy="603504"/>
+            <a:off x="128016" y="3346704"/>
+            <a:ext cx="1554480" cy="566928"/>
           </a:xfrm>
           <a:prstGeom prst="roundRect">
             <a:avLst>
@@ -11036,7 +11431,7 @@
             </a:avLst>
           </a:prstGeom>
           <a:solidFill>
-            <a:srgbClr val="EEF2FA"/>
+            <a:srgbClr val="EEF4FF"/>
           </a:solidFill>
           <a:ln>
             <a:noFill/>
@@ -11058,7 +11453,7 @@
           </a:fontRef>
         </p:style>
         <p:txBody>
-          <a:bodyPr rtlCol="0" anchor="ctr" wrap="square" lIns="128016" rIns="128016" tIns="91440" bIns="91440"/>
+          <a:bodyPr rtlCol="0" anchor="ctr" wrap="square" lIns="128016" rIns="128016" tIns="82296" bIns="82296"/>
           <a:lstStyle/>
           <a:p>
             <a:pPr algn="ctr"/>
@@ -11076,14 +11471,14 @@
       </p:sp>
       <p:sp>
         <p:nvSpPr>
-          <p:cNvPr id="13" name="Rounded Rectangle 12"/>
+          <p:cNvPr id="14" name="Rounded Rectangle 13"/>
           <p:cNvSpPr/>
           <p:nvPr/>
         </p:nvSpPr>
         <p:spPr>
           <a:xfrm>
-            <a:off x="2103120" y="3346704"/>
-            <a:ext cx="1508760" cy="603504"/>
+            <a:off x="1773936" y="3346704"/>
+            <a:ext cx="1463040" cy="566928"/>
           </a:xfrm>
           <a:prstGeom prst="roundRect">
             <a:avLst>
@@ -11091,7 +11486,7 @@
             </a:avLst>
           </a:prstGeom>
           <a:solidFill>
-            <a:srgbClr val="EEF2FA"/>
+            <a:srgbClr val="EEF4FF"/>
           </a:solidFill>
           <a:ln>
             <a:noFill/>
@@ -11113,7 +11508,7 @@
           </a:fontRef>
         </p:style>
         <p:txBody>
-          <a:bodyPr rtlCol="0" anchor="ctr" wrap="square" lIns="128016" rIns="128016" tIns="91440" bIns="91440"/>
+          <a:bodyPr rtlCol="0" anchor="ctr" wrap="square" lIns="128016" rIns="128016" tIns="82296" bIns="82296"/>
           <a:lstStyle/>
           <a:p>
             <a:pPr algn="ctr"/>
@@ -11131,14 +11526,14 @@
       </p:sp>
       <p:sp>
         <p:nvSpPr>
-          <p:cNvPr id="14" name="Rounded Rectangle 13"/>
+          <p:cNvPr id="15" name="Rounded Rectangle 14"/>
           <p:cNvSpPr/>
           <p:nvPr/>
         </p:nvSpPr>
         <p:spPr>
           <a:xfrm>
-            <a:off x="3703320" y="3346704"/>
-            <a:ext cx="2606040" cy="603504"/>
+            <a:off x="3328416" y="3346704"/>
+            <a:ext cx="2331720" cy="566928"/>
           </a:xfrm>
           <a:prstGeom prst="roundRect">
             <a:avLst>
@@ -11146,7 +11541,7 @@
             </a:avLst>
           </a:prstGeom>
           <a:solidFill>
-            <a:srgbClr val="EEF2FA"/>
+            <a:srgbClr val="EEF4FF"/>
           </a:solidFill>
           <a:ln>
             <a:noFill/>
@@ -11168,7 +11563,7 @@
           </a:fontRef>
         </p:style>
         <p:txBody>
-          <a:bodyPr rtlCol="0" anchor="ctr" wrap="square" lIns="128016" rIns="128016" tIns="91440" bIns="91440"/>
+          <a:bodyPr rtlCol="0" anchor="ctr" wrap="square" lIns="128016" rIns="128016" tIns="82296" bIns="82296"/>
           <a:lstStyle/>
           <a:p>
             <a:pPr algn="ctr"/>
@@ -11186,14 +11581,14 @@
       </p:sp>
       <p:sp>
         <p:nvSpPr>
-          <p:cNvPr id="15" name="Rounded Rectangle 14"/>
+          <p:cNvPr id="16" name="Rounded Rectangle 15"/>
           <p:cNvSpPr/>
           <p:nvPr/>
         </p:nvSpPr>
         <p:spPr>
           <a:xfrm>
-            <a:off x="411480" y="4005072"/>
-            <a:ext cx="1600200" cy="603504"/>
+            <a:off x="128016" y="3968496"/>
+            <a:ext cx="1554480" cy="566928"/>
           </a:xfrm>
           <a:prstGeom prst="roundRect">
             <a:avLst>
@@ -11225,7 +11620,7 @@
           </a:fontRef>
         </p:style>
         <p:txBody>
-          <a:bodyPr rtlCol="0" anchor="ctr" wrap="square" lIns="128016" rIns="128016" tIns="91440" bIns="91440"/>
+          <a:bodyPr rtlCol="0" anchor="ctr" wrap="square" lIns="128016" rIns="128016" tIns="82296" bIns="82296"/>
           <a:lstStyle/>
           <a:p>
             <a:pPr algn="ctr"/>
@@ -11243,14 +11638,14 @@
       </p:sp>
       <p:sp>
         <p:nvSpPr>
-          <p:cNvPr id="16" name="Rounded Rectangle 15"/>
+          <p:cNvPr id="17" name="Rounded Rectangle 16"/>
           <p:cNvSpPr/>
           <p:nvPr/>
         </p:nvSpPr>
         <p:spPr>
           <a:xfrm>
-            <a:off x="2103120" y="4005072"/>
-            <a:ext cx="1508760" cy="603504"/>
+            <a:off x="1773936" y="3968496"/>
+            <a:ext cx="1463040" cy="566928"/>
           </a:xfrm>
           <a:prstGeom prst="roundRect">
             <a:avLst>
@@ -11282,7 +11677,7 @@
           </a:fontRef>
         </p:style>
         <p:txBody>
-          <a:bodyPr rtlCol="0" anchor="ctr" wrap="square" lIns="128016" rIns="128016" tIns="91440" bIns="91440"/>
+          <a:bodyPr rtlCol="0" anchor="ctr" wrap="square" lIns="128016" rIns="128016" tIns="82296" bIns="82296"/>
           <a:lstStyle/>
           <a:p>
             <a:pPr algn="ctr"/>
@@ -11300,14 +11695,14 @@
       </p:sp>
       <p:sp>
         <p:nvSpPr>
-          <p:cNvPr id="17" name="Rounded Rectangle 16"/>
+          <p:cNvPr id="18" name="Rounded Rectangle 17"/>
           <p:cNvSpPr/>
           <p:nvPr/>
         </p:nvSpPr>
         <p:spPr>
           <a:xfrm>
-            <a:off x="3703320" y="4005072"/>
-            <a:ext cx="2606040" cy="603504"/>
+            <a:off x="3328416" y="3968496"/>
+            <a:ext cx="2331720" cy="566928"/>
           </a:xfrm>
           <a:prstGeom prst="roundRect">
             <a:avLst>
@@ -11339,14 +11734,14 @@
           </a:fontRef>
         </p:style>
         <p:txBody>
-          <a:bodyPr rtlCol="0" anchor="ctr" wrap="square" lIns="128016" rIns="128016" tIns="91440" bIns="91440"/>
+          <a:bodyPr rtlCol="0" anchor="ctr" wrap="square" lIns="128016" rIns="128016" tIns="82296" bIns="82296"/>
           <a:lstStyle/>
           <a:p>
             <a:pPr algn="ctr"/>
             <a:r>
               <a:rPr sz="1600" b="0" i="0">
                 <a:solidFill>
-                  <a:srgbClr val="C00000"/>
+                  <a:srgbClr val="1A1A1A"/>
                 </a:solidFill>
                 <a:latin typeface="Arial"/>
               </a:rPr>
@@ -11357,14 +11752,14 @@
       </p:sp>
       <p:sp>
         <p:nvSpPr>
-          <p:cNvPr id="18" name="TextBox 17"/>
+          <p:cNvPr id="19" name="TextBox 18"/>
           <p:cNvSpPr txBox="1"/>
           <p:nvPr/>
         </p:nvSpPr>
         <p:spPr>
           <a:xfrm>
-            <a:off x="6967728" y="1371600"/>
-            <a:ext cx="1783080" cy="4206240"/>
+            <a:off x="5760720" y="1572768"/>
+            <a:ext cx="3255264" cy="3108960"/>
           </a:xfrm>
           <a:prstGeom prst="rect">
             <a:avLst/>
@@ -11480,14 +11875,14 @@
       </p:sp>
       <p:sp>
         <p:nvSpPr>
-          <p:cNvPr id="19" name="Rounded Rectangle 18"/>
+          <p:cNvPr id="20" name="Rounded Rectangle 19"/>
           <p:cNvSpPr/>
           <p:nvPr/>
         </p:nvSpPr>
         <p:spPr>
           <a:xfrm>
-            <a:off x="411480" y="5742432"/>
-            <a:ext cx="8321040" cy="731520"/>
+            <a:off x="128016" y="4919472"/>
+            <a:ext cx="8887968" cy="731520"/>
           </a:xfrm>
           <a:prstGeom prst="roundRect">
             <a:avLst>
@@ -11495,7 +11890,7 @@
             </a:avLst>
           </a:prstGeom>
           <a:solidFill>
-            <a:srgbClr val="EEF2FA"/>
+            <a:srgbClr val="EEF4FF"/>
           </a:solidFill>
           <a:ln>
             <a:noFill/>
@@ -11529,6 +11924,75 @@
                 <a:latin typeface="Arial"/>
               </a:rPr>
               <a:t>The field is required to have a channel at all; once open, the upper temperature is set by dissipation, not by the field.</a:t>
+            </a:r>
+          </a:p>
+        </p:txBody>
+      </p:sp>
+      <p:cxnSp>
+        <p:nvCxnSpPr>
+          <p:cNvPr id="21" name="Connector 20"/>
+          <p:cNvCxnSpPr/>
+          <p:nvPr/>
+        </p:nvCxnSpPr>
+        <p:spPr>
+          <a:xfrm>
+            <a:off x="128016" y="5870448"/>
+            <a:ext cx="8887968" cy="0"/>
+          </a:xfrm>
+          <a:prstGeom prst="line">
+            <a:avLst/>
+          </a:prstGeom>
+          <a:ln w="9525">
+            <a:solidFill>
+              <a:srgbClr val="BBBBBB"/>
+            </a:solidFill>
+          </a:ln>
+        </p:spPr>
+        <p:style>
+          <a:lnRef idx="2">
+            <a:schemeClr val="accent1"/>
+          </a:lnRef>
+          <a:fillRef idx="0">
+            <a:schemeClr val="accent1"/>
+          </a:fillRef>
+          <a:effectRef idx="1">
+            <a:schemeClr val="accent1"/>
+          </a:effectRef>
+          <a:fontRef idx="minor">
+            <a:schemeClr val="tx1"/>
+          </a:fontRef>
+        </p:style>
+      </p:cxnSp>
+      <p:sp>
+        <p:nvSpPr>
+          <p:cNvPr id="22" name="RefBand"/>
+          <p:cNvSpPr txBox="1"/>
+          <p:nvPr/>
+        </p:nvSpPr>
+        <p:spPr>
+          <a:xfrm>
+            <a:off x="128016" y="5916168"/>
+            <a:ext cx="8321040" cy="548640"/>
+          </a:xfrm>
+          <a:prstGeom prst="rect">
+            <a:avLst/>
+          </a:prstGeom>
+          <a:noFill/>
+        </p:spPr>
+        <p:txBody>
+          <a:bodyPr wrap="square" anchor="t" lIns="0" rIns="0" tIns="18288" bIns="18288">
+            <a:spAutoFit/>
+          </a:bodyPr>
+          <a:lstStyle/>
+          <a:p>
+            <a:r>
+              <a:rPr sz="1000" b="0" i="1">
+                <a:solidFill>
+                  <a:srgbClr val="555555"/>
+                </a:solidFill>
+                <a:latin typeface="Arial"/>
+              </a:rPr>
+              <a:t>Ground-state Zeeman structure: [3] M. W. Doherty et al., Phys. Rep. 528, 1 (2013).   Boundaries: this work.</a:t>
             </a:r>
           </a:p>
         </p:txBody>
@@ -11620,8 +12084,8 @@
         </p:nvSpPr>
         <p:spPr>
           <a:xfrm>
-            <a:off x="411480" y="292608"/>
-            <a:ext cx="6400800" cy="731520"/>
+            <a:off x="128016" y="100584"/>
+            <a:ext cx="7479792" cy="694944"/>
           </a:xfrm>
           <a:prstGeom prst="rect">
             <a:avLst/>
@@ -11647,9 +12111,43 @@
           </a:p>
         </p:txBody>
       </p:sp>
+      <p:sp>
+        <p:nvSpPr>
+          <p:cNvPr id="3" name="TitleLine"/>
+          <p:cNvSpPr txBox="1"/>
+          <p:nvPr/>
+        </p:nvSpPr>
+        <p:spPr>
+          <a:xfrm>
+            <a:off x="128016" y="859536"/>
+            <a:ext cx="8887968" cy="457200"/>
+          </a:xfrm>
+          <a:prstGeom prst="rect">
+            <a:avLst/>
+          </a:prstGeom>
+          <a:noFill/>
+        </p:spPr>
+        <p:txBody>
+          <a:bodyPr wrap="square" anchor="ctr" lIns="0" rIns="0" tIns="18288" bIns="18288">
+            <a:spAutoFit/>
+          </a:bodyPr>
+          <a:lstStyle/>
+          <a:p>
+            <a:r>
+              <a:rPr sz="2200" b="1" i="0">
+                <a:solidFill>
+                  <a:srgbClr val="1A1A1A"/>
+                </a:solidFill>
+                <a:latin typeface="Arial"/>
+              </a:rPr>
+              <a:t>Discussion 1: What to measure</a:t>
+            </a:r>
+          </a:p>
+        </p:txBody>
+      </p:sp>
       <p:pic>
         <p:nvPicPr>
-          <p:cNvPr id="3" name="Picture 2" descr="fig6_observables.png"/>
+          <p:cNvPr id="4" name="Picture 3" descr="sf_observables.png"/>
           <p:cNvPicPr>
             <a:picLocks noChangeAspect="1"/>
           </p:cNvPicPr>
@@ -11663,8 +12161,8 @@
         </p:blipFill>
         <p:spPr>
           <a:xfrm>
-            <a:off x="1651226" y="1261872"/>
-            <a:ext cx="5841546" cy="2423160"/>
+            <a:off x="132588" y="1481328"/>
+            <a:ext cx="5202936" cy="3345509"/>
           </a:xfrm>
           <a:prstGeom prst="rect">
             <a:avLst/>
@@ -11673,14 +12171,14 @@
       </p:pic>
       <p:sp>
         <p:nvSpPr>
-          <p:cNvPr id="4" name="Rounded Rectangle 3"/>
+          <p:cNvPr id="5" name="Rounded Rectangle 4"/>
           <p:cNvSpPr/>
           <p:nvPr/>
         </p:nvSpPr>
         <p:spPr>
           <a:xfrm>
-            <a:off x="411480" y="3794760"/>
-            <a:ext cx="3977639" cy="1874519"/>
+            <a:off x="5504688" y="1481328"/>
+            <a:ext cx="3511296" cy="1572768"/>
           </a:xfrm>
           <a:prstGeom prst="roundRect">
             <a:avLst>
@@ -11688,7 +12186,7 @@
             </a:avLst>
           </a:prstGeom>
           <a:solidFill>
-            <a:srgbClr val="EEF2FA"/>
+            <a:srgbClr val="EEF4FF"/>
           </a:solidFill>
           <a:ln>
             <a:noFill/>
@@ -11710,7 +12208,7 @@
           </a:fontRef>
         </p:style>
         <p:txBody>
-          <a:bodyPr rtlCol="0" anchor="ctr" wrap="square" lIns="128016" rIns="128016" tIns="91440" bIns="91440"/>
+          <a:bodyPr rtlCol="0" anchor="ctr" wrap="square" lIns="128016" rIns="128016" tIns="82296" bIns="82296"/>
           <a:lstStyle/>
           <a:p>
             <a:pPr algn="ctr"/>
@@ -11756,6 +12254,61 @@
               <a:t>•  Transmission or fluorescence both work</a:t>
             </a:r>
           </a:p>
+        </p:txBody>
+      </p:sp>
+      <p:sp>
+        <p:nvSpPr>
+          <p:cNvPr id="6" name="Rounded Rectangle 5"/>
+          <p:cNvSpPr/>
+          <p:nvPr/>
+        </p:nvSpPr>
+        <p:spPr>
+          <a:xfrm>
+            <a:off x="5504688" y="3255264"/>
+            <a:ext cx="3511296" cy="1572768"/>
+          </a:xfrm>
+          <a:prstGeom prst="roundRect">
+            <a:avLst>
+              <a:gd name="adj" fmla="val 6000"/>
+            </a:avLst>
+          </a:prstGeom>
+          <a:solidFill>
+            <a:srgbClr val="FFF6E8"/>
+          </a:solidFill>
+          <a:ln>
+            <a:noFill/>
+          </a:ln>
+          <a:effectLst/>
+        </p:spPr>
+        <p:style>
+          <a:lnRef idx="1">
+            <a:schemeClr val="accent1"/>
+          </a:lnRef>
+          <a:fillRef idx="3">
+            <a:schemeClr val="accent1"/>
+          </a:fillRef>
+          <a:effectRef idx="2">
+            <a:schemeClr val="accent1"/>
+          </a:effectRef>
+          <a:fontRef idx="minor">
+            <a:schemeClr val="lt1"/>
+          </a:fontRef>
+        </p:style>
+        <p:txBody>
+          <a:bodyPr rtlCol="0" anchor="ctr" wrap="square" lIns="128016" rIns="128016" tIns="82296" bIns="82296"/>
+          <a:lstStyle/>
+          <a:p>
+            <a:pPr algn="ctr"/>
+            <a:r>
+              <a:rPr sz="1700" b="1" i="0">
+                <a:solidFill>
+                  <a:srgbClr val="1C3077"/>
+                </a:solidFill>
+                <a:latin typeface="Arial"/>
+              </a:rPr>
+              <a:t>The decisive measurement</a:t>
+            </a:r>
+          </a:p>
           <a:p>
             <a:pPr>
               <a:spcBef>
@@ -11769,29 +12322,45 @@
                 </a:solidFill>
                 <a:latin typeface="Arial"/>
               </a:rPr>
-              <a:t>•  PL dips where transmission rises</a:t>
-            </a:r>
-          </a:p>
-        </p:txBody>
-      </p:sp>
-      <p:sp>
-        <p:nvSpPr>
-          <p:cNvPr id="5" name="Rounded Rectangle 4"/>
+              <a:t>•  Follow the fringe through zero at 103 K</a:t>
+            </a:r>
+          </a:p>
+          <a:p>
+            <a:pPr>
+              <a:spcBef>
+                <a:spcPts val="600"/>
+              </a:spcBef>
+            </a:pPr>
+            <a:r>
+              <a:rPr sz="1600" b="0" i="0">
+                <a:solidFill>
+                  <a:srgbClr val="1A1A1A"/>
+                </a:solidFill>
+                <a:latin typeface="Arial"/>
+              </a:rPr>
+              <a:t>•  1.6 s at 105 K, 5.6 s at 110 K</a:t>
+            </a:r>
+          </a:p>
+        </p:txBody>
+      </p:sp>
+      <p:sp>
+        <p:nvSpPr>
+          <p:cNvPr id="7" name="Rounded Rectangle 6"/>
           <p:cNvSpPr/>
           <p:nvPr/>
         </p:nvSpPr>
         <p:spPr>
           <a:xfrm>
-            <a:off x="4663440" y="3794760"/>
-            <a:ext cx="3977639" cy="1874519"/>
+            <a:off x="128016" y="4919472"/>
+            <a:ext cx="8887968" cy="731520"/>
           </a:xfrm>
           <a:prstGeom prst="roundRect">
             <a:avLst>
-              <a:gd name="adj" fmla="val 6000"/>
+              <a:gd name="adj" fmla="val 12000"/>
             </a:avLst>
           </a:prstGeom>
           <a:solidFill>
-            <a:srgbClr val="FDEEEE"/>
+            <a:srgbClr val="EEF4FF"/>
           </a:solidFill>
           <a:ln>
             <a:noFill/>
@@ -11813,121 +12382,87 @@
           </a:fontRef>
         </p:style>
         <p:txBody>
-          <a:bodyPr rtlCol="0" anchor="ctr" wrap="square" lIns="128016" rIns="128016" tIns="91440" bIns="91440"/>
+          <a:bodyPr rtlCol="0" anchor="ctr" wrap="square" lIns="146304" rIns="146304" tIns="36576" bIns="36576"/>
           <a:lstStyle/>
           <a:p>
-            <a:pPr algn="ctr"/>
-            <a:r>
-              <a:rPr sz="1700" b="1" i="0">
-                <a:solidFill>
-                  <a:srgbClr val="C00000"/>
-                </a:solidFill>
-                <a:latin typeface="Arial"/>
-              </a:rPr>
-              <a:t>The decisive measurement</a:t>
-            </a:r>
-          </a:p>
-          <a:p>
-            <a:pPr>
-              <a:spcBef>
-                <a:spcPts val="600"/>
-              </a:spcBef>
-            </a:pPr>
-            <a:r>
-              <a:rPr sz="1600" b="0" i="0">
+            <a:pPr algn="l"/>
+            <a:r>
+              <a:rPr sz="2000" b="0" i="0">
                 <a:solidFill>
                   <a:srgbClr val="1A1A1A"/>
                 </a:solidFill>
                 <a:latin typeface="Arial"/>
               </a:rPr>
-              <a:t>•  Follow the fringe through zero at 103 K</a:t>
-            </a:r>
-          </a:p>
-          <a:p>
-            <a:pPr>
-              <a:spcBef>
-                <a:spcPts val="600"/>
-              </a:spcBef>
-            </a:pPr>
-            <a:r>
-              <a:rPr sz="1600" b="0" i="0">
-                <a:solidFill>
-                  <a:srgbClr val="1A1A1A"/>
-                </a:solidFill>
-                <a:latin typeface="Arial"/>
-              </a:rPr>
-              <a:t>•  A sign flip cannot come from ATS</a:t>
-            </a:r>
-          </a:p>
-          <a:p>
-            <a:pPr>
-              <a:spcBef>
-                <a:spcPts val="600"/>
-              </a:spcBef>
-            </a:pPr>
-            <a:r>
-              <a:rPr sz="1600" b="0" i="0">
-                <a:solidFill>
-                  <a:srgbClr val="1A1A1A"/>
-                </a:solidFill>
-                <a:latin typeface="Arial"/>
-              </a:rPr>
-              <a:t>•  1.6 s at 105 K, 5.6 s at 110 K</a:t>
-            </a:r>
-          </a:p>
-        </p:txBody>
-      </p:sp>
-      <p:sp>
-        <p:nvSpPr>
-          <p:cNvPr id="6" name="Rounded Rectangle 5"/>
-          <p:cNvSpPr/>
+              <a:t>Transmission is detectable to 110 K, fluorescence to 105 K; past 120 K technical noise blocks detection outright.</a:t>
+            </a:r>
+          </a:p>
+        </p:txBody>
+      </p:sp>
+      <p:cxnSp>
+        <p:nvCxnSpPr>
+          <p:cNvPr id="8" name="Connector 7"/>
+          <p:cNvCxnSpPr/>
           <p:nvPr/>
-        </p:nvSpPr>
-        <p:spPr>
-          <a:xfrm>
-            <a:off x="411480" y="5742432"/>
-            <a:ext cx="8321040" cy="731520"/>
-          </a:xfrm>
-          <a:prstGeom prst="roundRect">
-            <a:avLst>
-              <a:gd name="adj" fmla="val 12000"/>
-            </a:avLst>
-          </a:prstGeom>
-          <a:solidFill>
-            <a:srgbClr val="EEF2FA"/>
-          </a:solidFill>
-          <a:ln>
-            <a:noFill/>
+        </p:nvCxnSpPr>
+        <p:spPr>
+          <a:xfrm>
+            <a:off x="128016" y="5870448"/>
+            <a:ext cx="8887968" cy="0"/>
+          </a:xfrm>
+          <a:prstGeom prst="line">
+            <a:avLst/>
+          </a:prstGeom>
+          <a:ln w="9525">
+            <a:solidFill>
+              <a:srgbClr val="BBBBBB"/>
+            </a:solidFill>
           </a:ln>
-          <a:effectLst/>
         </p:spPr>
         <p:style>
-          <a:lnRef idx="1">
+          <a:lnRef idx="2">
             <a:schemeClr val="accent1"/>
           </a:lnRef>
-          <a:fillRef idx="3">
+          <a:fillRef idx="0">
             <a:schemeClr val="accent1"/>
           </a:fillRef>
-          <a:effectRef idx="2">
+          <a:effectRef idx="1">
             <a:schemeClr val="accent1"/>
           </a:effectRef>
           <a:fontRef idx="minor">
-            <a:schemeClr val="lt1"/>
+            <a:schemeClr val="tx1"/>
           </a:fontRef>
         </p:style>
-        <p:txBody>
-          <a:bodyPr rtlCol="0" anchor="ctr" wrap="square" lIns="146304" rIns="146304" tIns="36576" bIns="36576"/>
+      </p:cxnSp>
+      <p:sp>
+        <p:nvSpPr>
+          <p:cNvPr id="9" name="RefBand"/>
+          <p:cNvSpPr txBox="1"/>
+          <p:nvPr/>
+        </p:nvSpPr>
+        <p:spPr>
+          <a:xfrm>
+            <a:off x="128016" y="5916168"/>
+            <a:ext cx="8321040" cy="548640"/>
+          </a:xfrm>
+          <a:prstGeom prst="rect">
+            <a:avLst/>
+          </a:prstGeom>
+          <a:noFill/>
+        </p:spPr>
+        <p:txBody>
+          <a:bodyPr wrap="square" anchor="t" lIns="0" rIns="0" tIns="18288" bIns="18288">
+            <a:spAutoFit/>
+          </a:bodyPr>
           <a:lstStyle/>
           <a:p>
-            <a:pPr algn="l"/>
-            <a:r>
-              <a:rPr sz="2000" b="0" i="0">
-                <a:solidFill>
-                  <a:srgbClr val="1A1A1A"/>
-                </a:solidFill>
-                <a:latin typeface="Arial"/>
-              </a:rPr>
-              <a:t>Transmission is detectable to 110 K, fluorescence to 105 K; past 120 K technical noise blocks detection outright.</a:t>
+            <a:r>
+              <a:rPr sz="1000" b="0" i="1">
+                <a:solidFill>
+                  <a:srgbClr val="555555"/>
+                </a:solidFill>
+                <a:latin typeface="Arial"/>
+              </a:rPr>
+              <a:t>Ensemble EIT magnetometry, from which the detection chain is taken: [4] V. M. Acosta et al., Phys. Rev. Lett. 110, 213605 (2013).</a:t>
             </a:r>
           </a:p>
         </p:txBody>
@@ -11958,8 +12493,8 @@
         </p:nvSpPr>
         <p:spPr>
           <a:xfrm>
-            <a:off x="411480" y="292608"/>
-            <a:ext cx="6400800" cy="731520"/>
+            <a:off x="128016" y="100584"/>
+            <a:ext cx="7479792" cy="694944"/>
           </a:xfrm>
           <a:prstGeom prst="rect">
             <a:avLst/>
@@ -11987,14 +12522,48 @@
       </p:sp>
       <p:sp>
         <p:nvSpPr>
-          <p:cNvPr id="3" name="Rounded Rectangle 2"/>
+          <p:cNvPr id="3" name="TitleLine"/>
+          <p:cNvSpPr txBox="1"/>
+          <p:nvPr/>
+        </p:nvSpPr>
+        <p:spPr>
+          <a:xfrm>
+            <a:off x="128016" y="859536"/>
+            <a:ext cx="8887968" cy="457200"/>
+          </a:xfrm>
+          <a:prstGeom prst="rect">
+            <a:avLst/>
+          </a:prstGeom>
+          <a:noFill/>
+        </p:spPr>
+        <p:txBody>
+          <a:bodyPr wrap="square" anchor="ctr" lIns="0" rIns="0" tIns="18288" bIns="18288">
+            <a:spAutoFit/>
+          </a:bodyPr>
+          <a:lstStyle/>
+          <a:p>
+            <a:r>
+              <a:rPr sz="2200" b="1" i="0">
+                <a:solidFill>
+                  <a:srgbClr val="1A1A1A"/>
+                </a:solidFill>
+                <a:latin typeface="Arial"/>
+              </a:rPr>
+              <a:t>Discussion 2: Why room temperature fails</a:t>
+            </a:r>
+          </a:p>
+        </p:txBody>
+      </p:sp>
+      <p:sp>
+        <p:nvSpPr>
+          <p:cNvPr id="4" name="Rounded Rectangle 3"/>
           <p:cNvSpPr/>
           <p:nvPr/>
         </p:nvSpPr>
         <p:spPr>
           <a:xfrm>
-            <a:off x="411480" y="1298448"/>
-            <a:ext cx="8321040" cy="1737360"/>
+            <a:off x="128016" y="1481328"/>
+            <a:ext cx="8887968" cy="1417320"/>
           </a:xfrm>
           <a:prstGeom prst="roundRect">
             <a:avLst>
@@ -12002,7 +12571,7 @@
             </a:avLst>
           </a:prstGeom>
           <a:solidFill>
-            <a:srgbClr val="F7F9FC"/>
+            <a:srgbClr val="F6F8FC"/>
           </a:solidFill>
           <a:ln>
             <a:noFill/>
@@ -12024,7 +12593,7 @@
           </a:fontRef>
         </p:style>
         <p:txBody>
-          <a:bodyPr rtlCol="0" anchor="ctr" wrap="square" lIns="128016" rIns="128016" tIns="91440" bIns="91440"/>
+          <a:bodyPr rtlCol="0" anchor="ctr" wrap="square" lIns="128016" rIns="128016" tIns="82296" bIns="82296"/>
           <a:lstStyle/>
           <a:p>
             <a:pPr algn="ctr"/>
@@ -12036,6 +12605,95 @@
                 <a:latin typeface="Arial"/>
               </a:rPr>
               <a:t>The mechanism</a:t>
+            </a:r>
+          </a:p>
+          <a:p>
+            <a:pPr>
+              <a:spcBef>
+                <a:spcPts val="500"/>
+              </a:spcBef>
+            </a:pPr>
+            <a:r>
+              <a:rPr sz="1600" b="0" i="0">
+                <a:solidFill>
+                  <a:srgbClr val="1A1A1A"/>
+                </a:solidFill>
+                <a:latin typeface="Arial"/>
+              </a:rPr>
+              <a:t>A jump inside the excited manifold conserves population but acts on every optical coherence as </a:t>
+            </a:r>
+            <a:r>
+              <a:rPr sz="1600" b="1" i="0">
+                <a:solidFill>
+                  <a:srgbClr val="C00000"/>
+                </a:solidFill>
+                <a:latin typeface="Arial"/>
+              </a:rPr>
+              <a:t>pure loss</a:t>
+            </a:r>
+            <a:r>
+              <a:rPr sz="1600" b="0" i="0">
+                <a:solidFill>
+                  <a:srgbClr val="1A1A1A"/>
+                </a:solidFill>
+                <a:latin typeface="Arial"/>
+              </a:rPr>
+              <a:t>.  Phonon hopping Eₓ ↔ Eᵧ therefore decoheres the pathway while removing no population.  Rate entering the coherence equation: Γₓᵧ / 4.</a:t>
+            </a:r>
+          </a:p>
+        </p:txBody>
+      </p:sp>
+      <p:sp>
+        <p:nvSpPr>
+          <p:cNvPr id="5" name="Rounded Rectangle 4"/>
+          <p:cNvSpPr/>
+          <p:nvPr/>
+        </p:nvSpPr>
+        <p:spPr>
+          <a:xfrm>
+            <a:off x="128016" y="3035808"/>
+            <a:ext cx="4315968" cy="1792224"/>
+          </a:xfrm>
+          <a:prstGeom prst="roundRect">
+            <a:avLst>
+              <a:gd name="adj" fmla="val 6000"/>
+            </a:avLst>
+          </a:prstGeom>
+          <a:solidFill>
+            <a:srgbClr val="EEF4FF"/>
+          </a:solidFill>
+          <a:ln>
+            <a:noFill/>
+          </a:ln>
+          <a:effectLst/>
+        </p:spPr>
+        <p:style>
+          <a:lnRef idx="1">
+            <a:schemeClr val="accent1"/>
+          </a:lnRef>
+          <a:fillRef idx="3">
+            <a:schemeClr val="accent1"/>
+          </a:fillRef>
+          <a:effectRef idx="2">
+            <a:schemeClr val="accent1"/>
+          </a:effectRef>
+          <a:fontRef idx="minor">
+            <a:schemeClr val="lt1"/>
+          </a:fontRef>
+        </p:style>
+        <p:txBody>
+          <a:bodyPr rtlCol="0" anchor="ctr" wrap="square" lIns="128016" rIns="128016" tIns="82296" bIns="82296"/>
+          <a:lstStyle/>
+          <a:p>
+            <a:pPr algn="ctr"/>
+            <a:r>
+              <a:rPr sz="1700" b="1" i="0">
+                <a:solidFill>
+                  <a:srgbClr val="1C3077"/>
+                </a:solidFill>
+                <a:latin typeface="Arial"/>
+              </a:rPr>
+              <a:t>What NV would need</a:t>
             </a:r>
           </a:p>
           <a:p>
@@ -12051,55 +12709,53 @@
                 </a:solidFill>
                 <a:latin typeface="Arial"/>
               </a:rPr>
-              <a:t>A jump inside the excited manifold conserves population but acts on every optical coherence as </a:t>
-            </a:r>
-            <a:r>
-              <a:rPr sz="1600" b="1" i="0">
-                <a:solidFill>
-                  <a:srgbClr val="C00000"/>
-                </a:solidFill>
-                <a:latin typeface="Arial"/>
-              </a:rPr>
-              <a:t>pure loss</a:t>
-            </a:r>
-            <a:r>
-              <a:rPr sz="1600" b="0" i="0">
-                <a:solidFill>
-                  <a:srgbClr val="1A1A1A"/>
-                </a:solidFill>
-                <a:latin typeface="Arial"/>
-              </a:rPr>
-              <a:t>.  Phonon hopping Eₓ ↔ E_y therefore decoheres the pathway while removing no population.</a:t>
+              <a:t>•  Freeze out the orbital dynamics, or</a:t>
             </a:r>
           </a:p>
           <a:p>
             <a:pPr>
               <a:spcBef>
-                <a:spcPts val="400"/>
+                <a:spcPts val="600"/>
               </a:spcBef>
             </a:pPr>
             <a:r>
               <a:rPr sz="1600" b="0" i="0">
                 <a:solidFill>
-                  <a:srgbClr val="555555"/>
-                </a:solidFill>
-                <a:latin typeface="Arial"/>
-              </a:rPr>
-              <a:t>Rate entering the coherence equation:  Γₓᵧ / 4.</a:t>
-            </a:r>
-          </a:p>
-        </p:txBody>
-      </p:sp>
-      <p:sp>
-        <p:nvSpPr>
-          <p:cNvPr id="4" name="Rounded Rectangle 3"/>
+                  <a:srgbClr val="1A1A1A"/>
+                </a:solidFill>
+                <a:latin typeface="Arial"/>
+              </a:rPr>
+              <a:t>•  Push the branch splitting far above kT</a:t>
+            </a:r>
+          </a:p>
+          <a:p>
+            <a:pPr>
+              <a:spcBef>
+                <a:spcPts val="600"/>
+              </a:spcBef>
+            </a:pPr>
+            <a:r>
+              <a:rPr sz="1600" b="0" i="0">
+                <a:solidFill>
+                  <a:srgbClr val="1A1A1A"/>
+                </a:solidFill>
+                <a:latin typeface="Arial"/>
+              </a:rPr>
+              <a:t>•  Neither is available in bulk NV at 300 K</a:t>
+            </a:r>
+          </a:p>
+        </p:txBody>
+      </p:sp>
+      <p:sp>
+        <p:nvSpPr>
+          <p:cNvPr id="6" name="Rounded Rectangle 5"/>
           <p:cNvSpPr/>
           <p:nvPr/>
         </p:nvSpPr>
         <p:spPr>
           <a:xfrm>
-            <a:off x="411480" y="3218688"/>
-            <a:ext cx="3977639" cy="2450592"/>
+            <a:off x="4700016" y="3035808"/>
+            <a:ext cx="4315968" cy="1792224"/>
           </a:xfrm>
           <a:prstGeom prst="roundRect">
             <a:avLst>
@@ -12107,7 +12763,7 @@
             </a:avLst>
           </a:prstGeom>
           <a:solidFill>
-            <a:srgbClr val="EEF2FA"/>
+            <a:srgbClr val="F6F8FC"/>
           </a:solidFill>
           <a:ln>
             <a:noFill/>
@@ -12129,24 +12785,24 @@
           </a:fontRef>
         </p:style>
         <p:txBody>
-          <a:bodyPr rtlCol="0" anchor="ctr" wrap="square" lIns="128016" rIns="128016" tIns="91440" bIns="91440"/>
+          <a:bodyPr rtlCol="0" anchor="ctr" wrap="square" lIns="128016" rIns="128016" tIns="82296" bIns="82296"/>
           <a:lstStyle/>
           <a:p>
             <a:pPr algn="ctr"/>
             <a:r>
               <a:rPr sz="1700" b="1" i="0">
                 <a:solidFill>
-                  <a:srgbClr val="1C3077"/>
-                </a:solidFill>
-                <a:latin typeface="Arial"/>
-              </a:rPr>
-              <a:t>What NV would need</a:t>
+                  <a:srgbClr val="555555"/>
+                </a:solidFill>
+                <a:latin typeface="Arial"/>
+              </a:rPr>
+              <a:t>Back to group-IV</a:t>
             </a:r>
           </a:p>
           <a:p>
             <a:pPr>
               <a:spcBef>
-                <a:spcPts val="700"/>
+                <a:spcPts val="600"/>
               </a:spcBef>
             </a:pPr>
             <a:r>
@@ -12156,13 +12812,13 @@
                 </a:solidFill>
                 <a:latin typeface="Arial"/>
               </a:rPr>
-              <a:t>•  Freeze out the orbital dynamics, or</a:t>
+              <a:t>•  Orbital Λ: no spin-overlap obstruction</a:t>
             </a:r>
           </a:p>
           <a:p>
             <a:pPr>
               <a:spcBef>
-                <a:spcPts val="700"/>
+                <a:spcPts val="600"/>
               </a:spcBef>
             </a:pPr>
             <a:r>
@@ -12172,13 +12828,13 @@
                 </a:solidFill>
                 <a:latin typeface="Arial"/>
               </a:rPr>
-              <a:t>•  Push the branch splitting far above kT</a:t>
+              <a:t>•  But orbital coherence damped by single phonons</a:t>
             </a:r>
           </a:p>
           <a:p>
             <a:pPr>
               <a:spcBef>
-                <a:spcPts val="700"/>
+                <a:spcPts val="600"/>
               </a:spcBef>
             </a:pPr>
             <a:r>
@@ -12188,29 +12844,29 @@
                 </a:solidFill>
                 <a:latin typeface="Arial"/>
               </a:rPr>
-              <a:t>•  Neither is available in bulk NV at 300 K</a:t>
-            </a:r>
-          </a:p>
-        </p:txBody>
-      </p:sp>
-      <p:sp>
-        <p:nvSpPr>
-          <p:cNvPr id="5" name="Rounded Rectangle 4"/>
+              <a:t>•  Strain and spin–orbit splitting are the levers</a:t>
+            </a:r>
+          </a:p>
+        </p:txBody>
+      </p:sp>
+      <p:sp>
+        <p:nvSpPr>
+          <p:cNvPr id="7" name="Rounded Rectangle 6"/>
           <p:cNvSpPr/>
           <p:nvPr/>
         </p:nvSpPr>
         <p:spPr>
           <a:xfrm>
-            <a:off x="4663440" y="3218688"/>
-            <a:ext cx="3977639" cy="2450592"/>
+            <a:off x="128016" y="4919472"/>
+            <a:ext cx="8887968" cy="731520"/>
           </a:xfrm>
           <a:prstGeom prst="roundRect">
             <a:avLst>
-              <a:gd name="adj" fmla="val 6000"/>
+              <a:gd name="adj" fmla="val 12000"/>
             </a:avLst>
           </a:prstGeom>
           <a:solidFill>
-            <a:srgbClr val="F4F4F4"/>
+            <a:srgbClr val="EEF4FF"/>
           </a:solidFill>
           <a:ln>
             <a:noFill/>
@@ -12232,121 +12888,87 @@
           </a:fontRef>
         </p:style>
         <p:txBody>
-          <a:bodyPr rtlCol="0" anchor="ctr" wrap="square" lIns="128016" rIns="128016" tIns="91440" bIns="91440"/>
+          <a:bodyPr rtlCol="0" anchor="ctr" wrap="square" lIns="146304" rIns="146304" tIns="36576" bIns="36576"/>
           <a:lstStyle/>
           <a:p>
-            <a:pPr algn="ctr"/>
-            <a:r>
-              <a:rPr sz="1700" b="1" i="0">
-                <a:solidFill>
-                  <a:srgbClr val="555555"/>
-                </a:solidFill>
-                <a:latin typeface="Arial"/>
-              </a:rPr>
-              <a:t>Back to group-IV</a:t>
-            </a:r>
-          </a:p>
-          <a:p>
-            <a:pPr>
-              <a:spcBef>
-                <a:spcPts val="700"/>
-              </a:spcBef>
-            </a:pPr>
-            <a:r>
-              <a:rPr sz="1600" b="0" i="0">
+            <a:pPr algn="l"/>
+            <a:r>
+              <a:rPr sz="2000" b="0" i="0">
                 <a:solidFill>
                   <a:srgbClr val="1A1A1A"/>
                 </a:solidFill>
                 <a:latin typeface="Arial"/>
               </a:rPr>
-              <a:t>•  Orbital Λ: no spin-overlap obstruction</a:t>
-            </a:r>
-          </a:p>
-          <a:p>
-            <a:pPr>
-              <a:spcBef>
-                <a:spcPts val="700"/>
-              </a:spcBef>
-            </a:pPr>
-            <a:r>
-              <a:rPr sz="1600" b="0" i="0">
-                <a:solidFill>
-                  <a:srgbClr val="1A1A1A"/>
-                </a:solidFill>
-                <a:latin typeface="Arial"/>
-              </a:rPr>
-              <a:t>•  But orbital coherence damped by single phonons</a:t>
-            </a:r>
-          </a:p>
-          <a:p>
-            <a:pPr>
-              <a:spcBef>
-                <a:spcPts val="700"/>
-              </a:spcBef>
-            </a:pPr>
-            <a:r>
-              <a:rPr sz="1600" b="0" i="0">
-                <a:solidFill>
-                  <a:srgbClr val="1A1A1A"/>
-                </a:solidFill>
-                <a:latin typeface="Arial"/>
-              </a:rPr>
-              <a:t>•  Strain and spin–orbit splitting are the levers</a:t>
-            </a:r>
-          </a:p>
-        </p:txBody>
-      </p:sp>
-      <p:sp>
-        <p:nvSpPr>
-          <p:cNvPr id="6" name="Rounded Rectangle 5"/>
-          <p:cNvSpPr/>
+              <a:t>The obstruction is a thermalising orbital degree of freedom in the excited manifold, not the spin dephasing usually blamed.</a:t>
+            </a:r>
+          </a:p>
+        </p:txBody>
+      </p:sp>
+      <p:cxnSp>
+        <p:nvCxnSpPr>
+          <p:cNvPr id="8" name="Connector 7"/>
+          <p:cNvCxnSpPr/>
           <p:nvPr/>
-        </p:nvSpPr>
-        <p:spPr>
-          <a:xfrm>
-            <a:off x="411480" y="5742432"/>
-            <a:ext cx="8321040" cy="731520"/>
-          </a:xfrm>
-          <a:prstGeom prst="roundRect">
-            <a:avLst>
-              <a:gd name="adj" fmla="val 12000"/>
-            </a:avLst>
-          </a:prstGeom>
-          <a:solidFill>
-            <a:srgbClr val="EEF2FA"/>
-          </a:solidFill>
-          <a:ln>
-            <a:noFill/>
+        </p:nvCxnSpPr>
+        <p:spPr>
+          <a:xfrm>
+            <a:off x="128016" y="5870448"/>
+            <a:ext cx="8887968" cy="0"/>
+          </a:xfrm>
+          <a:prstGeom prst="line">
+            <a:avLst/>
+          </a:prstGeom>
+          <a:ln w="9525">
+            <a:solidFill>
+              <a:srgbClr val="BBBBBB"/>
+            </a:solidFill>
           </a:ln>
-          <a:effectLst/>
         </p:spPr>
         <p:style>
-          <a:lnRef idx="1">
+          <a:lnRef idx="2">
             <a:schemeClr val="accent1"/>
           </a:lnRef>
-          <a:fillRef idx="3">
+          <a:fillRef idx="0">
             <a:schemeClr val="accent1"/>
           </a:fillRef>
-          <a:effectRef idx="2">
+          <a:effectRef idx="1">
             <a:schemeClr val="accent1"/>
           </a:effectRef>
           <a:fontRef idx="minor">
-            <a:schemeClr val="lt1"/>
+            <a:schemeClr val="tx1"/>
           </a:fontRef>
         </p:style>
-        <p:txBody>
-          <a:bodyPr rtlCol="0" anchor="ctr" wrap="square" lIns="146304" rIns="146304" tIns="36576" bIns="36576"/>
+      </p:cxnSp>
+      <p:sp>
+        <p:nvSpPr>
+          <p:cNvPr id="9" name="RefBand"/>
+          <p:cNvSpPr txBox="1"/>
+          <p:nvPr/>
+        </p:nvSpPr>
+        <p:spPr>
+          <a:xfrm>
+            <a:off x="128016" y="5916168"/>
+            <a:ext cx="8321040" cy="548640"/>
+          </a:xfrm>
+          <a:prstGeom prst="rect">
+            <a:avLst/>
+          </a:prstGeom>
+          <a:noFill/>
+        </p:spPr>
+        <p:txBody>
+          <a:bodyPr wrap="square" anchor="t" lIns="0" rIns="0" tIns="18288" bIns="18288">
+            <a:spAutoFit/>
+          </a:bodyPr>
           <a:lstStyle/>
           <a:p>
-            <a:pPr algn="l"/>
-            <a:r>
-              <a:rPr sz="2000" b="0" i="0">
-                <a:solidFill>
-                  <a:srgbClr val="1A1A1A"/>
-                </a:solidFill>
-                <a:latin typeface="Arial"/>
-              </a:rPr>
-              <a:t>The obstruction is a thermalising orbital degree of freedom in the excited manifold, not the spin dephasing usually blamed.</a:t>
+            <a:r>
+              <a:rPr sz="1000" b="0" i="1">
+                <a:solidFill>
+                  <a:srgbClr val="555555"/>
+                </a:solidFill>
+                <a:latin typeface="Arial"/>
+              </a:rPr>
+              <a:t>Orbital averaging and phonon coupling: [13] G. Thiering and A. Gali, Phys. Rev. B 96, 081115 (2017).   [14] K. D. Jahnke et al., New J. Phys. 17, 043011 (2015).</a:t>
             </a:r>
           </a:p>
         </p:txBody>
@@ -12371,23 +12993,30 @@
       <p:grpSpPr/>
       <p:sp>
         <p:nvSpPr>
-          <p:cNvPr id="2" name="Title 1"/>
-          <p:cNvSpPr>
-            <a:spLocks noGrp="1"/>
-          </p:cNvSpPr>
-          <p:nvPr>
-            <p:ph type="title"/>
-          </p:nvPr>
-        </p:nvSpPr>
-        <p:spPr/>
-        <p:txBody>
-          <a:bodyPr/>
+          <p:cNvPr id="2" name="TitleLine"/>
+          <p:cNvSpPr txBox="1"/>
+          <p:nvPr/>
+        </p:nvSpPr>
+        <p:spPr>
+          <a:xfrm>
+            <a:off x="128016" y="859536"/>
+            <a:ext cx="8887968" cy="457200"/>
+          </a:xfrm>
+          <a:prstGeom prst="rect">
+            <a:avLst/>
+          </a:prstGeom>
+          <a:noFill/>
+        </p:spPr>
+        <p:txBody>
+          <a:bodyPr wrap="square" anchor="ctr" lIns="0" rIns="0" tIns="18288" bIns="18288">
+            <a:spAutoFit/>
+          </a:bodyPr>
           <a:lstStyle/>
           <a:p>
             <a:r>
               <a:rPr sz="2200" b="1" i="0">
                 <a:solidFill>
-                  <a:srgbClr val="1C3077"/>
+                  <a:srgbClr val="1A1A1A"/>
                 </a:solidFill>
                 <a:latin typeface="Arial"/>
               </a:rPr>
@@ -12404,8 +13033,8 @@
         </p:nvSpPr>
         <p:spPr>
           <a:xfrm>
-            <a:off x="411480" y="1353312"/>
-            <a:ext cx="8321040" cy="804672"/>
+            <a:off x="128016" y="1517904"/>
+            <a:ext cx="8887968" cy="822960"/>
           </a:xfrm>
           <a:prstGeom prst="roundRect">
             <a:avLst>
@@ -12413,7 +13042,7 @@
             </a:avLst>
           </a:prstGeom>
           <a:solidFill>
-            <a:srgbClr val="EEF2FA"/>
+            <a:srgbClr val="EEF4FF"/>
           </a:solidFill>
           <a:ln>
             <a:noFill/>
@@ -12435,7 +13064,7 @@
           </a:fontRef>
         </p:style>
         <p:txBody>
-          <a:bodyPr rtlCol="0" anchor="ctr" wrap="square" lIns="128016" rIns="128016" tIns="91440" bIns="91440"/>
+          <a:bodyPr rtlCol="0" anchor="ctr" wrap="square" lIns="128016" rIns="128016" tIns="82296" bIns="82296"/>
           <a:lstStyle/>
           <a:p>
             <a:pPr algn="ctr"/>
@@ -12479,8 +13108,8 @@
         </p:nvSpPr>
         <p:spPr>
           <a:xfrm>
-            <a:off x="411480" y="2240280"/>
-            <a:ext cx="8321040" cy="804672"/>
+            <a:off x="128016" y="2432304"/>
+            <a:ext cx="8887968" cy="822960"/>
           </a:xfrm>
           <a:prstGeom prst="roundRect">
             <a:avLst>
@@ -12488,7 +13117,7 @@
             </a:avLst>
           </a:prstGeom>
           <a:solidFill>
-            <a:srgbClr val="EEF2FA"/>
+            <a:srgbClr val="EEF4FF"/>
           </a:solidFill>
           <a:ln>
             <a:noFill/>
@@ -12510,7 +13139,7 @@
           </a:fontRef>
         </p:style>
         <p:txBody>
-          <a:bodyPr rtlCol="0" anchor="ctr" wrap="square" lIns="128016" rIns="128016" tIns="91440" bIns="91440"/>
+          <a:bodyPr rtlCol="0" anchor="ctr" wrap="square" lIns="128016" rIns="128016" tIns="82296" bIns="82296"/>
           <a:lstStyle/>
           <a:p>
             <a:pPr algn="ctr"/>
@@ -12554,8 +13183,8 @@
         </p:nvSpPr>
         <p:spPr>
           <a:xfrm>
-            <a:off x="411480" y="3127248"/>
-            <a:ext cx="8321040" cy="804672"/>
+            <a:off x="128016" y="3346704"/>
+            <a:ext cx="8887968" cy="822960"/>
           </a:xfrm>
           <a:prstGeom prst="roundRect">
             <a:avLst>
@@ -12563,7 +13192,7 @@
             </a:avLst>
           </a:prstGeom>
           <a:solidFill>
-            <a:srgbClr val="EEF2FA"/>
+            <a:srgbClr val="EEF4FF"/>
           </a:solidFill>
           <a:ln>
             <a:noFill/>
@@ -12585,7 +13214,7 @@
           </a:fontRef>
         </p:style>
         <p:txBody>
-          <a:bodyPr rtlCol="0" anchor="ctr" wrap="square" lIns="128016" rIns="128016" tIns="91440" bIns="91440"/>
+          <a:bodyPr rtlCol="0" anchor="ctr" wrap="square" lIns="128016" rIns="128016" tIns="82296" bIns="82296"/>
           <a:lstStyle/>
           <a:p>
             <a:pPr algn="ctr"/>
@@ -12629,8 +13258,8 @@
         </p:nvSpPr>
         <p:spPr>
           <a:xfrm>
-            <a:off x="411480" y="4014215"/>
-            <a:ext cx="8321040" cy="804672"/>
+            <a:off x="128016" y="4261104"/>
+            <a:ext cx="8887968" cy="822960"/>
           </a:xfrm>
           <a:prstGeom prst="roundRect">
             <a:avLst>
@@ -12638,7 +13267,7 @@
             </a:avLst>
           </a:prstGeom>
           <a:solidFill>
-            <a:srgbClr val="EEF2FA"/>
+            <a:srgbClr val="EEF4FF"/>
           </a:solidFill>
           <a:ln>
             <a:noFill/>
@@ -12660,7 +13289,7 @@
           </a:fontRef>
         </p:style>
         <p:txBody>
-          <a:bodyPr rtlCol="0" anchor="ctr" wrap="square" lIns="128016" rIns="128016" tIns="91440" bIns="91440"/>
+          <a:bodyPr rtlCol="0" anchor="ctr" wrap="square" lIns="128016" rIns="128016" tIns="82296" bIns="82296"/>
           <a:lstStyle/>
           <a:p>
             <a:pPr algn="ctr"/>
@@ -12704,8 +13333,8 @@
         </p:nvSpPr>
         <p:spPr>
           <a:xfrm>
-            <a:off x="411480" y="4901183"/>
-            <a:ext cx="8321040" cy="804672"/>
+            <a:off x="128016" y="5175504"/>
+            <a:ext cx="8887968" cy="822960"/>
           </a:xfrm>
           <a:prstGeom prst="roundRect">
             <a:avLst>
@@ -12713,7 +13342,7 @@
             </a:avLst>
           </a:prstGeom>
           <a:solidFill>
-            <a:srgbClr val="EEF2FA"/>
+            <a:srgbClr val="EEF4FF"/>
           </a:solidFill>
           <a:ln>
             <a:noFill/>
@@ -12735,7 +13364,7 @@
           </a:fontRef>
         </p:style>
         <p:txBody>
-          <a:bodyPr rtlCol="0" anchor="ctr" wrap="square" lIns="128016" rIns="128016" tIns="91440" bIns="91440"/>
+          <a:bodyPr rtlCol="0" anchor="ctr" wrap="square" lIns="128016" rIns="128016" tIns="82296" bIns="82296"/>
           <a:lstStyle/>
           <a:p>
             <a:pPr algn="ctr"/>
@@ -12797,8 +13426,8 @@
         </p:nvSpPr>
         <p:spPr>
           <a:xfrm>
-            <a:off x="411480" y="292608"/>
-            <a:ext cx="6400800" cy="731520"/>
+            <a:off x="128016" y="100584"/>
+            <a:ext cx="7479792" cy="694944"/>
           </a:xfrm>
           <a:prstGeom prst="rect">
             <a:avLst/>
@@ -12826,14 +13455,48 @@
       </p:sp>
       <p:sp>
         <p:nvSpPr>
-          <p:cNvPr id="3" name="Rounded Rectangle 2"/>
+          <p:cNvPr id="3" name="TitleLine"/>
+          <p:cNvSpPr txBox="1"/>
+          <p:nvPr/>
+        </p:nvSpPr>
+        <p:spPr>
+          <a:xfrm>
+            <a:off x="128016" y="859536"/>
+            <a:ext cx="8887968" cy="457200"/>
+          </a:xfrm>
+          <a:prstGeom prst="rect">
+            <a:avLst/>
+          </a:prstGeom>
+          <a:noFill/>
+        </p:spPr>
+        <p:txBody>
+          <a:bodyPr wrap="square" anchor="ctr" lIns="0" rIns="0" tIns="18288" bIns="18288">
+            <a:spAutoFit/>
+          </a:bodyPr>
+          <a:lstStyle/>
+          <a:p>
+            <a:r>
+              <a:rPr sz="2200" b="1" i="0">
+                <a:solidFill>
+                  <a:srgbClr val="1A1A1A"/>
+                </a:solidFill>
+                <a:latin typeface="Arial"/>
+              </a:rPr>
+              <a:t>Summary and next step</a:t>
+            </a:r>
+          </a:p>
+        </p:txBody>
+      </p:sp>
+      <p:sp>
+        <p:nvSpPr>
+          <p:cNvPr id="4" name="Rounded Rectangle 3"/>
           <p:cNvSpPr/>
           <p:nvPr/>
         </p:nvSpPr>
         <p:spPr>
           <a:xfrm>
-            <a:off x="411480" y="1371600"/>
-            <a:ext cx="8321040" cy="987552"/>
+            <a:off x="128016" y="1481328"/>
+            <a:ext cx="8887968" cy="841248"/>
           </a:xfrm>
           <a:prstGeom prst="roundRect">
             <a:avLst>
@@ -12841,7 +13504,7 @@
             </a:avLst>
           </a:prstGeom>
           <a:solidFill>
-            <a:srgbClr val="EEF2FA"/>
+            <a:srgbClr val="EEF4FF"/>
           </a:solidFill>
           <a:ln>
             <a:noFill/>
@@ -12863,7 +13526,7 @@
           </a:fontRef>
         </p:style>
         <p:txBody>
-          <a:bodyPr rtlCol="0" anchor="ctr" wrap="square" lIns="128016" rIns="128016" tIns="91440" bIns="91440"/>
+          <a:bodyPr rtlCol="0" anchor="ctr" wrap="square" lIns="128016" rIns="128016" tIns="82296" bIns="82296"/>
           <a:lstStyle/>
           <a:p>
             <a:pPr algn="ctr"/>
@@ -12901,14 +13564,14 @@
       </p:sp>
       <p:sp>
         <p:nvSpPr>
-          <p:cNvPr id="4" name="Rounded Rectangle 3"/>
+          <p:cNvPr id="5" name="Rounded Rectangle 4"/>
           <p:cNvSpPr/>
           <p:nvPr/>
         </p:nvSpPr>
         <p:spPr>
           <a:xfrm>
-            <a:off x="411480" y="2468880"/>
-            <a:ext cx="8321040" cy="987552"/>
+            <a:off x="128016" y="2359152"/>
+            <a:ext cx="8887968" cy="841248"/>
           </a:xfrm>
           <a:prstGeom prst="roundRect">
             <a:avLst>
@@ -12916,7 +13579,7 @@
             </a:avLst>
           </a:prstGeom>
           <a:solidFill>
-            <a:srgbClr val="EEF2FA"/>
+            <a:srgbClr val="EEF4FF"/>
           </a:solidFill>
           <a:ln>
             <a:noFill/>
@@ -12938,7 +13601,7 @@
           </a:fontRef>
         </p:style>
         <p:txBody>
-          <a:bodyPr rtlCol="0" anchor="ctr" wrap="square" lIns="128016" rIns="128016" tIns="91440" bIns="91440"/>
+          <a:bodyPr rtlCol="0" anchor="ctr" wrap="square" lIns="128016" rIns="128016" tIns="82296" bIns="82296"/>
           <a:lstStyle/>
           <a:p>
             <a:pPr algn="ctr"/>
@@ -12976,14 +13639,14 @@
       </p:sp>
       <p:sp>
         <p:nvSpPr>
-          <p:cNvPr id="5" name="Rounded Rectangle 4"/>
+          <p:cNvPr id="6" name="Rounded Rectangle 5"/>
           <p:cNvSpPr/>
           <p:nvPr/>
         </p:nvSpPr>
         <p:spPr>
           <a:xfrm>
-            <a:off x="411480" y="3566160"/>
-            <a:ext cx="8321040" cy="987552"/>
+            <a:off x="128016" y="3236976"/>
+            <a:ext cx="8887968" cy="841248"/>
           </a:xfrm>
           <a:prstGeom prst="roundRect">
             <a:avLst>
@@ -12991,7 +13654,7 @@
             </a:avLst>
           </a:prstGeom>
           <a:solidFill>
-            <a:srgbClr val="FDEEEE"/>
+            <a:srgbClr val="FFF6E8"/>
           </a:solidFill>
           <a:ln>
             <a:noFill/>
@@ -13013,14 +13676,14 @@
           </a:fontRef>
         </p:style>
         <p:txBody>
-          <a:bodyPr rtlCol="0" anchor="ctr" wrap="square" lIns="128016" rIns="128016" tIns="91440" bIns="91440"/>
+          <a:bodyPr rtlCol="0" anchor="ctr" wrap="square" lIns="128016" rIns="128016" tIns="82296" bIns="82296"/>
           <a:lstStyle/>
           <a:p>
             <a:pPr algn="ctr"/>
             <a:r>
               <a:rPr sz="1800" b="1" i="0">
                 <a:solidFill>
-                  <a:srgbClr val="C00000"/>
+                  <a:srgbClr val="1C3077"/>
                 </a:solidFill>
                 <a:latin typeface="Arial"/>
               </a:rPr>
@@ -13029,7 +13692,7 @@
             <a:r>
               <a:rPr sz="1800" b="1" i="0">
                 <a:solidFill>
-                  <a:srgbClr val="C00000"/>
+                  <a:srgbClr val="1C3077"/>
                 </a:solidFill>
                 <a:latin typeface="Arial"/>
               </a:rPr>
@@ -13051,14 +13714,14 @@
       </p:sp>
       <p:sp>
         <p:nvSpPr>
-          <p:cNvPr id="6" name="Rounded Rectangle 5"/>
+          <p:cNvPr id="7" name="Rounded Rectangle 6"/>
           <p:cNvSpPr/>
           <p:nvPr/>
         </p:nvSpPr>
         <p:spPr>
           <a:xfrm>
-            <a:off x="411480" y="4681728"/>
-            <a:ext cx="8321040" cy="868680"/>
+            <a:off x="128016" y="4114800"/>
+            <a:ext cx="8887968" cy="713232"/>
           </a:xfrm>
           <a:prstGeom prst="roundRect">
             <a:avLst>
@@ -13088,7 +13751,7 @@
           </a:fontRef>
         </p:style>
         <p:txBody>
-          <a:bodyPr rtlCol="0" anchor="ctr" wrap="square" lIns="128016" rIns="128016" tIns="91440" bIns="91440"/>
+          <a:bodyPr rtlCol="0" anchor="ctr" wrap="square" lIns="128016" rIns="128016" tIns="82296" bIns="82296"/>
           <a:lstStyle/>
           <a:p>
             <a:pPr algn="ctr"/>
@@ -13115,14 +13778,14 @@
       </p:sp>
       <p:sp>
         <p:nvSpPr>
-          <p:cNvPr id="7" name="Rounded Rectangle 6"/>
+          <p:cNvPr id="8" name="Rounded Rectangle 7"/>
           <p:cNvSpPr/>
           <p:nvPr/>
         </p:nvSpPr>
         <p:spPr>
           <a:xfrm>
-            <a:off x="411480" y="5742432"/>
-            <a:ext cx="8321040" cy="731520"/>
+            <a:off x="128016" y="4919472"/>
+            <a:ext cx="8887968" cy="731520"/>
           </a:xfrm>
           <a:prstGeom prst="roundRect">
             <a:avLst>
@@ -13130,7 +13793,7 @@
             </a:avLst>
           </a:prstGeom>
           <a:solidFill>
-            <a:srgbClr val="EEF2FA"/>
+            <a:srgbClr val="EEF4FF"/>
           </a:solidFill>
           <a:ln>
             <a:noFill/>
@@ -13164,6 +13827,75 @@
                 <a:latin typeface="Arial"/>
               </a:rPr>
               <a:t>PRA manuscript complete; six figures and all numerical gates recorded and reproducible from the repository.</a:t>
+            </a:r>
+          </a:p>
+        </p:txBody>
+      </p:sp>
+      <p:cxnSp>
+        <p:nvCxnSpPr>
+          <p:cNvPr id="9" name="Connector 8"/>
+          <p:cNvCxnSpPr/>
+          <p:nvPr/>
+        </p:nvCxnSpPr>
+        <p:spPr>
+          <a:xfrm>
+            <a:off x="128016" y="5870448"/>
+            <a:ext cx="8887968" cy="0"/>
+          </a:xfrm>
+          <a:prstGeom prst="line">
+            <a:avLst/>
+          </a:prstGeom>
+          <a:ln w="9525">
+            <a:solidFill>
+              <a:srgbClr val="BBBBBB"/>
+            </a:solidFill>
+          </a:ln>
+        </p:spPr>
+        <p:style>
+          <a:lnRef idx="2">
+            <a:schemeClr val="accent1"/>
+          </a:lnRef>
+          <a:fillRef idx="0">
+            <a:schemeClr val="accent1"/>
+          </a:fillRef>
+          <a:effectRef idx="1">
+            <a:schemeClr val="accent1"/>
+          </a:effectRef>
+          <a:fontRef idx="minor">
+            <a:schemeClr val="tx1"/>
+          </a:fontRef>
+        </p:style>
+      </p:cxnSp>
+      <p:sp>
+        <p:nvSpPr>
+          <p:cNvPr id="10" name="RefBand"/>
+          <p:cNvSpPr txBox="1"/>
+          <p:nvPr/>
+        </p:nvSpPr>
+        <p:spPr>
+          <a:xfrm>
+            <a:off x="128016" y="5916168"/>
+            <a:ext cx="8321040" cy="548640"/>
+          </a:xfrm>
+          <a:prstGeom prst="rect">
+            <a:avLst/>
+          </a:prstGeom>
+          <a:noFill/>
+        </p:spPr>
+        <p:txBody>
+          <a:bodyPr wrap="square" anchor="t" lIns="0" rIns="0" tIns="18288" bIns="18288">
+            <a:spAutoFit/>
+          </a:bodyPr>
+          <a:lstStyle/>
+          <a:p>
+            <a:r>
+              <a:rPr sz="1000" b="0" i="1">
+                <a:solidFill>
+                  <a:srgbClr val="555555"/>
+                </a:solidFill>
+                <a:latin typeface="Arial"/>
+              </a:rPr>
+              <a:t>All contrasts, boundaries and integration times: this work, full 9-level Lindblad generator.</a:t>
             </a:r>
           </a:p>
         </p:txBody>
@@ -13224,7 +13956,7 @@
                 </a:solidFill>
                 <a:latin typeface="Arial"/>
               </a:rPr>
-              <a:t>Supplementary</a:t>
+              <a:t>Appendix</a:t>
             </a:r>
           </a:p>
         </p:txBody>
@@ -13255,8 +13987,8 @@
         </p:nvSpPr>
         <p:spPr>
           <a:xfrm>
-            <a:off x="411480" y="292608"/>
-            <a:ext cx="6400800" cy="731520"/>
+            <a:off x="128016" y="100584"/>
+            <a:ext cx="7479792" cy="694944"/>
           </a:xfrm>
           <a:prstGeom prst="rect">
             <a:avLst/>
@@ -13284,14 +14016,48 @@
       </p:sp>
       <p:sp>
         <p:nvSpPr>
-          <p:cNvPr id="3" name="TextBox 2"/>
+          <p:cNvPr id="3" name="TitleLine"/>
           <p:cNvSpPr txBox="1"/>
           <p:nvPr/>
         </p:nvSpPr>
         <p:spPr>
           <a:xfrm>
-            <a:off x="411480" y="1243584"/>
-            <a:ext cx="8321040" cy="530352"/>
+            <a:off x="128016" y="859536"/>
+            <a:ext cx="8887968" cy="457200"/>
+          </a:xfrm>
+          <a:prstGeom prst="rect">
+            <a:avLst/>
+          </a:prstGeom>
+          <a:noFill/>
+        </p:spPr>
+        <p:txBody>
+          <a:bodyPr wrap="square" anchor="ctr" lIns="0" rIns="0" tIns="18288" bIns="18288">
+            <a:spAutoFit/>
+          </a:bodyPr>
+          <a:lstStyle/>
+          <a:p>
+            <a:r>
+              <a:rPr sz="2200" b="1" i="0">
+                <a:solidFill>
+                  <a:srgbClr val="1A1A1A"/>
+                </a:solidFill>
+                <a:latin typeface="Arial"/>
+              </a:rPr>
+              <a:t>Appendix 1: Theorems behind the criterion</a:t>
+            </a:r>
+          </a:p>
+        </p:txBody>
+      </p:sp>
+      <p:sp>
+        <p:nvSpPr>
+          <p:cNvPr id="4" name="TextBox 3"/>
+          <p:cNvSpPr txBox="1"/>
+          <p:nvPr/>
+        </p:nvSpPr>
+        <p:spPr>
+          <a:xfrm>
+            <a:off x="128016" y="1481328"/>
+            <a:ext cx="8887968" cy="365760"/>
           </a:xfrm>
           <a:prstGeom prst="rect">
             <a:avLst/>
@@ -13327,14 +14093,14 @@
       </p:sp>
       <p:sp>
         <p:nvSpPr>
-          <p:cNvPr id="4" name="TextBox 3"/>
+          <p:cNvPr id="5" name="TextBox 4"/>
           <p:cNvSpPr txBox="1"/>
           <p:nvPr/>
         </p:nvSpPr>
         <p:spPr>
           <a:xfrm>
-            <a:off x="411480" y="1796796"/>
-            <a:ext cx="8321040" cy="530352"/>
+            <a:off x="128016" y="1892808"/>
+            <a:ext cx="8887968" cy="365760"/>
           </a:xfrm>
           <a:prstGeom prst="rect">
             <a:avLst/>
@@ -13363,21 +14129,21 @@
                 </a:solidFill>
                 <a:latin typeface="Arial"/>
               </a:rPr>
-              <a:t>A pure dark state is stationary iff it is an eigenvector of every jump operator and of an effective Hamiltonian.</a:t>
-            </a:r>
-          </a:p>
-        </p:txBody>
-      </p:sp>
-      <p:sp>
-        <p:nvSpPr>
-          <p:cNvPr id="5" name="TextBox 4"/>
+              <a:t>Stationary iff it is an eigenvector of every jump operator and of H_eff.</a:t>
+            </a:r>
+          </a:p>
+        </p:txBody>
+      </p:sp>
+      <p:sp>
+        <p:nvSpPr>
+          <p:cNvPr id="6" name="TextBox 5"/>
           <p:cNvSpPr txBox="1"/>
           <p:nvPr/>
         </p:nvSpPr>
         <p:spPr>
           <a:xfrm>
-            <a:off x="411480" y="2350008"/>
-            <a:ext cx="8321040" cy="530352"/>
+            <a:off x="128016" y="2304288"/>
+            <a:ext cx="8887968" cy="365760"/>
           </a:xfrm>
           <a:prstGeom prst="rect">
             <a:avLst/>
@@ -13406,21 +14172,21 @@
                 </a:solidFill>
                 <a:latin typeface="Arial"/>
               </a:rPr>
-              <a:t>The weak-probe response is an exact Schur complement — no adiabatic elimination.</a:t>
-            </a:r>
-          </a:p>
-        </p:txBody>
-      </p:sp>
-      <p:sp>
-        <p:nvSpPr>
-          <p:cNvPr id="6" name="TextBox 5"/>
+              <a:t>The weak-probe response is an exact Schur complement.</a:t>
+            </a:r>
+          </a:p>
+        </p:txBody>
+      </p:sp>
+      <p:sp>
+        <p:nvSpPr>
+          <p:cNvPr id="7" name="TextBox 6"/>
           <p:cNvSpPr txBox="1"/>
           <p:nvPr/>
         </p:nvSpPr>
         <p:spPr>
           <a:xfrm>
-            <a:off x="411480" y="2903220"/>
-            <a:ext cx="8321040" cy="530352"/>
+            <a:off x="128016" y="2715768"/>
+            <a:ext cx="8887968" cy="365760"/>
           </a:xfrm>
           <a:prstGeom prst="rect">
             <a:avLst/>
@@ -13456,14 +14222,14 @@
       </p:sp>
       <p:sp>
         <p:nvSpPr>
-          <p:cNvPr id="7" name="TextBox 6"/>
+          <p:cNvPr id="8" name="TextBox 7"/>
           <p:cNvSpPr txBox="1"/>
           <p:nvPr/>
         </p:nvSpPr>
         <p:spPr>
           <a:xfrm>
-            <a:off x="411480" y="3456432"/>
-            <a:ext cx="8321040" cy="530352"/>
+            <a:off x="128016" y="3127248"/>
+            <a:ext cx="8887968" cy="365760"/>
           </a:xfrm>
           <a:prstGeom prst="rect">
             <a:avLst/>
@@ -13492,21 +14258,21 @@
                 </a:solidFill>
                 <a:latin typeface="Arial"/>
               </a:rPr>
-              <a:t>Under fast damping the first non-zero path moment fixes the suppression power of 1/Γ.</a:t>
-            </a:r>
-          </a:p>
-        </p:txBody>
-      </p:sp>
-      <p:sp>
-        <p:nvSpPr>
-          <p:cNvPr id="8" name="TextBox 7"/>
+              <a:t>Under fast damping the first non-zero path moment fixes the power of 1/Γ.</a:t>
+            </a:r>
+          </a:p>
+        </p:txBody>
+      </p:sp>
+      <p:sp>
+        <p:nvSpPr>
+          <p:cNvPr id="9" name="TextBox 8"/>
           <p:cNvSpPr txBox="1"/>
           <p:nvPr/>
         </p:nvSpPr>
         <p:spPr>
           <a:xfrm>
-            <a:off x="411480" y="4009644"/>
-            <a:ext cx="8321040" cy="530352"/>
+            <a:off x="128016" y="3538728"/>
+            <a:ext cx="8887968" cy="365760"/>
           </a:xfrm>
           <a:prstGeom prst="rect">
             <a:avLst/>
@@ -13542,14 +14308,14 @@
       </p:sp>
       <p:sp>
         <p:nvSpPr>
-          <p:cNvPr id="9" name="TextBox 8"/>
+          <p:cNvPr id="10" name="TextBox 9"/>
           <p:cNvSpPr txBox="1"/>
           <p:nvPr/>
         </p:nvSpPr>
         <p:spPr>
           <a:xfrm>
-            <a:off x="411480" y="4562856"/>
-            <a:ext cx="8321040" cy="530352"/>
+            <a:off x="128016" y="3950208"/>
+            <a:ext cx="8887968" cy="365760"/>
           </a:xfrm>
           <a:prstGeom prst="rect">
             <a:avLst/>
@@ -13585,14 +14351,14 @@
       </p:sp>
       <p:sp>
         <p:nvSpPr>
-          <p:cNvPr id="10" name="TextBox 9"/>
+          <p:cNvPr id="11" name="TextBox 10"/>
           <p:cNvSpPr txBox="1"/>
           <p:nvPr/>
         </p:nvSpPr>
         <p:spPr>
           <a:xfrm>
-            <a:off x="411480" y="5116068"/>
-            <a:ext cx="8321040" cy="530352"/>
+            <a:off x="128016" y="4361688"/>
+            <a:ext cx="8887968" cy="365760"/>
           </a:xfrm>
           <a:prstGeom prst="rect">
             <a:avLst/>
@@ -13628,14 +14394,14 @@
       </p:sp>
       <p:sp>
         <p:nvSpPr>
-          <p:cNvPr id="11" name="Rounded Rectangle 10"/>
+          <p:cNvPr id="12" name="Rounded Rectangle 11"/>
           <p:cNvSpPr/>
           <p:nvPr/>
         </p:nvSpPr>
         <p:spPr>
           <a:xfrm>
-            <a:off x="411480" y="5742432"/>
-            <a:ext cx="8321040" cy="731520"/>
+            <a:off x="128016" y="4919472"/>
+            <a:ext cx="8887968" cy="731520"/>
           </a:xfrm>
           <a:prstGeom prst="roundRect">
             <a:avLst>
@@ -13643,7 +14409,7 @@
             </a:avLst>
           </a:prstGeom>
           <a:solidFill>
-            <a:srgbClr val="EEF2FA"/>
+            <a:srgbClr val="EEF4FF"/>
           </a:solidFill>
           <a:ln>
             <a:noFill/>
@@ -13677,6 +14443,75 @@
                 <a:latin typeface="Arial"/>
               </a:rPr>
               <a:t>Full statements and proofs are in the group's theory note; the manuscript uses 2A, 2B and the rate map only.</a:t>
+            </a:r>
+          </a:p>
+        </p:txBody>
+      </p:sp>
+      <p:cxnSp>
+        <p:nvCxnSpPr>
+          <p:cNvPr id="13" name="Connector 12"/>
+          <p:cNvCxnSpPr/>
+          <p:nvPr/>
+        </p:nvCxnSpPr>
+        <p:spPr>
+          <a:xfrm>
+            <a:off x="128016" y="5870448"/>
+            <a:ext cx="8887968" cy="0"/>
+          </a:xfrm>
+          <a:prstGeom prst="line">
+            <a:avLst/>
+          </a:prstGeom>
+          <a:ln w="9525">
+            <a:solidFill>
+              <a:srgbClr val="BBBBBB"/>
+            </a:solidFill>
+          </a:ln>
+        </p:spPr>
+        <p:style>
+          <a:lnRef idx="2">
+            <a:schemeClr val="accent1"/>
+          </a:lnRef>
+          <a:fillRef idx="0">
+            <a:schemeClr val="accent1"/>
+          </a:fillRef>
+          <a:effectRef idx="1">
+            <a:schemeClr val="accent1"/>
+          </a:effectRef>
+          <a:fontRef idx="minor">
+            <a:schemeClr val="tx1"/>
+          </a:fontRef>
+        </p:style>
+      </p:cxnSp>
+      <p:sp>
+        <p:nvSpPr>
+          <p:cNvPr id="14" name="RefBand"/>
+          <p:cNvSpPr txBox="1"/>
+          <p:nvPr/>
+        </p:nvSpPr>
+        <p:spPr>
+          <a:xfrm>
+            <a:off x="128016" y="5916168"/>
+            <a:ext cx="8321040" cy="548640"/>
+          </a:xfrm>
+          <a:prstGeom prst="rect">
+            <a:avLst/>
+          </a:prstGeom>
+          <a:noFill/>
+        </p:spPr>
+        <p:txBody>
+          <a:bodyPr wrap="square" anchor="t" lIns="0" rIns="0" tIns="18288" bIns="18288">
+            <a:spAutoFit/>
+          </a:bodyPr>
+          <a:lstStyle/>
+          <a:p>
+            <a:r>
+              <a:rPr sz="1000" b="0" i="1">
+                <a:solidFill>
+                  <a:srgbClr val="555555"/>
+                </a:solidFill>
+                <a:latin typeface="Arial"/>
+              </a:rPr>
+              <a:t>Dark-state classification: [6] D. Finkelstein-Shapiro et al., Phys. Rev. A 99, 053829 (2019).   Morris–Shore: [15] J. R. Morris and B. W. Shore, Phys. Rev. A 27, 906 (1983).</a:t>
             </a:r>
           </a:p>
         </p:txBody>
@@ -13707,8 +14542,8 @@
         </p:nvSpPr>
         <p:spPr>
           <a:xfrm>
-            <a:off x="411480" y="292608"/>
-            <a:ext cx="6400800" cy="731520"/>
+            <a:off x="128016" y="100584"/>
+            <a:ext cx="7479792" cy="694944"/>
           </a:xfrm>
           <a:prstGeom prst="rect">
             <a:avLst/>
@@ -13736,14 +14571,48 @@
       </p:sp>
       <p:sp>
         <p:nvSpPr>
-          <p:cNvPr id="3" name="TextBox 2"/>
+          <p:cNvPr id="3" name="TitleLine"/>
           <p:cNvSpPr txBox="1"/>
           <p:nvPr/>
         </p:nvSpPr>
         <p:spPr>
           <a:xfrm>
-            <a:off x="411480" y="1325880"/>
-            <a:ext cx="8321040" cy="2286000"/>
+            <a:off x="128016" y="859536"/>
+            <a:ext cx="8887968" cy="457200"/>
+          </a:xfrm>
+          <a:prstGeom prst="rect">
+            <a:avLst/>
+          </a:prstGeom>
+          <a:noFill/>
+        </p:spPr>
+        <p:txBody>
+          <a:bodyPr wrap="square" anchor="ctr" lIns="0" rIns="0" tIns="18288" bIns="18288">
+            <a:spAutoFit/>
+          </a:bodyPr>
+          <a:lstStyle/>
+          <a:p>
+            <a:r>
+              <a:rPr sz="2200" b="1" i="0">
+                <a:solidFill>
+                  <a:srgbClr val="1A1A1A"/>
+                </a:solidFill>
+                <a:latin typeface="Arial"/>
+              </a:rPr>
+              <a:t>Appendix 2: Reduced kernel vs full Liouvillian</a:t>
+            </a:r>
+          </a:p>
+        </p:txBody>
+      </p:sp>
+      <p:sp>
+        <p:nvSpPr>
+          <p:cNvPr id="4" name="TextBox 3"/>
+          <p:cNvSpPr txBox="1"/>
+          <p:nvPr/>
+        </p:nvSpPr>
+        <p:spPr>
+          <a:xfrm>
+            <a:off x="128016" y="1481328"/>
+            <a:ext cx="8887968" cy="1645920"/>
           </a:xfrm>
           <a:prstGeom prst="rect">
             <a:avLst/>
@@ -13838,7 +14707,7 @@
                 </a:solidFill>
                 <a:latin typeface="Arial"/>
               </a:rPr>
-              <a:t>Failures are structured, not random: below 40 K the reduced kernel reports transparency where the full model reports induced absorption; above 90 K no field agrees within 10 %.</a:t>
+              <a:t>Failures are structured, not random: below 40 K the reduced kernel reports transparency where the full model reports absorption; above 90 K no field agrees within 10 %.</a:t>
             </a:r>
           </a:p>
           <a:p>
@@ -13863,21 +14732,21 @@
                 </a:solidFill>
                 <a:latin typeface="Arial"/>
               </a:rPr>
-              <a:t>Threshold temperatures still agree — the full-model bands overlap the reduced ones with medians shifted by ≈ 3 K.</a:t>
-            </a:r>
-          </a:p>
-        </p:txBody>
-      </p:sp>
-      <p:sp>
-        <p:nvSpPr>
-          <p:cNvPr id="4" name="Rounded Rectangle 3"/>
+              <a:t>Threshold temperatures still agree — the bands overlap, medians shifted by ≈ 3 K.</a:t>
+            </a:r>
+          </a:p>
+        </p:txBody>
+      </p:sp>
+      <p:sp>
+        <p:nvSpPr>
+          <p:cNvPr id="5" name="Rounded Rectangle 4"/>
           <p:cNvSpPr/>
           <p:nvPr/>
         </p:nvSpPr>
         <p:spPr>
           <a:xfrm>
-            <a:off x="411480" y="3749039"/>
-            <a:ext cx="8321040" cy="1920240"/>
+            <a:off x="128016" y="3200400"/>
+            <a:ext cx="8887968" cy="1627632"/>
           </a:xfrm>
           <a:prstGeom prst="roundRect">
             <a:avLst>
@@ -13885,7 +14754,7 @@
             </a:avLst>
           </a:prstGeom>
           <a:solidFill>
-            <a:srgbClr val="EEF2FA"/>
+            <a:srgbClr val="EEF4FF"/>
           </a:solidFill>
           <a:ln>
             <a:noFill/>
@@ -13907,7 +14776,7 @@
           </a:fontRef>
         </p:style>
         <p:txBody>
-          <a:bodyPr rtlCol="0" anchor="ctr" wrap="square" lIns="128016" rIns="128016" tIns="91440" bIns="91440"/>
+          <a:bodyPr rtlCol="0" anchor="ctr" wrap="square" lIns="128016" rIns="128016" tIns="82296" bIns="82296"/>
           <a:lstStyle/>
           <a:p>
             <a:pPr algn="ctr"/>
@@ -13924,7 +14793,7 @@
           <a:p>
             <a:pPr>
               <a:spcBef>
-                <a:spcPts val="700"/>
+                <a:spcPts val="500"/>
               </a:spcBef>
             </a:pPr>
             <a:r>
@@ -13940,7 +14809,7 @@
           <a:p>
             <a:pPr>
               <a:spcBef>
-                <a:spcPts val="700"/>
+                <a:spcPts val="500"/>
               </a:spcBef>
             </a:pPr>
             <a:r>
@@ -13950,13 +14819,13 @@
                 </a:solidFill>
                 <a:latin typeface="Arial"/>
               </a:rPr>
-              <a:t>•  The reduced kernel is used only for threshold locations, and those were re-derived with the full model as a check</a:t>
+              <a:t>•  The reduced kernel is used only for threshold locations, re-derived with the full model as a check</a:t>
             </a:r>
           </a:p>
           <a:p>
             <a:pPr>
               <a:spcBef>
-                <a:spcPts val="700"/>
+                <a:spcPts val="500"/>
               </a:spcBef>
             </a:pPr>
             <a:r>
@@ -13973,14 +14842,14 @@
       </p:sp>
       <p:sp>
         <p:nvSpPr>
-          <p:cNvPr id="5" name="Rounded Rectangle 4"/>
+          <p:cNvPr id="6" name="Rounded Rectangle 5"/>
           <p:cNvSpPr/>
           <p:nvPr/>
         </p:nvSpPr>
         <p:spPr>
           <a:xfrm>
-            <a:off x="411480" y="5742432"/>
-            <a:ext cx="8321040" cy="731520"/>
+            <a:off x="128016" y="4919472"/>
+            <a:ext cx="8887968" cy="731520"/>
           </a:xfrm>
           <a:prstGeom prst="roundRect">
             <a:avLst>
@@ -13988,7 +14857,7 @@
             </a:avLst>
           </a:prstGeom>
           <a:solidFill>
-            <a:srgbClr val="EEF2FA"/>
+            <a:srgbClr val="EEF4FF"/>
           </a:solidFill>
           <a:ln>
             <a:noFill/>
@@ -14022,6 +14891,75 @@
                 <a:latin typeface="Arial"/>
               </a:rPr>
               <a:t>Reduced-vs-full agreement is 47/108 points within 10 % with 13 sign disagreements, concentrated below 40 K and above 90 K.</a:t>
+            </a:r>
+          </a:p>
+        </p:txBody>
+      </p:sp>
+      <p:cxnSp>
+        <p:nvCxnSpPr>
+          <p:cNvPr id="7" name="Connector 6"/>
+          <p:cNvCxnSpPr/>
+          <p:nvPr/>
+        </p:nvCxnSpPr>
+        <p:spPr>
+          <a:xfrm>
+            <a:off x="128016" y="5870448"/>
+            <a:ext cx="8887968" cy="0"/>
+          </a:xfrm>
+          <a:prstGeom prst="line">
+            <a:avLst/>
+          </a:prstGeom>
+          <a:ln w="9525">
+            <a:solidFill>
+              <a:srgbClr val="BBBBBB"/>
+            </a:solidFill>
+          </a:ln>
+        </p:spPr>
+        <p:style>
+          <a:lnRef idx="2">
+            <a:schemeClr val="accent1"/>
+          </a:lnRef>
+          <a:fillRef idx="0">
+            <a:schemeClr val="accent1"/>
+          </a:fillRef>
+          <a:effectRef idx="1">
+            <a:schemeClr val="accent1"/>
+          </a:effectRef>
+          <a:fontRef idx="minor">
+            <a:schemeClr val="tx1"/>
+          </a:fontRef>
+        </p:style>
+      </p:cxnSp>
+      <p:sp>
+        <p:nvSpPr>
+          <p:cNvPr id="8" name="RefBand"/>
+          <p:cNvSpPr txBox="1"/>
+          <p:nvPr/>
+        </p:nvSpPr>
+        <p:spPr>
+          <a:xfrm>
+            <a:off x="128016" y="5916168"/>
+            <a:ext cx="8321040" cy="548640"/>
+          </a:xfrm>
+          <a:prstGeom prst="rect">
+            <a:avLst/>
+          </a:prstGeom>
+          <a:noFill/>
+        </p:spPr>
+        <p:txBody>
+          <a:bodyPr wrap="square" anchor="t" lIns="0" rIns="0" tIns="18288" bIns="18288">
+            <a:spAutoFit/>
+          </a:bodyPr>
+          <a:lstStyle/>
+          <a:p>
+            <a:r>
+              <a:rPr sz="1000" b="0" i="1">
+                <a:solidFill>
+                  <a:srgbClr val="555555"/>
+                </a:solidFill>
+                <a:latin typeface="Arial"/>
+              </a:rPr>
+              <a:t>Full 9-level generator built from [3] M. W. Doherty et al., Phys. Rep. 528, 1 (2013).</a:t>
             </a:r>
           </a:p>
         </p:txBody>
@@ -14052,8 +14990,8 @@
         </p:nvSpPr>
         <p:spPr>
           <a:xfrm>
-            <a:off x="411480" y="292608"/>
-            <a:ext cx="6400800" cy="731520"/>
+            <a:off x="128016" y="100584"/>
+            <a:ext cx="7479792" cy="694944"/>
           </a:xfrm>
           <a:prstGeom prst="rect">
             <a:avLst/>
@@ -14079,9 +15017,43 @@
           </a:p>
         </p:txBody>
       </p:sp>
+      <p:sp>
+        <p:nvSpPr>
+          <p:cNvPr id="3" name="TitleLine"/>
+          <p:cNvSpPr txBox="1"/>
+          <p:nvPr/>
+        </p:nvSpPr>
+        <p:spPr>
+          <a:xfrm>
+            <a:off x="128016" y="859536"/>
+            <a:ext cx="8887968" cy="457200"/>
+          </a:xfrm>
+          <a:prstGeom prst="rect">
+            <a:avLst/>
+          </a:prstGeom>
+          <a:noFill/>
+        </p:spPr>
+        <p:txBody>
+          <a:bodyPr wrap="square" anchor="ctr" lIns="0" rIns="0" tIns="18288" bIns="18288">
+            <a:spAutoFit/>
+          </a:bodyPr>
+          <a:lstStyle/>
+          <a:p>
+            <a:r>
+              <a:rPr sz="2200" b="1" i="0">
+                <a:solidFill>
+                  <a:srgbClr val="1A1A1A"/>
+                </a:solidFill>
+                <a:latin typeface="Arial"/>
+              </a:rPr>
+              <a:t>Appendix 3: Transverse-field exponent</a:t>
+            </a:r>
+          </a:p>
+        </p:txBody>
+      </p:sp>
       <p:pic>
         <p:nvPicPr>
-          <p:cNvPr id="3" name="Picture 2" descr="fig5_bperp_scaling.png"/>
+          <p:cNvPr id="4" name="Picture 3" descr="sf_bperp.png"/>
           <p:cNvPicPr>
             <a:picLocks noChangeAspect="1"/>
           </p:cNvPicPr>
@@ -14095,130 +15067,14 @@
         </p:blipFill>
         <p:spPr>
           <a:xfrm>
-            <a:off x="1060231" y="1261872"/>
-            <a:ext cx="7023537" cy="3017520"/>
+            <a:off x="128015" y="1620066"/>
+            <a:ext cx="8887968" cy="3069226"/>
           </a:xfrm>
           <a:prstGeom prst="rect">
             <a:avLst/>
           </a:prstGeom>
         </p:spPr>
       </p:pic>
-      <p:sp>
-        <p:nvSpPr>
-          <p:cNvPr id="4" name="TextBox 3"/>
-          <p:cNvSpPr txBox="1"/>
-          <p:nvPr/>
-        </p:nvSpPr>
-        <p:spPr>
-          <a:xfrm>
-            <a:off x="411480" y="4370832"/>
-            <a:ext cx="8321040" cy="1353312"/>
-          </a:xfrm>
-          <a:prstGeom prst="rect">
-            <a:avLst/>
-          </a:prstGeom>
-          <a:noFill/>
-        </p:spPr>
-        <p:txBody>
-          <a:bodyPr wrap="square" anchor="t" lIns="0" rIns="0" tIns="18288" bIns="18288">
-            <a:spAutoFit/>
-          </a:bodyPr>
-          <a:lstStyle/>
-          <a:p>
-            <a:pPr>
-              <a:spcAft>
-                <a:spcPts val="300"/>
-              </a:spcAft>
-            </a:pPr>
-            <a:r>
-              <a:rPr sz="1600" b="0" i="0">
-                <a:solidFill>
-                  <a:srgbClr val="1A1A1A"/>
-                </a:solidFill>
-                <a:latin typeface="Arial"/>
-              </a:rPr>
-              <a:t>•  </a:t>
-            </a:r>
-            <a:r>
-              <a:rPr sz="1600" b="0" i="0">
-                <a:solidFill>
-                  <a:srgbClr val="1A1A1A"/>
-                </a:solidFill>
-                <a:latin typeface="Arial"/>
-              </a:rPr>
-              <a:t>Expected C = C_res + a B⊥²: one symmetry-breaking insertion per Λ leg.</a:t>
-            </a:r>
-          </a:p>
-          <a:p>
-            <a:pPr>
-              <a:spcAft>
-                <a:spcPts val="300"/>
-              </a:spcAft>
-            </a:pPr>
-            <a:r>
-              <a:rPr sz="1600" b="0" i="0">
-                <a:solidFill>
-                  <a:srgbClr val="1A1A1A"/>
-                </a:solidFill>
-                <a:latin typeface="Arial"/>
-              </a:rPr>
-              <a:t>•  </a:t>
-            </a:r>
-            <a:r>
-              <a:rPr sz="1600" b="1" i="0">
-                <a:solidFill>
-                  <a:srgbClr val="1C3077"/>
-                </a:solidFill>
-                <a:latin typeface="Arial"/>
-              </a:rPr>
-              <a:t>85 K: </a:t>
-            </a:r>
-            <a:r>
-              <a:rPr sz="1600" b="1" i="0">
-                <a:solidFill>
-                  <a:srgbClr val="1A1A1A"/>
-                </a:solidFill>
-                <a:latin typeface="Arial"/>
-              </a:rPr>
-              <a:t>n = 2.11 ± 0.08</a:t>
-            </a:r>
-            <a:r>
-              <a:rPr sz="1600" b="0" i="0">
-                <a:solidFill>
-                  <a:srgbClr val="1A1A1A"/>
-                </a:solidFill>
-                <a:latin typeface="Arial"/>
-              </a:rPr>
-              <a:t>, stable against the fitting cutoff.  55 / 70 K: the exponent drifts monotonically and is not determined.</a:t>
-            </a:r>
-          </a:p>
-          <a:p>
-            <a:pPr>
-              <a:spcAft>
-                <a:spcPts val="300"/>
-              </a:spcAft>
-            </a:pPr>
-            <a:r>
-              <a:rPr sz="1600" b="0" i="0">
-                <a:solidFill>
-                  <a:srgbClr val="1A1A1A"/>
-                </a:solidFill>
-                <a:latin typeface="Arial"/>
-              </a:rPr>
-              <a:t>•  </a:t>
-            </a:r>
-            <a:r>
-              <a:rPr sz="1600" b="0" i="0">
-                <a:solidFill>
-                  <a:srgbClr val="1A1A1A"/>
-                </a:solidFill>
-                <a:latin typeface="Arial"/>
-              </a:rPr>
-              <a:t>Independent of control power (×10) and identical for the ratio and the absolute signal — so the drift is the pathway, not the probe.</a:t>
-            </a:r>
-          </a:p>
-        </p:txBody>
-      </p:sp>
       <p:sp>
         <p:nvSpPr>
           <p:cNvPr id="5" name="Rounded Rectangle 4"/>
@@ -14227,8 +15083,8 @@
         </p:nvSpPr>
         <p:spPr>
           <a:xfrm>
-            <a:off x="411480" y="5742432"/>
-            <a:ext cx="8321040" cy="731520"/>
+            <a:off x="128016" y="4919472"/>
+            <a:ext cx="8887968" cy="731520"/>
           </a:xfrm>
           <a:prstGeom prst="roundRect">
             <a:avLst>
@@ -14236,7 +15092,7 @@
             </a:avLst>
           </a:prstGeom>
           <a:solidFill>
-            <a:srgbClr val="EEF2FA"/>
+            <a:srgbClr val="EEF4FF"/>
           </a:solidFill>
           <a:ln>
             <a:noFill/>
@@ -14269,7 +15125,76 @@
                 </a:solidFill>
                 <a:latin typeface="Arial"/>
               </a:rPr>
-              <a:t>Between the residual floor and mixing saturation at γₑB = D_gs = 0.103 T there is under a decade of field.</a:t>
+              <a:t>85 K gives n = 2.11 ± 0.08, stable against the fitting cutoff; at 55 and 70 K the exponent drifts and is not determined.</a:t>
+            </a:r>
+          </a:p>
+        </p:txBody>
+      </p:sp>
+      <p:cxnSp>
+        <p:nvCxnSpPr>
+          <p:cNvPr id="6" name="Connector 5"/>
+          <p:cNvCxnSpPr/>
+          <p:nvPr/>
+        </p:nvCxnSpPr>
+        <p:spPr>
+          <a:xfrm>
+            <a:off x="128016" y="5870448"/>
+            <a:ext cx="8887968" cy="0"/>
+          </a:xfrm>
+          <a:prstGeom prst="line">
+            <a:avLst/>
+          </a:prstGeom>
+          <a:ln w="9525">
+            <a:solidFill>
+              <a:srgbClr val="BBBBBB"/>
+            </a:solidFill>
+          </a:ln>
+        </p:spPr>
+        <p:style>
+          <a:lnRef idx="2">
+            <a:schemeClr val="accent1"/>
+          </a:lnRef>
+          <a:fillRef idx="0">
+            <a:schemeClr val="accent1"/>
+          </a:fillRef>
+          <a:effectRef idx="1">
+            <a:schemeClr val="accent1"/>
+          </a:effectRef>
+          <a:fontRef idx="minor">
+            <a:schemeClr val="tx1"/>
+          </a:fontRef>
+        </p:style>
+      </p:cxnSp>
+      <p:sp>
+        <p:nvSpPr>
+          <p:cNvPr id="7" name="RefBand"/>
+          <p:cNvSpPr txBox="1"/>
+          <p:nvPr/>
+        </p:nvSpPr>
+        <p:spPr>
+          <a:xfrm>
+            <a:off x="128016" y="5916168"/>
+            <a:ext cx="8321040" cy="548640"/>
+          </a:xfrm>
+          <a:prstGeom prst="rect">
+            <a:avLst/>
+          </a:prstGeom>
+          <a:noFill/>
+        </p:spPr>
+        <p:txBody>
+          <a:bodyPr wrap="square" anchor="t" lIns="0" rIns="0" tIns="18288" bIns="18288">
+            <a:spAutoFit/>
+          </a:bodyPr>
+          <a:lstStyle/>
+          <a:p>
+            <a:r>
+              <a:rPr sz="1000" b="0" i="1">
+                <a:solidFill>
+                  <a:srgbClr val="555555"/>
+                </a:solidFill>
+                <a:latin typeface="Arial"/>
+              </a:rPr>
+              <a:t>Expected C = C_res + a B⊥² from one symmetry-breaking insertion per Λ leg; ground-state mixing scale γₑB = D_gs from [3].</a:t>
             </a:r>
           </a:p>
         </p:txBody>
@@ -14300,8 +15225,8 @@
         </p:nvSpPr>
         <p:spPr>
           <a:xfrm>
-            <a:off x="411480" y="292608"/>
-            <a:ext cx="6400800" cy="731520"/>
+            <a:off x="128016" y="100584"/>
+            <a:ext cx="7479792" cy="694944"/>
           </a:xfrm>
           <a:prstGeom prst="rect">
             <a:avLst/>
@@ -14329,14 +15254,48 @@
       </p:sp>
       <p:sp>
         <p:nvSpPr>
-          <p:cNvPr id="3" name="Rounded Rectangle 2"/>
+          <p:cNvPr id="3" name="TitleLine"/>
+          <p:cNvSpPr txBox="1"/>
+          <p:nvPr/>
+        </p:nvSpPr>
+        <p:spPr>
+          <a:xfrm>
+            <a:off x="128016" y="859536"/>
+            <a:ext cx="8887968" cy="457200"/>
+          </a:xfrm>
+          <a:prstGeom prst="rect">
+            <a:avLst/>
+          </a:prstGeom>
+          <a:noFill/>
+        </p:spPr>
+        <p:txBody>
+          <a:bodyPr wrap="square" anchor="ctr" lIns="0" rIns="0" tIns="18288" bIns="18288">
+            <a:spAutoFit/>
+          </a:bodyPr>
+          <a:lstStyle/>
+          <a:p>
+            <a:r>
+              <a:rPr sz="2200" b="1" i="0">
+                <a:solidFill>
+                  <a:srgbClr val="1A1A1A"/>
+                </a:solidFill>
+                <a:latin typeface="Arial"/>
+              </a:rPr>
+              <a:t>Appendix 4: EIT vs Autler–Townes</a:t>
+            </a:r>
+          </a:p>
+        </p:txBody>
+      </p:sp>
+      <p:sp>
+        <p:nvSpPr>
+          <p:cNvPr id="4" name="Rounded Rectangle 3"/>
           <p:cNvSpPr/>
           <p:nvPr/>
         </p:nvSpPr>
         <p:spPr>
           <a:xfrm>
-            <a:off x="411480" y="1325880"/>
-            <a:ext cx="3977639" cy="2194560"/>
+            <a:off x="128016" y="1481328"/>
+            <a:ext cx="4315968" cy="1874519"/>
           </a:xfrm>
           <a:prstGeom prst="roundRect">
             <a:avLst>
@@ -14344,7 +15303,7 @@
             </a:avLst>
           </a:prstGeom>
           <a:solidFill>
-            <a:srgbClr val="EEF2FA"/>
+            <a:srgbClr val="EEF4FF"/>
           </a:solidFill>
           <a:ln>
             <a:noFill/>
@@ -14366,7 +15325,7 @@
           </a:fontRef>
         </p:style>
         <p:txBody>
-          <a:bodyPr rtlCol="0" anchor="ctr" wrap="square" lIns="128016" rIns="128016" tIns="91440" bIns="91440"/>
+          <a:bodyPr rtlCol="0" anchor="ctr" wrap="square" lIns="128016" rIns="128016" tIns="82296" bIns="82296"/>
           <a:lstStyle/>
           <a:p>
             <a:pPr algn="ctr"/>
@@ -14383,7 +15342,7 @@
           <a:p>
             <a:pPr>
               <a:spcBef>
-                <a:spcPts val="800"/>
+                <a:spcPts val="700"/>
               </a:spcBef>
             </a:pPr>
             <a:r>
@@ -14399,7 +15358,7 @@
           <a:p>
             <a:pPr>
               <a:spcBef>
-                <a:spcPts val="800"/>
+                <a:spcPts val="700"/>
               </a:spcBef>
             </a:pPr>
             <a:r>
@@ -14416,14 +15375,14 @@
       </p:sp>
       <p:sp>
         <p:nvSpPr>
-          <p:cNvPr id="4" name="Rounded Rectangle 3"/>
+          <p:cNvPr id="5" name="Rounded Rectangle 4"/>
           <p:cNvSpPr/>
           <p:nvPr/>
         </p:nvSpPr>
         <p:spPr>
           <a:xfrm>
-            <a:off x="4663440" y="1325880"/>
-            <a:ext cx="3977639" cy="2194560"/>
+            <a:off x="4700016" y="1481328"/>
+            <a:ext cx="4315968" cy="1874519"/>
           </a:xfrm>
           <a:prstGeom prst="roundRect">
             <a:avLst>
@@ -14431,7 +15390,7 @@
             </a:avLst>
           </a:prstGeom>
           <a:solidFill>
-            <a:srgbClr val="F4F4F4"/>
+            <a:srgbClr val="F6F8FC"/>
           </a:solidFill>
           <a:ln>
             <a:noFill/>
@@ -14453,7 +15412,7 @@
           </a:fontRef>
         </p:style>
         <p:txBody>
-          <a:bodyPr rtlCol="0" anchor="ctr" wrap="square" lIns="128016" rIns="128016" tIns="91440" bIns="91440"/>
+          <a:bodyPr rtlCol="0" anchor="ctr" wrap="square" lIns="128016" rIns="128016" tIns="82296" bIns="82296"/>
           <a:lstStyle/>
           <a:p>
             <a:pPr algn="ctr"/>
@@ -14470,7 +15429,7 @@
           <a:p>
             <a:pPr>
               <a:spcBef>
-                <a:spcPts val="800"/>
+                <a:spcPts val="700"/>
               </a:spcBef>
             </a:pPr>
             <a:r>
@@ -14486,7 +15445,7 @@
           <a:p>
             <a:pPr>
               <a:spcBef>
-                <a:spcPts val="800"/>
+                <a:spcPts val="700"/>
               </a:spcBef>
             </a:pPr>
             <a:r>
@@ -14503,14 +15462,14 @@
       </p:sp>
       <p:sp>
         <p:nvSpPr>
-          <p:cNvPr id="5" name="TextBox 4"/>
+          <p:cNvPr id="6" name="TextBox 5"/>
           <p:cNvSpPr txBox="1"/>
           <p:nvPr/>
         </p:nvSpPr>
         <p:spPr>
           <a:xfrm>
-            <a:off x="411480" y="3703320"/>
-            <a:ext cx="8321040" cy="2011680"/>
+            <a:off x="128016" y="3520440"/>
+            <a:ext cx="8887968" cy="1307592"/>
           </a:xfrm>
           <a:prstGeom prst="rect">
             <a:avLst/>
@@ -14569,46 +15528,21 @@
                 </a:solidFill>
                 <a:latin typeface="Arial"/>
               </a:rPr>
-              <a:t>Verdict from ΔAIC = IC_ATS − IC_EIT with a fixed robust gate at |ΔAIC| ≥ 6.</a:t>
-            </a:r>
-          </a:p>
-          <a:p>
-            <a:pPr>
-              <a:spcAft>
-                <a:spcPts val="800"/>
-              </a:spcAft>
-            </a:pPr>
-            <a:r>
-              <a:rPr sz="1600" b="0" i="0">
-                <a:solidFill>
-                  <a:srgbClr val="1A1A1A"/>
-                </a:solidFill>
-                <a:latin typeface="Arial"/>
-              </a:rPr>
-              <a:t>•  </a:t>
-            </a:r>
-            <a:r>
-              <a:rPr sz="1600" b="0" i="0">
-                <a:solidFill>
-                  <a:srgbClr val="1A1A1A"/>
-                </a:solidFill>
-                <a:latin typeface="Arial"/>
-              </a:rPr>
-              <a:t>Verdict unchanged under 60 noise bootstraps, 30 randomised fit initialisations, and window changes of 0.5× to 2×.</a:t>
-            </a:r>
-          </a:p>
-        </p:txBody>
-      </p:sp>
-      <p:sp>
-        <p:nvSpPr>
-          <p:cNvPr id="6" name="Rounded Rectangle 5"/>
+              <a:t>Verdict from ΔAIC = IC_ATS − IC_EIT with a fixed robust gate at |ΔAIC| ≥ 6, unchanged under 60 noise bootstraps and 30 randomised fit initialisations.</a:t>
+            </a:r>
+          </a:p>
+        </p:txBody>
+      </p:sp>
+      <p:sp>
+        <p:nvSpPr>
+          <p:cNvPr id="7" name="Rounded Rectangle 6"/>
           <p:cNvSpPr/>
           <p:nvPr/>
         </p:nvSpPr>
         <p:spPr>
           <a:xfrm>
-            <a:off x="411480" y="5742432"/>
-            <a:ext cx="8321040" cy="731520"/>
+            <a:off x="128016" y="4919472"/>
+            <a:ext cx="8887968" cy="731520"/>
           </a:xfrm>
           <a:prstGeom prst="roundRect">
             <a:avLst>
@@ -14616,7 +15550,7 @@
             </a:avLst>
           </a:prstGeom>
           <a:solidFill>
-            <a:srgbClr val="EEF2FA"/>
+            <a:srgbClr val="EEF4FF"/>
           </a:solidFill>
           <a:ln>
             <a:noFill/>
@@ -14650,6 +15584,75 @@
                 <a:latin typeface="Arial"/>
               </a:rPr>
               <a:t>Following Anisimov, Dowling and Sanders, PRL 107, 163604 (2011); the classification is stable at every temperature tested.</a:t>
+            </a:r>
+          </a:p>
+        </p:txBody>
+      </p:sp>
+      <p:cxnSp>
+        <p:nvCxnSpPr>
+          <p:cNvPr id="8" name="Connector 7"/>
+          <p:cNvCxnSpPr/>
+          <p:nvPr/>
+        </p:nvCxnSpPr>
+        <p:spPr>
+          <a:xfrm>
+            <a:off x="128016" y="5870448"/>
+            <a:ext cx="8887968" cy="0"/>
+          </a:xfrm>
+          <a:prstGeom prst="line">
+            <a:avLst/>
+          </a:prstGeom>
+          <a:ln w="9525">
+            <a:solidFill>
+              <a:srgbClr val="BBBBBB"/>
+            </a:solidFill>
+          </a:ln>
+        </p:spPr>
+        <p:style>
+          <a:lnRef idx="2">
+            <a:schemeClr val="accent1"/>
+          </a:lnRef>
+          <a:fillRef idx="0">
+            <a:schemeClr val="accent1"/>
+          </a:fillRef>
+          <a:effectRef idx="1">
+            <a:schemeClr val="accent1"/>
+          </a:effectRef>
+          <a:fontRef idx="minor">
+            <a:schemeClr val="tx1"/>
+          </a:fontRef>
+        </p:style>
+      </p:cxnSp>
+      <p:sp>
+        <p:nvSpPr>
+          <p:cNvPr id="9" name="RefBand"/>
+          <p:cNvSpPr txBox="1"/>
+          <p:nvPr/>
+        </p:nvSpPr>
+        <p:spPr>
+          <a:xfrm>
+            <a:off x="128016" y="5916168"/>
+            <a:ext cx="8321040" cy="548640"/>
+          </a:xfrm>
+          <a:prstGeom prst="rect">
+            <a:avLst/>
+          </a:prstGeom>
+          <a:noFill/>
+        </p:spPr>
+        <p:txBody>
+          <a:bodyPr wrap="square" anchor="t" lIns="0" rIns="0" tIns="18288" bIns="18288">
+            <a:spAutoFit/>
+          </a:bodyPr>
+          <a:lstStyle/>
+          <a:p>
+            <a:r>
+              <a:rPr sz="1000" b="0" i="1">
+                <a:solidFill>
+                  <a:srgbClr val="555555"/>
+                </a:solidFill>
+                <a:latin typeface="Arial"/>
+              </a:rPr>
+              <a:t>[9] P. M. Anisimov, J. P. Dowling and B. C. Sanders, Phys. Rev. Lett. 107, 163604 (2011).</a:t>
             </a:r>
           </a:p>
         </p:txBody>
@@ -14680,8 +15683,8 @@
         </p:nvSpPr>
         <p:spPr>
           <a:xfrm>
-            <a:off x="411480" y="292608"/>
-            <a:ext cx="6400800" cy="731520"/>
+            <a:off x="128016" y="100584"/>
+            <a:ext cx="7479792" cy="694944"/>
           </a:xfrm>
           <a:prstGeom prst="rect">
             <a:avLst/>
@@ -14709,14 +15712,48 @@
       </p:sp>
       <p:sp>
         <p:nvSpPr>
-          <p:cNvPr id="3" name="TextBox 2"/>
+          <p:cNvPr id="3" name="TitleLine"/>
           <p:cNvSpPr txBox="1"/>
           <p:nvPr/>
         </p:nvSpPr>
         <p:spPr>
           <a:xfrm>
-            <a:off x="411480" y="1325880"/>
-            <a:ext cx="8321040" cy="1828800"/>
+            <a:off x="128016" y="859536"/>
+            <a:ext cx="8887968" cy="457200"/>
+          </a:xfrm>
+          <a:prstGeom prst="rect">
+            <a:avLst/>
+          </a:prstGeom>
+          <a:noFill/>
+        </p:spPr>
+        <p:txBody>
+          <a:bodyPr wrap="square" anchor="ctr" lIns="0" rIns="0" tIns="18288" bIns="18288">
+            <a:spAutoFit/>
+          </a:bodyPr>
+          <a:lstStyle/>
+          <a:p>
+            <a:r>
+              <a:rPr sz="2200" b="1" i="0">
+                <a:solidFill>
+                  <a:srgbClr val="1A1A1A"/>
+                </a:solidFill>
+                <a:latin typeface="Arial"/>
+              </a:rPr>
+              <a:t>Appendix 5: Detection chain</a:t>
+            </a:r>
+          </a:p>
+        </p:txBody>
+      </p:sp>
+      <p:sp>
+        <p:nvSpPr>
+          <p:cNvPr id="4" name="TextBox 3"/>
+          <p:cNvSpPr txBox="1"/>
+          <p:nvPr/>
+        </p:nvSpPr>
+        <p:spPr>
+          <a:xfrm>
+            <a:off x="128016" y="1481328"/>
+            <a:ext cx="8887968" cy="1371600"/>
           </a:xfrm>
           <a:prstGeom prst="rect">
             <a:avLst/>
@@ -14800,14 +15837,14 @@
       </p:sp>
       <p:sp>
         <p:nvSpPr>
-          <p:cNvPr id="4" name="Rounded Rectangle 3"/>
+          <p:cNvPr id="5" name="Rounded Rectangle 4"/>
           <p:cNvSpPr/>
           <p:nvPr/>
         </p:nvSpPr>
         <p:spPr>
           <a:xfrm>
-            <a:off x="411480" y="3200400"/>
-            <a:ext cx="2029968" cy="786384"/>
+            <a:off x="128016" y="3017520"/>
+            <a:ext cx="2139696" cy="786384"/>
           </a:xfrm>
           <a:prstGeom prst="roundRect">
             <a:avLst>
@@ -14815,7 +15852,7 @@
             </a:avLst>
           </a:prstGeom>
           <a:solidFill>
-            <a:srgbClr val="EEF2FA"/>
+            <a:srgbClr val="EEF4FF"/>
           </a:solidFill>
           <a:ln>
             <a:noFill/>
@@ -14837,7 +15874,7 @@
           </a:fontRef>
         </p:style>
         <p:txBody>
-          <a:bodyPr rtlCol="0" anchor="ctr" wrap="square" lIns="128016" rIns="128016" tIns="91440" bIns="91440"/>
+          <a:bodyPr rtlCol="0" anchor="ctr" wrap="square" lIns="128016" rIns="128016" tIns="82296" bIns="82296"/>
           <a:lstStyle/>
           <a:p>
             <a:pPr algn="ctr"/>
@@ -14864,14 +15901,14 @@
       </p:sp>
       <p:sp>
         <p:nvSpPr>
-          <p:cNvPr id="5" name="Rounded Rectangle 4"/>
+          <p:cNvPr id="6" name="Rounded Rectangle 5"/>
           <p:cNvSpPr/>
           <p:nvPr/>
         </p:nvSpPr>
         <p:spPr>
           <a:xfrm>
-            <a:off x="2532888" y="3200400"/>
-            <a:ext cx="2029968" cy="786384"/>
+            <a:off x="2377440" y="3017520"/>
+            <a:ext cx="2139696" cy="786384"/>
           </a:xfrm>
           <a:prstGeom prst="roundRect">
             <a:avLst>
@@ -14879,7 +15916,7 @@
             </a:avLst>
           </a:prstGeom>
           <a:solidFill>
-            <a:srgbClr val="EEF2FA"/>
+            <a:srgbClr val="EEF4FF"/>
           </a:solidFill>
           <a:ln>
             <a:noFill/>
@@ -14901,7 +15938,7 @@
           </a:fontRef>
         </p:style>
         <p:txBody>
-          <a:bodyPr rtlCol="0" anchor="ctr" wrap="square" lIns="128016" rIns="128016" tIns="91440" bIns="91440"/>
+          <a:bodyPr rtlCol="0" anchor="ctr" wrap="square" lIns="128016" rIns="128016" tIns="82296" bIns="82296"/>
           <a:lstStyle/>
           <a:p>
             <a:pPr algn="ctr"/>
@@ -14928,14 +15965,14 @@
       </p:sp>
       <p:sp>
         <p:nvSpPr>
-          <p:cNvPr id="6" name="Rounded Rectangle 5"/>
+          <p:cNvPr id="7" name="Rounded Rectangle 6"/>
           <p:cNvSpPr/>
           <p:nvPr/>
         </p:nvSpPr>
         <p:spPr>
           <a:xfrm>
-            <a:off x="4654296" y="3200400"/>
-            <a:ext cx="2029968" cy="786384"/>
+            <a:off x="4626864" y="3017520"/>
+            <a:ext cx="2139696" cy="786384"/>
           </a:xfrm>
           <a:prstGeom prst="roundRect">
             <a:avLst>
@@ -14943,7 +15980,7 @@
             </a:avLst>
           </a:prstGeom>
           <a:solidFill>
-            <a:srgbClr val="EEF2FA"/>
+            <a:srgbClr val="EEF4FF"/>
           </a:solidFill>
           <a:ln>
             <a:noFill/>
@@ -14965,7 +16002,7 @@
           </a:fontRef>
         </p:style>
         <p:txBody>
-          <a:bodyPr rtlCol="0" anchor="ctr" wrap="square" lIns="128016" rIns="128016" tIns="91440" bIns="91440"/>
+          <a:bodyPr rtlCol="0" anchor="ctr" wrap="square" lIns="128016" rIns="128016" tIns="82296" bIns="82296"/>
           <a:lstStyle/>
           <a:p>
             <a:pPr algn="ctr"/>
@@ -14992,14 +16029,14 @@
       </p:sp>
       <p:sp>
         <p:nvSpPr>
-          <p:cNvPr id="7" name="Rounded Rectangle 6"/>
+          <p:cNvPr id="8" name="Rounded Rectangle 7"/>
           <p:cNvSpPr/>
           <p:nvPr/>
         </p:nvSpPr>
         <p:spPr>
           <a:xfrm>
-            <a:off x="6775704" y="3200400"/>
-            <a:ext cx="2029968" cy="786384"/>
+            <a:off x="6876288" y="3017520"/>
+            <a:ext cx="2139696" cy="786384"/>
           </a:xfrm>
           <a:prstGeom prst="roundRect">
             <a:avLst>
@@ -15007,7 +16044,7 @@
             </a:avLst>
           </a:prstGeom>
           <a:solidFill>
-            <a:srgbClr val="EEF2FA"/>
+            <a:srgbClr val="EEF4FF"/>
           </a:solidFill>
           <a:ln>
             <a:noFill/>
@@ -15029,7 +16066,7 @@
           </a:fontRef>
         </p:style>
         <p:txBody>
-          <a:bodyPr rtlCol="0" anchor="ctr" wrap="square" lIns="128016" rIns="128016" tIns="91440" bIns="91440"/>
+          <a:bodyPr rtlCol="0" anchor="ctr" wrap="square" lIns="128016" rIns="128016" tIns="82296" bIns="82296"/>
           <a:lstStyle/>
           <a:p>
             <a:pPr algn="ctr"/>
@@ -15056,14 +16093,14 @@
       </p:sp>
       <p:sp>
         <p:nvSpPr>
-          <p:cNvPr id="8" name="Rounded Rectangle 7"/>
+          <p:cNvPr id="9" name="Rounded Rectangle 8"/>
           <p:cNvSpPr/>
           <p:nvPr/>
         </p:nvSpPr>
         <p:spPr>
           <a:xfrm>
-            <a:off x="411480" y="4096512"/>
-            <a:ext cx="2029968" cy="786384"/>
+            <a:off x="128016" y="3913631"/>
+            <a:ext cx="2139696" cy="786384"/>
           </a:xfrm>
           <a:prstGeom prst="roundRect">
             <a:avLst>
@@ -15071,7 +16108,7 @@
             </a:avLst>
           </a:prstGeom>
           <a:solidFill>
-            <a:srgbClr val="EEF2FA"/>
+            <a:srgbClr val="EEF4FF"/>
           </a:solidFill>
           <a:ln>
             <a:noFill/>
@@ -15093,7 +16130,7 @@
           </a:fontRef>
         </p:style>
         <p:txBody>
-          <a:bodyPr rtlCol="0" anchor="ctr" wrap="square" lIns="128016" rIns="128016" tIns="91440" bIns="91440"/>
+          <a:bodyPr rtlCol="0" anchor="ctr" wrap="square" lIns="128016" rIns="128016" tIns="82296" bIns="82296"/>
           <a:lstStyle/>
           <a:p>
             <a:pPr algn="ctr"/>
@@ -15120,14 +16157,14 @@
       </p:sp>
       <p:sp>
         <p:nvSpPr>
-          <p:cNvPr id="9" name="Rounded Rectangle 8"/>
+          <p:cNvPr id="10" name="Rounded Rectangle 9"/>
           <p:cNvSpPr/>
           <p:nvPr/>
         </p:nvSpPr>
         <p:spPr>
           <a:xfrm>
-            <a:off x="2532888" y="4096512"/>
-            <a:ext cx="2029968" cy="786384"/>
+            <a:off x="2377440" y="3913631"/>
+            <a:ext cx="2139696" cy="786384"/>
           </a:xfrm>
           <a:prstGeom prst="roundRect">
             <a:avLst>
@@ -15135,7 +16172,7 @@
             </a:avLst>
           </a:prstGeom>
           <a:solidFill>
-            <a:srgbClr val="EEF2FA"/>
+            <a:srgbClr val="EEF4FF"/>
           </a:solidFill>
           <a:ln>
             <a:noFill/>
@@ -15157,7 +16194,7 @@
           </a:fontRef>
         </p:style>
         <p:txBody>
-          <a:bodyPr rtlCol="0" anchor="ctr" wrap="square" lIns="128016" rIns="128016" tIns="91440" bIns="91440"/>
+          <a:bodyPr rtlCol="0" anchor="ctr" wrap="square" lIns="128016" rIns="128016" tIns="82296" bIns="82296"/>
           <a:lstStyle/>
           <a:p>
             <a:pPr algn="ctr"/>
@@ -15184,14 +16221,14 @@
       </p:sp>
       <p:sp>
         <p:nvSpPr>
-          <p:cNvPr id="10" name="Rounded Rectangle 9"/>
+          <p:cNvPr id="11" name="Rounded Rectangle 10"/>
           <p:cNvSpPr/>
           <p:nvPr/>
         </p:nvSpPr>
         <p:spPr>
           <a:xfrm>
-            <a:off x="4654296" y="4096512"/>
-            <a:ext cx="2029968" cy="786384"/>
+            <a:off x="4626864" y="3913631"/>
+            <a:ext cx="2139696" cy="786384"/>
           </a:xfrm>
           <a:prstGeom prst="roundRect">
             <a:avLst>
@@ -15199,7 +16236,7 @@
             </a:avLst>
           </a:prstGeom>
           <a:solidFill>
-            <a:srgbClr val="EEF2FA"/>
+            <a:srgbClr val="EEF4FF"/>
           </a:solidFill>
           <a:ln>
             <a:noFill/>
@@ -15221,7 +16258,7 @@
           </a:fontRef>
         </p:style>
         <p:txBody>
-          <a:bodyPr rtlCol="0" anchor="ctr" wrap="square" lIns="128016" rIns="128016" tIns="91440" bIns="91440"/>
+          <a:bodyPr rtlCol="0" anchor="ctr" wrap="square" lIns="128016" rIns="128016" tIns="82296" bIns="82296"/>
           <a:lstStyle/>
           <a:p>
             <a:pPr algn="ctr"/>
@@ -15248,14 +16285,14 @@
       </p:sp>
       <p:sp>
         <p:nvSpPr>
-          <p:cNvPr id="11" name="Rounded Rectangle 10"/>
+          <p:cNvPr id="12" name="Rounded Rectangle 11"/>
           <p:cNvSpPr/>
           <p:nvPr/>
         </p:nvSpPr>
         <p:spPr>
           <a:xfrm>
-            <a:off x="6775704" y="4096512"/>
-            <a:ext cx="2029968" cy="786384"/>
+            <a:off x="6876288" y="3913631"/>
+            <a:ext cx="2139696" cy="786384"/>
           </a:xfrm>
           <a:prstGeom prst="roundRect">
             <a:avLst>
@@ -15263,7 +16300,7 @@
             </a:avLst>
           </a:prstGeom>
           <a:solidFill>
-            <a:srgbClr val="EEF2FA"/>
+            <a:srgbClr val="EEF4FF"/>
           </a:solidFill>
           <a:ln>
             <a:noFill/>
@@ -15285,7 +16322,7 @@
           </a:fontRef>
         </p:style>
         <p:txBody>
-          <a:bodyPr rtlCol="0" anchor="ctr" wrap="square" lIns="128016" rIns="128016" tIns="91440" bIns="91440"/>
+          <a:bodyPr rtlCol="0" anchor="ctr" wrap="square" lIns="128016" rIns="128016" tIns="82296" bIns="82296"/>
           <a:lstStyle/>
           <a:p>
             <a:pPr algn="ctr"/>
@@ -15312,14 +16349,14 @@
       </p:sp>
       <p:sp>
         <p:nvSpPr>
-          <p:cNvPr id="12" name="Rounded Rectangle 11"/>
+          <p:cNvPr id="13" name="Rounded Rectangle 12"/>
           <p:cNvSpPr/>
           <p:nvPr/>
         </p:nvSpPr>
         <p:spPr>
           <a:xfrm>
-            <a:off x="411480" y="5742432"/>
-            <a:ext cx="8321040" cy="731520"/>
+            <a:off x="128016" y="4919472"/>
+            <a:ext cx="8887968" cy="731520"/>
           </a:xfrm>
           <a:prstGeom prst="roundRect">
             <a:avLst>
@@ -15327,7 +16364,7 @@
             </a:avLst>
           </a:prstGeom>
           <a:solidFill>
-            <a:srgbClr val="EEF2FA"/>
+            <a:srgbClr val="EEF4FF"/>
           </a:solidFill>
           <a:ln>
             <a:noFill/>
@@ -15361,6 +16398,75 @@
                 <a:latin typeface="Arial"/>
               </a:rPr>
               <a:t>Where the archived conversions disagreed (70 K and 300 K), the conservative value was taken and the disagreement recorded.</a:t>
+            </a:r>
+          </a:p>
+        </p:txBody>
+      </p:sp>
+      <p:cxnSp>
+        <p:nvCxnSpPr>
+          <p:cNvPr id="14" name="Connector 13"/>
+          <p:cNvCxnSpPr/>
+          <p:nvPr/>
+        </p:nvCxnSpPr>
+        <p:spPr>
+          <a:xfrm>
+            <a:off x="128016" y="5870448"/>
+            <a:ext cx="8887968" cy="0"/>
+          </a:xfrm>
+          <a:prstGeom prst="line">
+            <a:avLst/>
+          </a:prstGeom>
+          <a:ln w="9525">
+            <a:solidFill>
+              <a:srgbClr val="BBBBBB"/>
+            </a:solidFill>
+          </a:ln>
+        </p:spPr>
+        <p:style>
+          <a:lnRef idx="2">
+            <a:schemeClr val="accent1"/>
+          </a:lnRef>
+          <a:fillRef idx="0">
+            <a:schemeClr val="accent1"/>
+          </a:fillRef>
+          <a:effectRef idx="1">
+            <a:schemeClr val="accent1"/>
+          </a:effectRef>
+          <a:fontRef idx="minor">
+            <a:schemeClr val="tx1"/>
+          </a:fontRef>
+        </p:style>
+      </p:cxnSp>
+      <p:sp>
+        <p:nvSpPr>
+          <p:cNvPr id="15" name="RefBand"/>
+          <p:cNvSpPr txBox="1"/>
+          <p:nvPr/>
+        </p:nvSpPr>
+        <p:spPr>
+          <a:xfrm>
+            <a:off x="128016" y="5916168"/>
+            <a:ext cx="8321040" cy="548640"/>
+          </a:xfrm>
+          <a:prstGeom prst="rect">
+            <a:avLst/>
+          </a:prstGeom>
+          <a:noFill/>
+        </p:spPr>
+        <p:txBody>
+          <a:bodyPr wrap="square" anchor="t" lIns="0" rIns="0" tIns="18288" bIns="18288">
+            <a:spAutoFit/>
+          </a:bodyPr>
+          <a:lstStyle/>
+          <a:p>
+            <a:r>
+              <a:rPr sz="1000" b="0" i="1">
+                <a:solidFill>
+                  <a:srgbClr val="555555"/>
+                </a:solidFill>
+                <a:latin typeface="Arial"/>
+              </a:rPr>
+              <a:t>Debye–Waller factor, inhomogeneous width and ensemble geometry: [4] V. M. Acosta et al., Phys. Rev. Lett. 110, 213605 (2013).</a:t>
             </a:r>
           </a:p>
         </p:txBody>
@@ -15452,8 +16558,8 @@
         </p:nvSpPr>
         <p:spPr>
           <a:xfrm>
-            <a:off x="411480" y="292608"/>
-            <a:ext cx="6400800" cy="731520"/>
+            <a:off x="128016" y="100584"/>
+            <a:ext cx="7479792" cy="694944"/>
           </a:xfrm>
           <a:prstGeom prst="rect">
             <a:avLst/>
@@ -15479,9 +16585,43 @@
           </a:p>
         </p:txBody>
       </p:sp>
+      <p:sp>
+        <p:nvSpPr>
+          <p:cNvPr id="3" name="TitleLine"/>
+          <p:cNvSpPr txBox="1"/>
+          <p:nvPr/>
+        </p:nvSpPr>
+        <p:spPr>
+          <a:xfrm>
+            <a:off x="128016" y="859536"/>
+            <a:ext cx="8887968" cy="457200"/>
+          </a:xfrm>
+          <a:prstGeom prst="rect">
+            <a:avLst/>
+          </a:prstGeom>
+          <a:noFill/>
+        </p:spPr>
+        <p:txBody>
+          <a:bodyPr wrap="square" anchor="ctr" lIns="0" rIns="0" tIns="18288" bIns="18288">
+            <a:spAutoFit/>
+          </a:bodyPr>
+          <a:lstStyle/>
+          <a:p>
+            <a:r>
+              <a:rPr sz="2200" b="1" i="0">
+                <a:solidFill>
+                  <a:srgbClr val="1A1A1A"/>
+                </a:solidFill>
+                <a:latin typeface="Arial"/>
+              </a:rPr>
+              <a:t>Introduction 1: What EIT is</a:t>
+            </a:r>
+          </a:p>
+        </p:txBody>
+      </p:sp>
       <p:pic>
         <p:nvPicPr>
-          <p:cNvPr id="3" name="Picture 2" descr="lambda_scheme.png"/>
+          <p:cNvPr id="4" name="Picture 3" descr="sf_lambda.png"/>
           <p:cNvPicPr>
             <a:picLocks noChangeAspect="1"/>
           </p:cNvPicPr>
@@ -15495,8 +16635,8 @@
         </p:blipFill>
         <p:spPr>
           <a:xfrm>
-            <a:off x="502920" y="1691640"/>
-            <a:ext cx="4617720" cy="3136392"/>
+            <a:off x="128433" y="1481328"/>
+            <a:ext cx="4790620" cy="3346704"/>
           </a:xfrm>
           <a:prstGeom prst="rect">
             <a:avLst/>
@@ -15505,14 +16645,14 @@
       </p:pic>
       <p:sp>
         <p:nvSpPr>
-          <p:cNvPr id="4" name="TextBox 3"/>
+          <p:cNvPr id="5" name="TextBox 4"/>
           <p:cNvSpPr txBox="1"/>
           <p:nvPr/>
         </p:nvSpPr>
         <p:spPr>
           <a:xfrm>
-            <a:off x="5303520" y="1691640"/>
-            <a:ext cx="3429000" cy="3931920"/>
+            <a:off x="5102352" y="1572768"/>
+            <a:ext cx="3913632" cy="3108960"/>
           </a:xfrm>
           <a:prstGeom prst="rect">
             <a:avLst/>
@@ -15664,14 +16804,14 @@
       </p:sp>
       <p:sp>
         <p:nvSpPr>
-          <p:cNvPr id="5" name="Rounded Rectangle 4"/>
+          <p:cNvPr id="6" name="Rounded Rectangle 5"/>
           <p:cNvSpPr/>
           <p:nvPr/>
         </p:nvSpPr>
         <p:spPr>
           <a:xfrm>
-            <a:off x="411480" y="5742432"/>
-            <a:ext cx="8321040" cy="731520"/>
+            <a:off x="128016" y="4919472"/>
+            <a:ext cx="8887968" cy="731520"/>
           </a:xfrm>
           <a:prstGeom prst="roundRect">
             <a:avLst>
@@ -15679,7 +16819,7 @@
             </a:avLst>
           </a:prstGeom>
           <a:solidFill>
-            <a:srgbClr val="EEF2FA"/>
+            <a:srgbClr val="EEF4FF"/>
           </a:solidFill>
           <a:ln>
             <a:noFill/>
@@ -15713,6 +16853,75 @@
                 <a:latin typeface="Arial"/>
               </a:rPr>
               <a:t>In the ideal Λ system probe absorption vanishes at two-photon resonance when the ground coherence is long-lived.</a:t>
+            </a:r>
+          </a:p>
+        </p:txBody>
+      </p:sp>
+      <p:cxnSp>
+        <p:nvCxnSpPr>
+          <p:cNvPr id="7" name="Connector 6"/>
+          <p:cNvCxnSpPr/>
+          <p:nvPr/>
+        </p:nvCxnSpPr>
+        <p:spPr>
+          <a:xfrm>
+            <a:off x="128016" y="5870448"/>
+            <a:ext cx="8887968" cy="0"/>
+          </a:xfrm>
+          <a:prstGeom prst="line">
+            <a:avLst/>
+          </a:prstGeom>
+          <a:ln w="9525">
+            <a:solidFill>
+              <a:srgbClr val="BBBBBB"/>
+            </a:solidFill>
+          </a:ln>
+        </p:spPr>
+        <p:style>
+          <a:lnRef idx="2">
+            <a:schemeClr val="accent1"/>
+          </a:lnRef>
+          <a:fillRef idx="0">
+            <a:schemeClr val="accent1"/>
+          </a:fillRef>
+          <a:effectRef idx="1">
+            <a:schemeClr val="accent1"/>
+          </a:effectRef>
+          <a:fontRef idx="minor">
+            <a:schemeClr val="tx1"/>
+          </a:fontRef>
+        </p:style>
+      </p:cxnSp>
+      <p:sp>
+        <p:nvSpPr>
+          <p:cNvPr id="8" name="RefBand"/>
+          <p:cNvSpPr txBox="1"/>
+          <p:nvPr/>
+        </p:nvSpPr>
+        <p:spPr>
+          <a:xfrm>
+            <a:off x="128016" y="5916168"/>
+            <a:ext cx="8321040" cy="548640"/>
+          </a:xfrm>
+          <a:prstGeom prst="rect">
+            <a:avLst/>
+          </a:prstGeom>
+          <a:noFill/>
+        </p:spPr>
+        <p:txBody>
+          <a:bodyPr wrap="square" anchor="t" lIns="0" rIns="0" tIns="18288" bIns="18288">
+            <a:spAutoFit/>
+          </a:bodyPr>
+          <a:lstStyle/>
+          <a:p>
+            <a:r>
+              <a:rPr sz="1000" b="0" i="1">
+                <a:solidFill>
+                  <a:srgbClr val="555555"/>
+                </a:solidFill>
+                <a:latin typeface="Arial"/>
+              </a:rPr>
+              <a:t>[1] M. Fleischhauer, A. Imamoğlu and J. P. Marangos, Rev. Mod. Phys. 77, 633 (2005).</a:t>
             </a:r>
           </a:p>
         </p:txBody>
@@ -15743,8 +16952,8 @@
         </p:nvSpPr>
         <p:spPr>
           <a:xfrm>
-            <a:off x="411480" y="292608"/>
-            <a:ext cx="6400800" cy="731520"/>
+            <a:off x="128016" y="100584"/>
+            <a:ext cx="7479792" cy="694944"/>
           </a:xfrm>
           <a:prstGeom prst="rect">
             <a:avLst/>
@@ -15772,14 +16981,48 @@
       </p:sp>
       <p:sp>
         <p:nvSpPr>
-          <p:cNvPr id="3" name="Rounded Rectangle 2"/>
+          <p:cNvPr id="3" name="TitleLine"/>
+          <p:cNvSpPr txBox="1"/>
+          <p:nvPr/>
+        </p:nvSpPr>
+        <p:spPr>
+          <a:xfrm>
+            <a:off x="128016" y="859536"/>
+            <a:ext cx="8887968" cy="457200"/>
+          </a:xfrm>
+          <a:prstGeom prst="rect">
+            <a:avLst/>
+          </a:prstGeom>
+          <a:noFill/>
+        </p:spPr>
+        <p:txBody>
+          <a:bodyPr wrap="square" anchor="ctr" lIns="0" rIns="0" tIns="18288" bIns="18288">
+            <a:spAutoFit/>
+          </a:bodyPr>
+          <a:lstStyle/>
+          <a:p>
+            <a:r>
+              <a:rPr sz="2200" b="1" i="0">
+                <a:solidFill>
+                  <a:srgbClr val="1A1A1A"/>
+                </a:solidFill>
+                <a:latin typeface="Arial"/>
+              </a:rPr>
+              <a:t>Introduction 2: Why NV is the test bed</a:t>
+            </a:r>
+          </a:p>
+        </p:txBody>
+      </p:sp>
+      <p:sp>
+        <p:nvSpPr>
+          <p:cNvPr id="4" name="Rounded Rectangle 3"/>
           <p:cNvSpPr/>
           <p:nvPr/>
         </p:nvSpPr>
         <p:spPr>
           <a:xfrm>
-            <a:off x="411480" y="1371600"/>
-            <a:ext cx="3977639" cy="3200400"/>
+            <a:off x="128016" y="1481328"/>
+            <a:ext cx="4315968" cy="2606040"/>
           </a:xfrm>
           <a:prstGeom prst="roundRect">
             <a:avLst>
@@ -15787,7 +17030,7 @@
             </a:avLst>
           </a:prstGeom>
           <a:solidFill>
-            <a:srgbClr val="F4F4F4"/>
+            <a:srgbClr val="F6F8FC"/>
           </a:solidFill>
           <a:ln>
             <a:noFill/>
@@ -15809,7 +17052,7 @@
           </a:fontRef>
         </p:style>
         <p:txBody>
-          <a:bodyPr rtlCol="0" anchor="ctr" wrap="square" lIns="128016" rIns="128016" tIns="91440" bIns="91440"/>
+          <a:bodyPr rtlCol="0" anchor="ctr" wrap="square" lIns="128016" rIns="128016" tIns="82296" bIns="82296"/>
           <a:lstStyle/>
           <a:p>
             <a:pPr algn="ctr"/>
@@ -15826,7 +17069,7 @@
           <a:p>
             <a:pPr>
               <a:spcBef>
-                <a:spcPts val="700"/>
+                <a:spcPts val="600"/>
               </a:spcBef>
             </a:pPr>
             <a:r>
@@ -15842,7 +17085,7 @@
           <a:p>
             <a:pPr>
               <a:spcBef>
-                <a:spcPts val="700"/>
+                <a:spcPts val="600"/>
               </a:spcBef>
             </a:pPr>
             <a:r>
@@ -15858,7 +17101,7 @@
           <a:p>
             <a:pPr>
               <a:spcBef>
-                <a:spcPts val="700"/>
+                <a:spcPts val="600"/>
               </a:spcBef>
             </a:pPr>
             <a:r>
@@ -15874,7 +17117,7 @@
           <a:p>
             <a:pPr>
               <a:spcBef>
-                <a:spcPts val="700"/>
+                <a:spcPts val="600"/>
               </a:spcBef>
             </a:pPr>
             <a:r>
@@ -15891,14 +17134,14 @@
       </p:sp>
       <p:sp>
         <p:nvSpPr>
-          <p:cNvPr id="4" name="Rounded Rectangle 3"/>
+          <p:cNvPr id="5" name="Rounded Rectangle 4"/>
           <p:cNvSpPr/>
           <p:nvPr/>
         </p:nvSpPr>
         <p:spPr>
           <a:xfrm>
-            <a:off x="4663440" y="1371600"/>
-            <a:ext cx="3977639" cy="3200400"/>
+            <a:off x="4700016" y="1481328"/>
+            <a:ext cx="4315968" cy="2606040"/>
           </a:xfrm>
           <a:prstGeom prst="roundRect">
             <a:avLst>
@@ -15906,7 +17149,7 @@
             </a:avLst>
           </a:prstGeom>
           <a:solidFill>
-            <a:srgbClr val="EEF2FA"/>
+            <a:srgbClr val="EEF4FF"/>
           </a:solidFill>
           <a:ln>
             <a:noFill/>
@@ -15928,7 +17171,7 @@
           </a:fontRef>
         </p:style>
         <p:txBody>
-          <a:bodyPr rtlCol="0" anchor="ctr" wrap="square" lIns="128016" rIns="128016" tIns="91440" bIns="91440"/>
+          <a:bodyPr rtlCol="0" anchor="ctr" wrap="square" lIns="128016" rIns="128016" tIns="82296" bIns="82296"/>
           <a:lstStyle/>
           <a:p>
             <a:pPr algn="ctr"/>
@@ -15945,7 +17188,7 @@
           <a:p>
             <a:pPr>
               <a:spcBef>
-                <a:spcPts val="700"/>
+                <a:spcPts val="600"/>
               </a:spcBef>
             </a:pPr>
             <a:r>
@@ -15961,7 +17204,7 @@
           <a:p>
             <a:pPr>
               <a:spcBef>
-                <a:spcPts val="700"/>
+                <a:spcPts val="600"/>
               </a:spcBef>
             </a:pPr>
             <a:r>
@@ -15977,7 +17220,7 @@
           <a:p>
             <a:pPr>
               <a:spcBef>
-                <a:spcPts val="700"/>
+                <a:spcPts val="600"/>
               </a:spcBef>
             </a:pPr>
             <a:r>
@@ -15993,7 +17236,7 @@
           <a:p>
             <a:pPr>
               <a:spcBef>
-                <a:spcPts val="700"/>
+                <a:spcPts val="600"/>
               </a:spcBef>
             </a:pPr>
             <a:r>
@@ -16010,14 +17253,14 @@
       </p:sp>
       <p:sp>
         <p:nvSpPr>
-          <p:cNvPr id="5" name="TextBox 4"/>
+          <p:cNvPr id="6" name="TextBox 5"/>
           <p:cNvSpPr txBox="1"/>
           <p:nvPr/>
         </p:nvSpPr>
         <p:spPr>
           <a:xfrm>
-            <a:off x="411480" y="4800600"/>
-            <a:ext cx="8321040" cy="868680"/>
+            <a:off x="128016" y="4206240"/>
+            <a:ext cx="8887968" cy="603504"/>
           </a:xfrm>
           <a:prstGeom prst="rect">
             <a:avLst/>
@@ -16053,14 +17296,14 @@
       </p:sp>
       <p:sp>
         <p:nvSpPr>
-          <p:cNvPr id="6" name="Rounded Rectangle 5"/>
+          <p:cNvPr id="7" name="Rounded Rectangle 6"/>
           <p:cNvSpPr/>
           <p:nvPr/>
         </p:nvSpPr>
         <p:spPr>
           <a:xfrm>
-            <a:off x="411480" y="5742432"/>
-            <a:ext cx="8321040" cy="731520"/>
+            <a:off x="128016" y="4919472"/>
+            <a:ext cx="8887968" cy="731520"/>
           </a:xfrm>
           <a:prstGeom prst="roundRect">
             <a:avLst>
@@ -16068,7 +17311,7 @@
             </a:avLst>
           </a:prstGeom>
           <a:solidFill>
-            <a:srgbClr val="EEF2FA"/>
+            <a:srgbClr val="EEF4FF"/>
           </a:solidFill>
           <a:ln>
             <a:noFill/>
@@ -16102,6 +17345,75 @@
                 <a:latin typeface="Arial"/>
               </a:rPr>
               <a:t>NV wins as a test bed not on material grounds but because its excited-state model and phonon rates are independently measured.</a:t>
+            </a:r>
+          </a:p>
+        </p:txBody>
+      </p:sp>
+      <p:cxnSp>
+        <p:nvCxnSpPr>
+          <p:cNvPr id="8" name="Connector 7"/>
+          <p:cNvCxnSpPr/>
+          <p:nvPr/>
+        </p:nvCxnSpPr>
+        <p:spPr>
+          <a:xfrm>
+            <a:off x="128016" y="5870448"/>
+            <a:ext cx="8887968" cy="0"/>
+          </a:xfrm>
+          <a:prstGeom prst="line">
+            <a:avLst/>
+          </a:prstGeom>
+          <a:ln w="9525">
+            <a:solidFill>
+              <a:srgbClr val="BBBBBB"/>
+            </a:solidFill>
+          </a:ln>
+        </p:spPr>
+        <p:style>
+          <a:lnRef idx="2">
+            <a:schemeClr val="accent1"/>
+          </a:lnRef>
+          <a:fillRef idx="0">
+            <a:schemeClr val="accent1"/>
+          </a:fillRef>
+          <a:effectRef idx="1">
+            <a:schemeClr val="accent1"/>
+          </a:effectRef>
+          <a:fontRef idx="minor">
+            <a:schemeClr val="tx1"/>
+          </a:fontRef>
+        </p:style>
+      </p:cxnSp>
+      <p:sp>
+        <p:nvSpPr>
+          <p:cNvPr id="9" name="RefBand"/>
+          <p:cNvSpPr txBox="1"/>
+          <p:nvPr/>
+        </p:nvSpPr>
+        <p:spPr>
+          <a:xfrm>
+            <a:off x="128016" y="5916168"/>
+            <a:ext cx="8321040" cy="548640"/>
+          </a:xfrm>
+          <a:prstGeom prst="rect">
+            <a:avLst/>
+          </a:prstGeom>
+          <a:noFill/>
+        </p:spPr>
+        <p:txBody>
+          <a:bodyPr wrap="square" anchor="t" lIns="0" rIns="0" tIns="18288" bIns="18288">
+            <a:spAutoFit/>
+          </a:bodyPr>
+          <a:lstStyle/>
+          <a:p>
+            <a:r>
+              <a:rPr sz="1000" b="0" i="1">
+                <a:solidFill>
+                  <a:srgbClr val="555555"/>
+                </a:solidFill>
+                <a:latin typeface="Arial"/>
+              </a:rPr>
+              <a:t>[2] L. J. Rogers et al., Phys. Rev. Lett. 113, 263602 (2014).   [3] M. W. Doherty et al., Phys. Rep. 528, 1 (2013).</a:t>
             </a:r>
           </a:p>
         </p:txBody>
@@ -16132,8 +17444,8 @@
         </p:nvSpPr>
         <p:spPr>
           <a:xfrm>
-            <a:off x="411480" y="292608"/>
-            <a:ext cx="6400800" cy="731520"/>
+            <a:off x="128016" y="100584"/>
+            <a:ext cx="7479792" cy="694944"/>
           </a:xfrm>
           <a:prstGeom prst="rect">
             <a:avLst/>
@@ -16161,14 +17473,48 @@
       </p:sp>
       <p:sp>
         <p:nvSpPr>
-          <p:cNvPr id="3" name="Rounded Rectangle 2"/>
+          <p:cNvPr id="3" name="TitleLine"/>
+          <p:cNvSpPr txBox="1"/>
+          <p:nvPr/>
+        </p:nvSpPr>
+        <p:spPr>
+          <a:xfrm>
+            <a:off x="128016" y="859536"/>
+            <a:ext cx="8887968" cy="457200"/>
+          </a:xfrm>
+          <a:prstGeom prst="rect">
+            <a:avLst/>
+          </a:prstGeom>
+          <a:noFill/>
+        </p:spPr>
+        <p:txBody>
+          <a:bodyPr wrap="square" anchor="ctr" lIns="0" rIns="0" tIns="18288" bIns="18288">
+            <a:spAutoFit/>
+          </a:bodyPr>
+          <a:lstStyle/>
+          <a:p>
+            <a:r>
+              <a:rPr sz="2200" b="1" i="0">
+                <a:solidFill>
+                  <a:srgbClr val="1A1A1A"/>
+                </a:solidFill>
+                <a:latin typeface="Arial"/>
+              </a:rPr>
+              <a:t>Introduction 3: The question</a:t>
+            </a:r>
+          </a:p>
+        </p:txBody>
+      </p:sp>
+      <p:sp>
+        <p:nvSpPr>
+          <p:cNvPr id="4" name="Rounded Rectangle 3"/>
           <p:cNvSpPr/>
           <p:nvPr/>
         </p:nvSpPr>
         <p:spPr>
           <a:xfrm>
-            <a:off x="411480" y="1417320"/>
-            <a:ext cx="8321040" cy="1234440"/>
+            <a:off x="128016" y="1481328"/>
+            <a:ext cx="8887968" cy="1051560"/>
           </a:xfrm>
           <a:prstGeom prst="roundRect">
             <a:avLst>
@@ -16198,7 +17544,7 @@
           </a:fontRef>
         </p:style>
         <p:txBody>
-          <a:bodyPr rtlCol="0" anchor="ctr" wrap="square" lIns="128016" rIns="128016" tIns="91440" bIns="91440"/>
+          <a:bodyPr rtlCol="0" anchor="ctr" wrap="square" lIns="128016" rIns="128016" tIns="82296" bIns="82296"/>
           <a:lstStyle/>
           <a:p>
             <a:pPr algn="ctr"/>
@@ -16228,14 +17574,14 @@
       </p:sp>
       <p:sp>
         <p:nvSpPr>
-          <p:cNvPr id="4" name="TextBox 3"/>
+          <p:cNvPr id="5" name="TextBox 4"/>
           <p:cNvSpPr txBox="1"/>
           <p:nvPr/>
         </p:nvSpPr>
         <p:spPr>
           <a:xfrm>
-            <a:off x="411480" y="2926080"/>
-            <a:ext cx="8321040" cy="2743200"/>
+            <a:off x="128016" y="2697480"/>
+            <a:ext cx="8887968" cy="2103120"/>
           </a:xfrm>
           <a:prstGeom prst="rect">
             <a:avLst/>
@@ -16369,14 +17715,14 @@
       </p:sp>
       <p:sp>
         <p:nvSpPr>
-          <p:cNvPr id="5" name="Rounded Rectangle 4"/>
+          <p:cNvPr id="6" name="Rounded Rectangle 5"/>
           <p:cNvSpPr/>
           <p:nvPr/>
         </p:nvSpPr>
         <p:spPr>
           <a:xfrm>
-            <a:off x="411480" y="5742432"/>
-            <a:ext cx="8321040" cy="731520"/>
+            <a:off x="128016" y="4919472"/>
+            <a:ext cx="8887968" cy="731520"/>
           </a:xfrm>
           <a:prstGeom prst="roundRect">
             <a:avLst>
@@ -16384,7 +17730,7 @@
             </a:avLst>
           </a:prstGeom>
           <a:solidFill>
-            <a:srgbClr val="EEF2FA"/>
+            <a:srgbClr val="EEF4FF"/>
           </a:solidFill>
           <a:ln>
             <a:noFill/>
@@ -16418,6 +17764,75 @@
                 <a:latin typeface="Arial"/>
               </a:rPr>
               <a:t>Cryogenic NV ensemble EIT is established; no published work fixes its upper temperature limit or its collapse mechanism.</a:t>
+            </a:r>
+          </a:p>
+        </p:txBody>
+      </p:sp>
+      <p:cxnSp>
+        <p:nvCxnSpPr>
+          <p:cNvPr id="7" name="Connector 6"/>
+          <p:cNvCxnSpPr/>
+          <p:nvPr/>
+        </p:nvCxnSpPr>
+        <p:spPr>
+          <a:xfrm>
+            <a:off x="128016" y="5870448"/>
+            <a:ext cx="8887968" cy="0"/>
+          </a:xfrm>
+          <a:prstGeom prst="line">
+            <a:avLst/>
+          </a:prstGeom>
+          <a:ln w="9525">
+            <a:solidFill>
+              <a:srgbClr val="BBBBBB"/>
+            </a:solidFill>
+          </a:ln>
+        </p:spPr>
+        <p:style>
+          <a:lnRef idx="2">
+            <a:schemeClr val="accent1"/>
+          </a:lnRef>
+          <a:fillRef idx="0">
+            <a:schemeClr val="accent1"/>
+          </a:fillRef>
+          <a:effectRef idx="1">
+            <a:schemeClr val="accent1"/>
+          </a:effectRef>
+          <a:fontRef idx="minor">
+            <a:schemeClr val="tx1"/>
+          </a:fontRef>
+        </p:style>
+      </p:cxnSp>
+      <p:sp>
+        <p:nvSpPr>
+          <p:cNvPr id="8" name="RefBand"/>
+          <p:cNvSpPr txBox="1"/>
+          <p:nvPr/>
+        </p:nvSpPr>
+        <p:spPr>
+          <a:xfrm>
+            <a:off x="128016" y="5916168"/>
+            <a:ext cx="8321040" cy="548640"/>
+          </a:xfrm>
+          <a:prstGeom prst="rect">
+            <a:avLst/>
+          </a:prstGeom>
+          <a:noFill/>
+        </p:spPr>
+        <p:txBody>
+          <a:bodyPr wrap="square" anchor="t" lIns="0" rIns="0" tIns="18288" bIns="18288">
+            <a:spAutoFit/>
+          </a:bodyPr>
+          <a:lstStyle/>
+          <a:p>
+            <a:r>
+              <a:rPr sz="1000" b="0" i="1">
+                <a:solidFill>
+                  <a:srgbClr val="555555"/>
+                </a:solidFill>
+                <a:latin typeface="Arial"/>
+              </a:rPr>
+              <a:t>[4] V. M. Acosta et al., Phys. Rev. Lett. 110, 213605 (2013).   [5] C. Santori et al., Phys. Rev. Lett. 97, 247401 (2006).</a:t>
             </a:r>
           </a:p>
         </p:txBody>
@@ -16509,8 +17924,8 @@
         </p:nvSpPr>
         <p:spPr>
           <a:xfrm>
-            <a:off x="411480" y="292608"/>
-            <a:ext cx="6400800" cy="731520"/>
+            <a:off x="128016" y="100584"/>
+            <a:ext cx="7479792" cy="694944"/>
           </a:xfrm>
           <a:prstGeom prst="rect">
             <a:avLst/>
@@ -16538,14 +17953,48 @@
       </p:sp>
       <p:sp>
         <p:nvSpPr>
-          <p:cNvPr id="3" name="Rounded Rectangle 2"/>
+          <p:cNvPr id="3" name="TitleLine"/>
+          <p:cNvSpPr txBox="1"/>
+          <p:nvPr/>
+        </p:nvSpPr>
+        <p:spPr>
+          <a:xfrm>
+            <a:off x="128016" y="859536"/>
+            <a:ext cx="8887968" cy="457200"/>
+          </a:xfrm>
+          <a:prstGeom prst="rect">
+            <a:avLst/>
+          </a:prstGeom>
+          <a:noFill/>
+        </p:spPr>
+        <p:txBody>
+          <a:bodyPr wrap="square" anchor="ctr" lIns="0" rIns="0" tIns="18288" bIns="18288">
+            <a:spAutoFit/>
+          </a:bodyPr>
+          <a:lstStyle/>
+          <a:p>
+            <a:r>
+              <a:rPr sz="2200" b="1" i="0">
+                <a:solidFill>
+                  <a:srgbClr val="1A1A1A"/>
+                </a:solidFill>
+                <a:latin typeface="Arial"/>
+              </a:rPr>
+              <a:t>Method 1: What a no-go actually claims</a:t>
+            </a:r>
+          </a:p>
+        </p:txBody>
+      </p:sp>
+      <p:sp>
+        <p:nvSpPr>
+          <p:cNvPr id="4" name="Rounded Rectangle 3"/>
           <p:cNvSpPr/>
           <p:nvPr/>
         </p:nvSpPr>
         <p:spPr>
           <a:xfrm>
-            <a:off x="411480" y="1325880"/>
-            <a:ext cx="3977639" cy="1371600"/>
+            <a:off x="128016" y="1481328"/>
+            <a:ext cx="4315968" cy="1188720"/>
           </a:xfrm>
           <a:prstGeom prst="roundRect">
             <a:avLst>
@@ -16553,7 +18002,7 @@
             </a:avLst>
           </a:prstGeom>
           <a:solidFill>
-            <a:srgbClr val="FDEEEE"/>
+            <a:srgbClr val="FFF1F1"/>
           </a:solidFill>
           <a:ln>
             <a:noFill/>
@@ -16575,7 +18024,7 @@
           </a:fontRef>
         </p:style>
         <p:txBody>
-          <a:bodyPr rtlCol="0" anchor="ctr" wrap="square" lIns="128016" rIns="128016" tIns="91440" bIns="91440"/>
+          <a:bodyPr rtlCol="0" anchor="ctr" wrap="square" lIns="128016" rIns="128016" tIns="82296" bIns="82296"/>
           <a:lstStyle/>
           <a:p>
             <a:pPr algn="ctr"/>
@@ -16592,7 +18041,7 @@
           <a:p>
             <a:pPr>
               <a:spcBef>
-                <a:spcPts val="600"/>
+                <a:spcPts val="500"/>
               </a:spcBef>
             </a:pPr>
             <a:r>
@@ -16609,14 +18058,14 @@
       </p:sp>
       <p:sp>
         <p:nvSpPr>
-          <p:cNvPr id="4" name="Rounded Rectangle 3"/>
+          <p:cNvPr id="5" name="Rounded Rectangle 4"/>
           <p:cNvSpPr/>
           <p:nvPr/>
         </p:nvSpPr>
         <p:spPr>
           <a:xfrm>
-            <a:off x="4663440" y="1325880"/>
-            <a:ext cx="3977639" cy="1371600"/>
+            <a:off x="4700016" y="1481328"/>
+            <a:ext cx="4315968" cy="1188720"/>
           </a:xfrm>
           <a:prstGeom prst="roundRect">
             <a:avLst>
@@ -16624,7 +18073,7 @@
             </a:avLst>
           </a:prstGeom>
           <a:solidFill>
-            <a:srgbClr val="EEF2FA"/>
+            <a:srgbClr val="EEF4FF"/>
           </a:solidFill>
           <a:ln>
             <a:noFill/>
@@ -16646,7 +18095,7 @@
           </a:fontRef>
         </p:style>
         <p:txBody>
-          <a:bodyPr rtlCol="0" anchor="ctr" wrap="square" lIns="128016" rIns="128016" tIns="91440" bIns="91440"/>
+          <a:bodyPr rtlCol="0" anchor="ctr" wrap="square" lIns="128016" rIns="128016" tIns="82296" bIns="82296"/>
           <a:lstStyle/>
           <a:p>
             <a:pPr algn="ctr"/>
@@ -16663,7 +18112,7 @@
           <a:p>
             <a:pPr>
               <a:spcBef>
-                <a:spcPts val="600"/>
+                <a:spcPts val="500"/>
               </a:spcBef>
             </a:pPr>
             <a:r>
@@ -16680,14 +18129,14 @@
       </p:sp>
       <p:sp>
         <p:nvSpPr>
-          <p:cNvPr id="5" name="TextBox 4"/>
+          <p:cNvPr id="6" name="TextBox 5"/>
           <p:cNvSpPr txBox="1"/>
           <p:nvPr/>
         </p:nvSpPr>
         <p:spPr>
           <a:xfrm>
-            <a:off x="411480" y="2852928"/>
-            <a:ext cx="8321040" cy="566928"/>
+            <a:off x="128016" y="2779776"/>
+            <a:ext cx="8887968" cy="420624"/>
           </a:xfrm>
           <a:prstGeom prst="rect">
             <a:avLst/>
@@ -16712,7 +18161,7 @@
             <a:r>
               <a:rPr sz="1700" b="1" i="0">
                 <a:solidFill>
-                  <a:srgbClr val="C00000"/>
+                  <a:srgbClr val="1C3077"/>
                 </a:solidFill>
                 <a:latin typeface="Arial"/>
               </a:rPr>
@@ -16732,14 +18181,14 @@
       </p:sp>
       <p:sp>
         <p:nvSpPr>
-          <p:cNvPr id="6" name="Rounded Rectangle 5"/>
+          <p:cNvPr id="7" name="Rounded Rectangle 6"/>
           <p:cNvSpPr/>
           <p:nvPr/>
         </p:nvSpPr>
         <p:spPr>
           <a:xfrm>
-            <a:off x="411480" y="3474720"/>
-            <a:ext cx="8321040" cy="2057400"/>
+            <a:off x="128016" y="3255264"/>
+            <a:ext cx="8887968" cy="1517904"/>
           </a:xfrm>
           <a:prstGeom prst="roundRect">
             <a:avLst>
@@ -16747,7 +18196,7 @@
             </a:avLst>
           </a:prstGeom>
           <a:solidFill>
-            <a:srgbClr val="F7F9FC"/>
+            <a:srgbClr val="F6F8FC"/>
           </a:solidFill>
           <a:ln>
             <a:noFill/>
@@ -16769,7 +18218,7 @@
           </a:fontRef>
         </p:style>
         <p:txBody>
-          <a:bodyPr rtlCol="0" anchor="ctr" wrap="square" lIns="128016" rIns="128016" tIns="91440" bIns="91440"/>
+          <a:bodyPr rtlCol="0" anchor="ctr" wrap="square" lIns="128016" rIns="128016" tIns="82296" bIns="82296"/>
           <a:lstStyle/>
           <a:p>
             <a:pPr algn="ctr"/>
@@ -16786,7 +18235,7 @@
           <a:p>
             <a:pPr>
               <a:spcBef>
-                <a:spcPts val="700"/>
+                <a:spcPts val="500"/>
               </a:spcBef>
             </a:pPr>
             <a:r>
@@ -16811,7 +18260,7 @@
           <a:p>
             <a:pPr>
               <a:spcBef>
-                <a:spcPts val="700"/>
+                <a:spcPts val="500"/>
               </a:spcBef>
             </a:pPr>
             <a:r>
@@ -16836,7 +18285,7 @@
           <a:p>
             <a:pPr>
               <a:spcBef>
-                <a:spcPts val="700"/>
+                <a:spcPts val="500"/>
               </a:spcBef>
             </a:pPr>
             <a:r>
@@ -16851,7 +18300,7 @@
             <a:r>
               <a:rPr sz="1600" b="1" i="0">
                 <a:solidFill>
-                  <a:srgbClr val="C00000"/>
+                  <a:srgbClr val="1C3077"/>
                 </a:solidFill>
                 <a:latin typeface="Courier New"/>
               </a:rPr>
@@ -16862,14 +18311,14 @@
       </p:sp>
       <p:sp>
         <p:nvSpPr>
-          <p:cNvPr id="7" name="Rounded Rectangle 6"/>
+          <p:cNvPr id="8" name="Rounded Rectangle 7"/>
           <p:cNvSpPr/>
           <p:nvPr/>
         </p:nvSpPr>
         <p:spPr>
           <a:xfrm>
-            <a:off x="411480" y="5742432"/>
-            <a:ext cx="8321040" cy="731520"/>
+            <a:off x="128016" y="4919472"/>
+            <a:ext cx="8887968" cy="731520"/>
           </a:xfrm>
           <a:prstGeom prst="roundRect">
             <a:avLst>
@@ -16877,7 +18326,7 @@
             </a:avLst>
           </a:prstGeom>
           <a:solidFill>
-            <a:srgbClr val="EEF2FA"/>
+            <a:srgbClr val="EEF4FF"/>
           </a:solidFill>
           <a:ln>
             <a:noFill/>
@@ -16911,6 +18360,75 @@
                 <a:latin typeface="Arial"/>
               </a:rPr>
               <a:t>The pathway cut is an algebraic counterfactual (B = C = 0 with the steady state held fixed), not a control-off measurement.</a:t>
+            </a:r>
+          </a:p>
+        </p:txBody>
+      </p:sp>
+      <p:cxnSp>
+        <p:nvCxnSpPr>
+          <p:cNvPr id="9" name="Connector 8"/>
+          <p:cNvCxnSpPr/>
+          <p:nvPr/>
+        </p:nvCxnSpPr>
+        <p:spPr>
+          <a:xfrm>
+            <a:off x="128016" y="5870448"/>
+            <a:ext cx="8887968" cy="0"/>
+          </a:xfrm>
+          <a:prstGeom prst="line">
+            <a:avLst/>
+          </a:prstGeom>
+          <a:ln w="9525">
+            <a:solidFill>
+              <a:srgbClr val="BBBBBB"/>
+            </a:solidFill>
+          </a:ln>
+        </p:spPr>
+        <p:style>
+          <a:lnRef idx="2">
+            <a:schemeClr val="accent1"/>
+          </a:lnRef>
+          <a:fillRef idx="0">
+            <a:schemeClr val="accent1"/>
+          </a:fillRef>
+          <a:effectRef idx="1">
+            <a:schemeClr val="accent1"/>
+          </a:effectRef>
+          <a:fontRef idx="minor">
+            <a:schemeClr val="tx1"/>
+          </a:fontRef>
+        </p:style>
+      </p:cxnSp>
+      <p:sp>
+        <p:nvSpPr>
+          <p:cNvPr id="10" name="RefBand"/>
+          <p:cNvSpPr txBox="1"/>
+          <p:nvPr/>
+        </p:nvSpPr>
+        <p:spPr>
+          <a:xfrm>
+            <a:off x="128016" y="5916168"/>
+            <a:ext cx="8321040" cy="548640"/>
+          </a:xfrm>
+          <a:prstGeom prst="rect">
+            <a:avLst/>
+          </a:prstGeom>
+          <a:noFill/>
+        </p:spPr>
+        <p:txBody>
+          <a:bodyPr wrap="square" anchor="t" lIns="0" rIns="0" tIns="18288" bIns="18288">
+            <a:spAutoFit/>
+          </a:bodyPr>
+          <a:lstStyle/>
+          <a:p>
+            <a:r>
+              <a:rPr sz="1000" b="0" i="1">
+                <a:solidFill>
+                  <a:srgbClr val="555555"/>
+                </a:solidFill>
+                <a:latin typeface="Arial"/>
+              </a:rPr>
+              <a:t>[6] D. Finkelstein-Shapiro et al., Phys. Rev. A 99, 053829 (2019).</a:t>
             </a:r>
           </a:p>
         </p:txBody>
@@ -16941,8 +18459,8 @@
         </p:nvSpPr>
         <p:spPr>
           <a:xfrm>
-            <a:off x="411480" y="292608"/>
-            <a:ext cx="6400800" cy="731520"/>
+            <a:off x="128016" y="100584"/>
+            <a:ext cx="7479792" cy="694944"/>
           </a:xfrm>
           <a:prstGeom prst="rect">
             <a:avLst/>
@@ -16970,14 +18488,48 @@
       </p:sp>
       <p:sp>
         <p:nvSpPr>
-          <p:cNvPr id="3" name="Rounded Rectangle 2"/>
+          <p:cNvPr id="3" name="TitleLine"/>
+          <p:cNvSpPr txBox="1"/>
+          <p:nvPr/>
+        </p:nvSpPr>
+        <p:spPr>
+          <a:xfrm>
+            <a:off x="128016" y="859536"/>
+            <a:ext cx="8887968" cy="457200"/>
+          </a:xfrm>
+          <a:prstGeom prst="rect">
+            <a:avLst/>
+          </a:prstGeom>
+          <a:noFill/>
+        </p:spPr>
+        <p:txBody>
+          <a:bodyPr wrap="square" anchor="ctr" lIns="0" rIns="0" tIns="18288" bIns="18288">
+            <a:spAutoFit/>
+          </a:bodyPr>
+          <a:lstStyle/>
+          <a:p>
+            <a:r>
+              <a:rPr sz="2200" b="1" i="0">
+                <a:solidFill>
+                  <a:srgbClr val="1A1A1A"/>
+                </a:solidFill>
+                <a:latin typeface="Arial"/>
+              </a:rPr>
+              <a:t>Method 2: A material-independent criterion</a:t>
+            </a:r>
+          </a:p>
+        </p:txBody>
+      </p:sp>
+      <p:sp>
+        <p:nvSpPr>
+          <p:cNvPr id="4" name="Rounded Rectangle 3"/>
           <p:cNvSpPr/>
           <p:nvPr/>
         </p:nvSpPr>
         <p:spPr>
           <a:xfrm>
-            <a:off x="411480" y="1417320"/>
-            <a:ext cx="1860804" cy="1600200"/>
+            <a:off x="128016" y="1481328"/>
+            <a:ext cx="2002536" cy="1417320"/>
           </a:xfrm>
           <a:prstGeom prst="roundRect">
             <a:avLst>
@@ -16985,7 +18537,7 @@
             </a:avLst>
           </a:prstGeom>
           <a:solidFill>
-            <a:srgbClr val="EEF2FA"/>
+            <a:srgbClr val="EEF4FF"/>
           </a:solidFill>
           <a:ln>
             <a:noFill/>
@@ -17007,7 +18559,7 @@
           </a:fontRef>
         </p:style>
         <p:txBody>
-          <a:bodyPr rtlCol="0" anchor="ctr" wrap="square" lIns="128016" rIns="128016" tIns="91440" bIns="91440"/>
+          <a:bodyPr rtlCol="0" anchor="ctr" wrap="square" lIns="128016" rIns="128016" tIns="82296" bIns="82296"/>
           <a:lstStyle/>
           <a:p>
             <a:pPr algn="ctr"/>
@@ -17049,13 +18601,13 @@
       </p:sp>
       <p:cxnSp>
         <p:nvCxnSpPr>
-          <p:cNvPr id="4" name="Connector 3"/>
+          <p:cNvPr id="5" name="Connector 4"/>
           <p:cNvCxnSpPr/>
           <p:nvPr/>
         </p:nvCxnSpPr>
         <p:spPr>
           <a:xfrm>
-            <a:off x="2318004" y="2212848"/>
+            <a:off x="2176272" y="2194560"/>
             <a:ext cx="201168" cy="0"/>
           </a:xfrm>
           <a:prstGeom prst="line">
@@ -17084,14 +18636,14 @@
       </p:cxnSp>
       <p:sp>
         <p:nvSpPr>
-          <p:cNvPr id="5" name="Rounded Rectangle 4"/>
+          <p:cNvPr id="6" name="Rounded Rectangle 5"/>
           <p:cNvSpPr/>
           <p:nvPr/>
         </p:nvSpPr>
         <p:spPr>
           <a:xfrm>
-            <a:off x="2564892" y="1417320"/>
-            <a:ext cx="1860804" cy="1600200"/>
+            <a:off x="2423160" y="1481328"/>
+            <a:ext cx="2002536" cy="1417320"/>
           </a:xfrm>
           <a:prstGeom prst="roundRect">
             <a:avLst>
@@ -17099,7 +18651,7 @@
             </a:avLst>
           </a:prstGeom>
           <a:solidFill>
-            <a:srgbClr val="EEF2FA"/>
+            <a:srgbClr val="EEF4FF"/>
           </a:solidFill>
           <a:ln>
             <a:noFill/>
@@ -17121,7 +18673,7 @@
           </a:fontRef>
         </p:style>
         <p:txBody>
-          <a:bodyPr rtlCol="0" anchor="ctr" wrap="square" lIns="128016" rIns="128016" tIns="91440" bIns="91440"/>
+          <a:bodyPr rtlCol="0" anchor="ctr" wrap="square" lIns="128016" rIns="128016" tIns="82296" bIns="82296"/>
           <a:lstStyle/>
           <a:p>
             <a:pPr algn="ctr"/>
@@ -17151,14 +18703,14 @@
       </p:sp>
       <p:cxnSp>
         <p:nvCxnSpPr>
-          <p:cNvPr id="6" name="Connector 5"/>
+          <p:cNvPr id="7" name="Connector 6"/>
           <p:cNvCxnSpPr/>
           <p:nvPr/>
         </p:nvCxnSpPr>
         <p:spPr>
           <a:xfrm>
-            <a:off x="4471416" y="2212848"/>
-            <a:ext cx="201167" cy="0"/>
+            <a:off x="4471416" y="2194560"/>
+            <a:ext cx="201168" cy="0"/>
           </a:xfrm>
           <a:prstGeom prst="line">
             <a:avLst/>
@@ -17186,14 +18738,14 @@
       </p:cxnSp>
       <p:sp>
         <p:nvSpPr>
-          <p:cNvPr id="7" name="Rounded Rectangle 6"/>
+          <p:cNvPr id="8" name="Rounded Rectangle 7"/>
           <p:cNvSpPr/>
           <p:nvPr/>
         </p:nvSpPr>
         <p:spPr>
           <a:xfrm>
-            <a:off x="4718304" y="1417320"/>
-            <a:ext cx="1860804" cy="1600200"/>
+            <a:off x="4718304" y="1481328"/>
+            <a:ext cx="2002536" cy="1417320"/>
           </a:xfrm>
           <a:prstGeom prst="roundRect">
             <a:avLst>
@@ -17201,7 +18753,7 @@
             </a:avLst>
           </a:prstGeom>
           <a:solidFill>
-            <a:srgbClr val="EEF2FA"/>
+            <a:srgbClr val="EEF4FF"/>
           </a:solidFill>
           <a:ln>
             <a:noFill/>
@@ -17223,7 +18775,7 @@
           </a:fontRef>
         </p:style>
         <p:txBody>
-          <a:bodyPr rtlCol="0" anchor="ctr" wrap="square" lIns="128016" rIns="128016" tIns="91440" bIns="91440"/>
+          <a:bodyPr rtlCol="0" anchor="ctr" wrap="square" lIns="128016" rIns="128016" tIns="82296" bIns="82296"/>
           <a:lstStyle/>
           <a:p>
             <a:pPr algn="ctr"/>
@@ -17265,13 +18817,13 @@
       </p:sp>
       <p:cxnSp>
         <p:nvCxnSpPr>
-          <p:cNvPr id="8" name="Connector 7"/>
+          <p:cNvPr id="9" name="Connector 8"/>
           <p:cNvCxnSpPr/>
           <p:nvPr/>
         </p:nvCxnSpPr>
         <p:spPr>
           <a:xfrm>
-            <a:off x="6624828" y="2212848"/>
+            <a:off x="6766560" y="2194560"/>
             <a:ext cx="201168" cy="0"/>
           </a:xfrm>
           <a:prstGeom prst="line">
@@ -17300,14 +18852,14 @@
       </p:cxnSp>
       <p:sp>
         <p:nvSpPr>
-          <p:cNvPr id="9" name="Rounded Rectangle 8"/>
+          <p:cNvPr id="10" name="Rounded Rectangle 9"/>
           <p:cNvSpPr/>
           <p:nvPr/>
         </p:nvSpPr>
         <p:spPr>
           <a:xfrm>
-            <a:off x="6871716" y="1417320"/>
-            <a:ext cx="1860804" cy="1600200"/>
+            <a:off x="7013448" y="1481328"/>
+            <a:ext cx="2002536" cy="1417320"/>
           </a:xfrm>
           <a:prstGeom prst="roundRect">
             <a:avLst>
@@ -17337,7 +18889,7 @@
           </a:fontRef>
         </p:style>
         <p:txBody>
-          <a:bodyPr rtlCol="0" anchor="ctr" wrap="square" lIns="128016" rIns="128016" tIns="91440" bIns="91440"/>
+          <a:bodyPr rtlCol="0" anchor="ctr" wrap="square" lIns="128016" rIns="128016" tIns="82296" bIns="82296"/>
           <a:lstStyle/>
           <a:p>
             <a:pPr algn="ctr"/>
@@ -17379,14 +18931,14 @@
       </p:sp>
       <p:sp>
         <p:nvSpPr>
-          <p:cNvPr id="10" name="TextBox 9"/>
+          <p:cNvPr id="11" name="TextBox 10"/>
           <p:cNvSpPr txBox="1"/>
           <p:nvPr/>
         </p:nvSpPr>
         <p:spPr>
           <a:xfrm>
-            <a:off x="411480" y="3291840"/>
-            <a:ext cx="8321040" cy="2377440"/>
+            <a:off x="128016" y="3108960"/>
+            <a:ext cx="8887968" cy="1691640"/>
           </a:xfrm>
           <a:prstGeom prst="rect">
             <a:avLst/>
@@ -17477,14 +19029,14 @@
       </p:sp>
       <p:sp>
         <p:nvSpPr>
-          <p:cNvPr id="11" name="Rounded Rectangle 10"/>
+          <p:cNvPr id="12" name="Rounded Rectangle 11"/>
           <p:cNvSpPr/>
           <p:nvPr/>
         </p:nvSpPr>
         <p:spPr>
           <a:xfrm>
-            <a:off x="411480" y="5742432"/>
-            <a:ext cx="8321040" cy="731520"/>
+            <a:off x="128016" y="4919472"/>
+            <a:ext cx="8887968" cy="731520"/>
           </a:xfrm>
           <a:prstGeom prst="roundRect">
             <a:avLst>
@@ -17492,7 +19044,7 @@
             </a:avLst>
           </a:prstGeom>
           <a:solidFill>
-            <a:srgbClr val="EEF2FA"/>
+            <a:srgbClr val="EEF4FF"/>
           </a:solidFill>
           <a:ln>
             <a:noFill/>
@@ -17526,6 +19078,75 @@
                 <a:latin typeface="Arial"/>
               </a:rPr>
               <a:t>For the scalar block, δχₛ vanishes identically if and only if the product of the two Raman vertices K₁₂K₂₁ vanishes.</a:t>
+            </a:r>
+          </a:p>
+        </p:txBody>
+      </p:sp>
+      <p:cxnSp>
+        <p:nvCxnSpPr>
+          <p:cNvPr id="13" name="Connector 12"/>
+          <p:cNvCxnSpPr/>
+          <p:nvPr/>
+        </p:nvCxnSpPr>
+        <p:spPr>
+          <a:xfrm>
+            <a:off x="128016" y="5870448"/>
+            <a:ext cx="8887968" cy="0"/>
+          </a:xfrm>
+          <a:prstGeom prst="line">
+            <a:avLst/>
+          </a:prstGeom>
+          <a:ln w="9525">
+            <a:solidFill>
+              <a:srgbClr val="BBBBBB"/>
+            </a:solidFill>
+          </a:ln>
+        </p:spPr>
+        <p:style>
+          <a:lnRef idx="2">
+            <a:schemeClr val="accent1"/>
+          </a:lnRef>
+          <a:fillRef idx="0">
+            <a:schemeClr val="accent1"/>
+          </a:fillRef>
+          <a:effectRef idx="1">
+            <a:schemeClr val="accent1"/>
+          </a:effectRef>
+          <a:fontRef idx="minor">
+            <a:schemeClr val="tx1"/>
+          </a:fontRef>
+        </p:style>
+      </p:cxnSp>
+      <p:sp>
+        <p:nvSpPr>
+          <p:cNvPr id="14" name="RefBand"/>
+          <p:cNvSpPr txBox="1"/>
+          <p:nvPr/>
+        </p:nvSpPr>
+        <p:spPr>
+          <a:xfrm>
+            <a:off x="128016" y="5916168"/>
+            <a:ext cx="8321040" cy="548640"/>
+          </a:xfrm>
+          <a:prstGeom prst="rect">
+            <a:avLst/>
+          </a:prstGeom>
+          <a:noFill/>
+        </p:spPr>
+        <p:txBody>
+          <a:bodyPr wrap="square" anchor="t" lIns="0" rIns="0" tIns="18288" bIns="18288">
+            <a:spAutoFit/>
+          </a:bodyPr>
+          <a:lstStyle/>
+          <a:p>
+            <a:r>
+              <a:rPr sz="1000" b="0" i="1">
+                <a:solidFill>
+                  <a:srgbClr val="555555"/>
+                </a:solidFill>
+                <a:latin typeface="Arial"/>
+              </a:rPr>
+              <a:t>[7] K. Zhou et al., J. Phys. A 58, 095303 (2025).   [8] X. Zhao, L.-M. Kuang and J.-Q. Liao, Phys. Rev. A 113, 013723 (2026).</a:t>
             </a:r>
           </a:p>
         </p:txBody>

--- a/presentations/lab_seminar/nv_eit_seminar.pptx
+++ b/presentations/lab_seminar/nv_eit_seminar.pptx
@@ -9787,7 +9787,7 @@
                 </a:solidFill>
                 <a:latin typeface="Arial"/>
               </a:rPr>
-              <a:t>NV EIT does not simply fade — it occupies a closed island in the temperature–field plane.</a:t>
+              <a:t>NV EIT does not simply fade — it occupies a bounded island in the temperature–field plane.</a:t>
             </a:r>
           </a:p>
         </p:txBody>
@@ -9842,7 +9842,7 @@
         </p:blipFill>
         <p:spPr>
           <a:xfrm>
-            <a:off x="128015" y="1801025"/>
+            <a:off x="128015" y="1481328"/>
             <a:ext cx="8887968" cy="2707309"/>
           </a:xfrm>
           <a:prstGeom prst="rect">
@@ -9852,7 +9852,50 @@
       </p:pic>
       <p:sp>
         <p:nvSpPr>
-          <p:cNvPr id="5" name="Rounded Rectangle 4"/>
+          <p:cNvPr id="5" name="TextBox 4"/>
+          <p:cNvSpPr txBox="1"/>
+          <p:nvPr/>
+        </p:nvSpPr>
+        <p:spPr>
+          <a:xfrm>
+            <a:off x="128016" y="4279392"/>
+            <a:ext cx="8887968" cy="548640"/>
+          </a:xfrm>
+          <a:prstGeom prst="rect">
+            <a:avLst/>
+          </a:prstGeom>
+          <a:noFill/>
+        </p:spPr>
+        <p:txBody>
+          <a:bodyPr wrap="square" anchor="t" lIns="0" rIns="0" tIns="18288" bIns="18288">
+            <a:spAutoFit/>
+          </a:bodyPr>
+          <a:lstStyle/>
+          <a:p>
+            <a:r>
+              <a:rPr sz="1600" b="1" i="0">
+                <a:solidFill>
+                  <a:srgbClr val="1C3077"/>
+                </a:solidFill>
+                <a:latin typeface="Arial"/>
+              </a:rPr>
+              <a:t>Cold edge: </a:t>
+            </a:r>
+            <a:r>
+              <a:rPr sz="1600" b="0" i="0">
+                <a:solidFill>
+                  <a:srgbClr val="1A1A1A"/>
+                </a:solidFill>
+                <a:latin typeface="Arial"/>
+              </a:rPr>
+              <a:t>30 K at 0.15 T; above 0.3 T it is the 20 K grid floor, closed by 3 Autler–Townes points.</a:t>
+            </a:r>
+          </a:p>
+        </p:txBody>
+      </p:sp>
+      <p:sp>
+        <p:nvSpPr>
+          <p:cNvPr id="6" name="Rounded Rectangle 5"/>
           <p:cNvSpPr/>
           <p:nvPr/>
         </p:nvSpPr>
@@ -9900,14 +9943,14 @@
                 </a:solidFill>
                 <a:latin typeface="Arial"/>
               </a:rPr>
-              <a:t>Transparency needs B⊥ ≳ 0.15 T and 22–95 K: 148 of 240 grid points are genuine transparency, 68 induced absorption.</a:t>
+              <a:t>Transparency needs B⊥ ≳ 0.15 T: the window runs 30–90 K at that field and 20–95 K above 0.3 T.</a:t>
             </a:r>
           </a:p>
         </p:txBody>
       </p:sp>
       <p:cxnSp>
         <p:nvCxnSpPr>
-          <p:cNvPr id="6" name="Connector 5"/>
+          <p:cNvPr id="7" name="Connector 6"/>
           <p:cNvCxnSpPr/>
           <p:nvPr/>
         </p:nvCxnSpPr>
@@ -9942,7 +9985,7 @@
       </p:cxnSp>
       <p:sp>
         <p:nvSpPr>
-          <p:cNvPr id="7" name="RefBand"/>
+          <p:cNvPr id="8" name="RefBand"/>
           <p:cNvSpPr txBox="1"/>
           <p:nvPr/>
         </p:nvSpPr>
@@ -10022,7 +10065,7 @@
                 </a:solidFill>
                 <a:latin typeface="Arial"/>
               </a:rPr>
-              <a:t>Room-temperature NV EIT is out of reach by nine orders of magnitude.</a:t>
+              <a:t>Room temperature loses nine orders of contrast and lands two orders below the detection floor.</a:t>
             </a:r>
           </a:p>
         </p:txBody>
@@ -10334,7 +10377,7 @@
                 </a:solidFill>
                 <a:latin typeface="Arial"/>
               </a:rPr>
-              <a:t>At 300 K the residual contrast is 1.1×10⁻⁹ and of the wrong sign; no integration time reaches SNR = 5.</a:t>
+              <a:t>At 300 K the contrast is 1.1×10⁻⁹, of the wrong sign, and 140× below the 1.5×10⁻⁷ detection floor.</a:t>
             </a:r>
           </a:p>
         </p:txBody>
@@ -10700,6 +10743,22 @@
               <a:t>full Liouvillian, 68 % interval, 80 samples</a:t>
             </a:r>
           </a:p>
+          <a:p>
+            <a:pPr>
+              <a:spcBef>
+                <a:spcPts val="300"/>
+              </a:spcBef>
+            </a:pPr>
+            <a:r>
+              <a:rPr sz="1600" b="0" i="0">
+                <a:solidFill>
+                  <a:srgbClr val="555555"/>
+                </a:solidFill>
+                <a:latin typeface="Arial"/>
+              </a:rPr>
+              <a:t>reduced kernel not trusted above 90 K</a:t>
+            </a:r>
+          </a:p>
         </p:txBody>
       </p:sp>
       <p:sp>
@@ -12106,7 +12165,7 @@
                 </a:solidFill>
                 <a:latin typeface="Arial"/>
               </a:rPr>
-              <a:t>The calculation says where to look and which single measurement is decisive.</a:t>
+              <a:t>The decisive measurement is following the fringe through zero at 103 K.</a:t>
             </a:r>
           </a:p>
         </p:txBody>
@@ -12235,7 +12294,7 @@
                 </a:solidFill>
                 <a:latin typeface="Arial"/>
               </a:rPr>
-              <a:t>•  25 – 90 K, B⊥ ≳ 0.15 T</a:t>
+              <a:t>•  30–90 K at 0.15 T, 20–95 K above 0.3 T</a:t>
             </a:r>
           </a:p>
           <a:p>
@@ -13546,7 +13605,7 @@
                 </a:solidFill>
                 <a:latin typeface="Arial"/>
               </a:rPr>
-              <a:t>Closed island</a:t>
+              <a:t>Bounded island</a:t>
             </a:r>
           </a:p>
           <a:p>
@@ -13557,7 +13616,7 @@
                 </a:solidFill>
                 <a:latin typeface="Arial"/>
               </a:rPr>
-              <a:t>Transparency exists only for 25–90 K and B⊥ ≳ 0.15 T — bounded on both temperature sides.</a:t>
+              <a:t>Transparency needs B⊥ ≳ 0.15 T, and runs 30–90 K at that field, 20–95 K above 0.3 T.</a:t>
             </a:r>
           </a:p>
         </p:txBody>

--- a/presentations/lab_seminar/nv_eit_seminar.pptx
+++ b/presentations/lab_seminar/nv_eit_seminar.pptx
@@ -9272,8 +9272,8 @@
         </p:nvSpPr>
         <p:spPr>
           <a:xfrm>
-            <a:off x="667512" y="3063240"/>
-            <a:ext cx="7918704" cy="1005840"/>
+            <a:off x="128016" y="100584"/>
+            <a:ext cx="7479792" cy="694944"/>
           </a:xfrm>
           <a:prstGeom prst="rect">
             <a:avLst/>
@@ -9286,23 +9286,431 @@
           </a:bodyPr>
           <a:lstStyle/>
           <a:p>
-            <a:r>
-              <a:rPr sz="2800" b="1" i="0">
+            <a:pPr algn="l"/>
+            <a:r>
+              <a:rPr sz="2000" b="1" i="0">
+                <a:solidFill>
+                  <a:srgbClr val="1C3077"/>
+                </a:solidFill>
+                <a:latin typeface="Arial"/>
+              </a:rPr>
+              <a:t>Our response kernel returns the density matrix the EIT literature derives.</a:t>
+            </a:r>
+          </a:p>
+        </p:txBody>
+      </p:sp>
+      <p:sp>
+        <p:nvSpPr>
+          <p:cNvPr id="3" name="TitleLine"/>
+          <p:cNvSpPr txBox="1"/>
+          <p:nvPr/>
+        </p:nvSpPr>
+        <p:spPr>
+          <a:xfrm>
+            <a:off x="128016" y="859536"/>
+            <a:ext cx="8887968" cy="457200"/>
+          </a:xfrm>
+          <a:prstGeom prst="rect">
+            <a:avLst/>
+          </a:prstGeom>
+          <a:noFill/>
+        </p:spPr>
+        <p:txBody>
+          <a:bodyPr wrap="square" anchor="ctr" lIns="0" rIns="0" tIns="18288" bIns="18288">
+            <a:spAutoFit/>
+          </a:bodyPr>
+          <a:lstStyle/>
+          <a:p>
+            <a:r>
+              <a:rPr sz="2200" b="1" i="0">
+                <a:solidFill>
+                  <a:srgbClr val="1A1A1A"/>
+                </a:solidFill>
+                <a:latin typeface="Arial"/>
+              </a:rPr>
+              <a:t>Method 4: The kernel reproduces the literature result</a:t>
+            </a:r>
+          </a:p>
+        </p:txBody>
+      </p:sp>
+      <p:sp>
+        <p:nvSpPr>
+          <p:cNvPr id="4" name="Rounded Rectangle 3"/>
+          <p:cNvSpPr/>
+          <p:nvPr/>
+        </p:nvSpPr>
+        <p:spPr>
+          <a:xfrm>
+            <a:off x="128016" y="1481328"/>
+            <a:ext cx="8887968" cy="1481328"/>
+          </a:xfrm>
+          <a:prstGeom prst="roundRect">
+            <a:avLst>
+              <a:gd name="adj" fmla="val 6000"/>
+            </a:avLst>
+          </a:prstGeom>
+          <a:solidFill>
+            <a:srgbClr val="F6F8FC"/>
+          </a:solidFill>
+          <a:ln>
+            <a:noFill/>
+          </a:ln>
+          <a:effectLst/>
+        </p:spPr>
+        <p:style>
+          <a:lnRef idx="1">
+            <a:schemeClr val="accent1"/>
+          </a:lnRef>
+          <a:fillRef idx="3">
+            <a:schemeClr val="accent1"/>
+          </a:fillRef>
+          <a:effectRef idx="2">
+            <a:schemeClr val="accent1"/>
+          </a:effectRef>
+          <a:fontRef idx="minor">
+            <a:schemeClr val="lt1"/>
+          </a:fontRef>
+        </p:style>
+        <p:txBody>
+          <a:bodyPr rtlCol="0" anchor="ctr" wrap="square" lIns="128016" rIns="128016" tIns="82296" bIns="82296"/>
+          <a:lstStyle/>
+          <a:p>
+            <a:pPr algn="ctr"/>
+            <a:r>
+              <a:rPr sz="1700" b="1" i="0">
+                <a:solidFill>
+                  <a:srgbClr val="1C3077"/>
+                </a:solidFill>
+                <a:latin typeface="Arial"/>
+              </a:rPr>
+              <a:t>Ideal Λ system, weak probe</a:t>
+            </a:r>
+          </a:p>
+          <a:p>
+            <a:pPr>
+              <a:spcBef>
+                <a:spcPts val="500"/>
+              </a:spcBef>
+            </a:pPr>
+            <a:r>
+              <a:rPr sz="1600" b="0" i="0">
+                <a:solidFill>
+                  <a:srgbClr val="1A1A1A"/>
+                </a:solidFill>
+                <a:latin typeface="Arial"/>
+              </a:rPr>
+              <a:t>A ρₑ₁ + B ρ₂₁ = b_p</a:t>
+            </a:r>
+            <a:r>
+              <a:rPr sz="1600" b="0" i="0">
+                <a:solidFill>
+                  <a:srgbClr val="555555"/>
+                </a:solidFill>
+                <a:latin typeface="Arial"/>
+              </a:rPr>
+              <a:t>   and   </a:t>
+            </a:r>
+            <a:r>
+              <a:rPr sz="1600" b="0" i="0">
+                <a:solidFill>
+                  <a:srgbClr val="1A1A1A"/>
+                </a:solidFill>
+                <a:latin typeface="Arial"/>
+              </a:rPr>
+              <a:t>C ρₑ₁ + G_g ρ₂₁ = 0</a:t>
+            </a:r>
+          </a:p>
+          <a:p>
+            <a:pPr>
+              <a:spcBef>
+                <a:spcPts val="400"/>
+              </a:spcBef>
+            </a:pPr>
+            <a:r>
+              <a:rPr sz="1600" b="0" i="0">
+                <a:solidFill>
+                  <a:srgbClr val="555555"/>
+                </a:solidFill>
+                <a:latin typeface="Arial"/>
+              </a:rPr>
+              <a:t>Eliminate the optical block — G_g is never inverted: </a:t>
+            </a:r>
+            <a:r>
+              <a:rPr sz="1600" b="0" i="0">
+                <a:solidFill>
+                  <a:srgbClr val="1A1A1A"/>
+                </a:solidFill>
+                <a:latin typeface="Arial"/>
+              </a:rPr>
+              <a:t>S_g = G_g − C A⁻¹B</a:t>
+            </a:r>
+          </a:p>
+          <a:p>
+            <a:pPr>
+              <a:spcBef>
+                <a:spcPts val="400"/>
+              </a:spcBef>
+            </a:pPr>
+            <a:r>
+              <a:rPr sz="1600" b="1" i="0">
                 <a:solidFill>
                   <a:srgbClr val="7F96C2"/>
                 </a:solidFill>
                 <a:latin typeface="Arial"/>
               </a:rPr>
-              <a:t>III.  </a:t>
-            </a:r>
-            <a:r>
-              <a:rPr sz="2800" b="1" i="0">
+              <a:t>⟹   </a:t>
+            </a:r>
+            <a:r>
+              <a:rPr sz="1600" b="0" i="0">
+                <a:solidFill>
+                  <a:srgbClr val="1A1A1A"/>
+                </a:solidFill>
+                <a:latin typeface="Arial"/>
+              </a:rPr>
+              <a:t>ρₑ₁ = b_p / (A + β/G_g),    β = |Ω_c|²/4</a:t>
+            </a:r>
+          </a:p>
+        </p:txBody>
+      </p:sp>
+      <p:sp>
+        <p:nvSpPr>
+          <p:cNvPr id="5" name="Rounded Rectangle 4"/>
+          <p:cNvSpPr/>
+          <p:nvPr/>
+        </p:nvSpPr>
+        <p:spPr>
+          <a:xfrm>
+            <a:off x="128016" y="3072384"/>
+            <a:ext cx="8887968" cy="969264"/>
+          </a:xfrm>
+          <a:prstGeom prst="roundRect">
+            <a:avLst>
+              <a:gd name="adj" fmla="val 6000"/>
+            </a:avLst>
+          </a:prstGeom>
+          <a:solidFill>
+            <a:srgbClr val="EEF4FF"/>
+          </a:solidFill>
+          <a:ln>
+            <a:noFill/>
+          </a:ln>
+          <a:effectLst/>
+        </p:spPr>
+        <p:style>
+          <a:lnRef idx="1">
+            <a:schemeClr val="accent1"/>
+          </a:lnRef>
+          <a:fillRef idx="3">
+            <a:schemeClr val="accent1"/>
+          </a:fillRef>
+          <a:effectRef idx="2">
+            <a:schemeClr val="accent1"/>
+          </a:effectRef>
+          <a:fontRef idx="minor">
+            <a:schemeClr val="lt1"/>
+          </a:fontRef>
+        </p:style>
+        <p:txBody>
+          <a:bodyPr rtlCol="0" anchor="ctr" wrap="square" lIns="128016" rIns="128016" tIns="82296" bIns="82296"/>
+          <a:lstStyle/>
+          <a:p>
+            <a:pPr algn="ctr"/>
+            <a:r>
+              <a:rPr sz="1800" b="1" i="0">
                 <a:solidFill>
                   <a:srgbClr val="1C3077"/>
                 </a:solidFill>
                 <a:latin typeface="Arial"/>
               </a:rPr>
-              <a:t>Results</a:t>
+              <a:t>ρₑ₁ = (iΩ_p/2) / [ γ₃₁ + iδ_p + (|Ω_c|²/4) / (γ₂₁ + i(δ_p − δ_c)) ]</a:t>
+            </a:r>
+          </a:p>
+          <a:p>
+            <a:pPr algn="ctr"/>
+            <a:r>
+              <a:rPr sz="1600" b="0" i="1">
+                <a:solidFill>
+                  <a:srgbClr val="555555"/>
+                </a:solidFill>
+                <a:latin typeface="Arial"/>
+              </a:rPr>
+              <a:t>identical, term by term, to Fleischhauer RMP 77, 633 (2005)</a:t>
+            </a:r>
+          </a:p>
+        </p:txBody>
+      </p:sp>
+      <p:sp>
+        <p:nvSpPr>
+          <p:cNvPr id="6" name="TextBox 5"/>
+          <p:cNvSpPr txBox="1"/>
+          <p:nvPr/>
+        </p:nvSpPr>
+        <p:spPr>
+          <a:xfrm>
+            <a:off x="128016" y="4151376"/>
+            <a:ext cx="8887968" cy="640080"/>
+          </a:xfrm>
+          <a:prstGeom prst="rect">
+            <a:avLst/>
+          </a:prstGeom>
+          <a:noFill/>
+        </p:spPr>
+        <p:txBody>
+          <a:bodyPr wrap="square" anchor="t" lIns="0" rIns="0" tIns="18288" bIns="18288">
+            <a:spAutoFit/>
+          </a:bodyPr>
+          <a:lstStyle/>
+          <a:p>
+            <a:r>
+              <a:rPr sz="1600" b="0" i="0">
+                <a:solidFill>
+                  <a:srgbClr val="1A1A1A"/>
+                </a:solidFill>
+                <a:latin typeface="Arial"/>
+              </a:rPr>
+              <a:t>And at δ_p = δ_c = 0 with γ₂₁ → 0:  </a:t>
+            </a:r>
+            <a:r>
+              <a:rPr sz="1600" b="1" i="0">
+                <a:solidFill>
+                  <a:srgbClr val="1C3077"/>
+                </a:solidFill>
+                <a:latin typeface="Arial"/>
+              </a:rPr>
+              <a:t>χ_full = 0 while δΞₛ = −1</a:t>
+            </a:r>
+            <a:r>
+              <a:rPr sz="1600" b="0" i="0">
+                <a:solidFill>
+                  <a:srgbClr val="1A1A1A"/>
+                </a:solidFill>
+                <a:latin typeface="Arial"/>
+              </a:rPr>
+              <a:t> — the Method 1 claim, derived rather than asserted.</a:t>
+            </a:r>
+          </a:p>
+        </p:txBody>
+      </p:sp>
+      <p:sp>
+        <p:nvSpPr>
+          <p:cNvPr id="7" name="Rounded Rectangle 6"/>
+          <p:cNvSpPr/>
+          <p:nvPr/>
+        </p:nvSpPr>
+        <p:spPr>
+          <a:xfrm>
+            <a:off x="128016" y="4919472"/>
+            <a:ext cx="8887968" cy="731520"/>
+          </a:xfrm>
+          <a:prstGeom prst="roundRect">
+            <a:avLst>
+              <a:gd name="adj" fmla="val 12000"/>
+            </a:avLst>
+          </a:prstGeom>
+          <a:solidFill>
+            <a:srgbClr val="EEF4FF"/>
+          </a:solidFill>
+          <a:ln>
+            <a:noFill/>
+          </a:ln>
+          <a:effectLst/>
+        </p:spPr>
+        <p:style>
+          <a:lnRef idx="1">
+            <a:schemeClr val="accent1"/>
+          </a:lnRef>
+          <a:fillRef idx="3">
+            <a:schemeClr val="accent1"/>
+          </a:fillRef>
+          <a:effectRef idx="2">
+            <a:schemeClr val="accent1"/>
+          </a:effectRef>
+          <a:fontRef idx="minor">
+            <a:schemeClr val="lt1"/>
+          </a:fontRef>
+        </p:style>
+        <p:txBody>
+          <a:bodyPr rtlCol="0" anchor="ctr" wrap="square" lIns="146304" rIns="146304" tIns="36576" bIns="36576"/>
+          <a:lstStyle/>
+          <a:p>
+            <a:pPr algn="l"/>
+            <a:r>
+              <a:rPr sz="2000" b="0" i="0">
+                <a:solidFill>
+                  <a:srgbClr val="1A1A1A"/>
+                </a:solidFill>
+                <a:latin typeface="Arial"/>
+              </a:rPr>
+              <a:t>Textbook Λ susceptibility recovered exactly; the full Liouvillian reproduces the archived 70 K contrast to 0.25 %.</a:t>
+            </a:r>
+          </a:p>
+        </p:txBody>
+      </p:sp>
+      <p:cxnSp>
+        <p:nvCxnSpPr>
+          <p:cNvPr id="8" name="Connector 7"/>
+          <p:cNvCxnSpPr/>
+          <p:nvPr/>
+        </p:nvCxnSpPr>
+        <p:spPr>
+          <a:xfrm>
+            <a:off x="128016" y="5870448"/>
+            <a:ext cx="8887968" cy="0"/>
+          </a:xfrm>
+          <a:prstGeom prst="line">
+            <a:avLst/>
+          </a:prstGeom>
+          <a:ln w="9525">
+            <a:solidFill>
+              <a:srgbClr val="BBBBBB"/>
+            </a:solidFill>
+          </a:ln>
+        </p:spPr>
+        <p:style>
+          <a:lnRef idx="2">
+            <a:schemeClr val="accent1"/>
+          </a:lnRef>
+          <a:fillRef idx="0">
+            <a:schemeClr val="accent1"/>
+          </a:fillRef>
+          <a:effectRef idx="1">
+            <a:schemeClr val="accent1"/>
+          </a:effectRef>
+          <a:fontRef idx="minor">
+            <a:schemeClr val="tx1"/>
+          </a:fontRef>
+        </p:style>
+      </p:cxnSp>
+      <p:sp>
+        <p:nvSpPr>
+          <p:cNvPr id="9" name="RefBand"/>
+          <p:cNvSpPr txBox="1"/>
+          <p:nvPr/>
+        </p:nvSpPr>
+        <p:spPr>
+          <a:xfrm>
+            <a:off x="128016" y="5916168"/>
+            <a:ext cx="8321040" cy="548640"/>
+          </a:xfrm>
+          <a:prstGeom prst="rect">
+            <a:avLst/>
+          </a:prstGeom>
+          <a:noFill/>
+        </p:spPr>
+        <p:txBody>
+          <a:bodyPr wrap="square" anchor="t" lIns="0" rIns="0" tIns="18288" bIns="18288">
+            <a:spAutoFit/>
+          </a:bodyPr>
+          <a:lstStyle/>
+          <a:p>
+            <a:r>
+              <a:rPr sz="1000" b="0" i="1">
+                <a:solidFill>
+                  <a:srgbClr val="555555"/>
+                </a:solidFill>
+                <a:latin typeface="Arial"/>
+              </a:rPr>
+              <a:t>[1] M. Fleischhauer, A. Imamoğlu and J. P. Marangos, Rev. Mod. Phys. 77, 633 (2005).   Symbolic check: calculations/symbolic/verify_lambda_reduction.py.   Benchmark: [4].</a:t>
             </a:r>
           </a:p>
         </p:txBody>
@@ -9333,8 +9741,8 @@
         </p:nvSpPr>
         <p:spPr>
           <a:xfrm>
-            <a:off x="128016" y="100584"/>
-            <a:ext cx="7479792" cy="694944"/>
+            <a:off x="667512" y="3063240"/>
+            <a:ext cx="7918704" cy="1005840"/>
           </a:xfrm>
           <a:prstGeom prst="rect">
             <a:avLst/>
@@ -9347,394 +9755,23 @@
           </a:bodyPr>
           <a:lstStyle/>
           <a:p>
-            <a:pPr algn="l"/>
-            <a:r>
-              <a:rPr sz="2000" b="1" i="0">
+            <a:r>
+              <a:rPr sz="2800" b="1" i="0">
+                <a:solidFill>
+                  <a:srgbClr val="7F96C2"/>
+                </a:solidFill>
+                <a:latin typeface="Arial"/>
+              </a:rPr>
+              <a:t>III.  </a:t>
+            </a:r>
+            <a:r>
+              <a:rPr sz="2800" b="1" i="0">
                 <a:solidFill>
                   <a:srgbClr val="1C3077"/>
                 </a:solidFill>
                 <a:latin typeface="Arial"/>
               </a:rPr>
-              <a:t>The general formula reproduces the textbook three-level result as a one-line special case.</a:t>
-            </a:r>
-          </a:p>
-        </p:txBody>
-      </p:sp>
-      <p:sp>
-        <p:nvSpPr>
-          <p:cNvPr id="3" name="TitleLine"/>
-          <p:cNvSpPr txBox="1"/>
-          <p:nvPr/>
-        </p:nvSpPr>
-        <p:spPr>
-          <a:xfrm>
-            <a:off x="128016" y="859536"/>
-            <a:ext cx="8887968" cy="457200"/>
-          </a:xfrm>
-          <a:prstGeom prst="rect">
-            <a:avLst/>
-          </a:prstGeom>
-          <a:noFill/>
-        </p:spPr>
-        <p:txBody>
-          <a:bodyPr wrap="square" anchor="ctr" lIns="0" rIns="0" tIns="18288" bIns="18288">
-            <a:spAutoFit/>
-          </a:bodyPr>
-          <a:lstStyle/>
-          <a:p>
-            <a:r>
-              <a:rPr sz="2200" b="1" i="0">
-                <a:solidFill>
-                  <a:srgbClr val="1A1A1A"/>
-                </a:solidFill>
-                <a:latin typeface="Arial"/>
-              </a:rPr>
-              <a:t>Result 1: Reduction to the textbook Λ system</a:t>
-            </a:r>
-          </a:p>
-        </p:txBody>
-      </p:sp>
-      <p:sp>
-        <p:nvSpPr>
-          <p:cNvPr id="4" name="Rounded Rectangle 3"/>
-          <p:cNvSpPr/>
-          <p:nvPr/>
-        </p:nvSpPr>
-        <p:spPr>
-          <a:xfrm>
-            <a:off x="128016" y="1481328"/>
-            <a:ext cx="8887968" cy="1554480"/>
-          </a:xfrm>
-          <a:prstGeom prst="roundRect">
-            <a:avLst>
-              <a:gd name="adj" fmla="val 6000"/>
-            </a:avLst>
-          </a:prstGeom>
-          <a:solidFill>
-            <a:srgbClr val="F6F8FC"/>
-          </a:solidFill>
-          <a:ln>
-            <a:noFill/>
-          </a:ln>
-          <a:effectLst/>
-        </p:spPr>
-        <p:style>
-          <a:lnRef idx="1">
-            <a:schemeClr val="accent1"/>
-          </a:lnRef>
-          <a:fillRef idx="3">
-            <a:schemeClr val="accent1"/>
-          </a:fillRef>
-          <a:effectRef idx="2">
-            <a:schemeClr val="accent1"/>
-          </a:effectRef>
-          <a:fontRef idx="minor">
-            <a:schemeClr val="lt1"/>
-          </a:fontRef>
-        </p:style>
-        <p:txBody>
-          <a:bodyPr rtlCol="0" anchor="ctr" wrap="square" lIns="128016" rIns="128016" tIns="82296" bIns="82296"/>
-          <a:lstStyle/>
-          <a:p>
-            <a:pPr algn="ctr"/>
-            <a:r>
-              <a:rPr sz="1600" b="1" i="0">
-                <a:solidFill>
-                  <a:srgbClr val="1C3077"/>
-                </a:solidFill>
-                <a:latin typeface="Arial"/>
-              </a:rPr>
-              <a:t>General (Schur complement, any number of excited branches)</a:t>
-            </a:r>
-          </a:p>
-          <a:p>
-            <a:pPr>
-              <a:spcBef>
-                <a:spcPts val="600"/>
-              </a:spcBef>
-            </a:pPr>
-            <a:r>
-              <a:rPr sz="1800" b="0" i="0">
-                <a:solidFill>
-                  <a:srgbClr val="1A1A1A"/>
-                </a:solidFill>
-                <a:latin typeface="Arial"/>
-              </a:rPr>
-              <a:t>Ξ  =  S₁  −  β K₁₂K₂₁ / (γ_g + β S₂)</a:t>
-            </a:r>
-          </a:p>
-          <a:p>
-            <a:pPr>
-              <a:spcBef>
-                <a:spcPts val="800"/>
-              </a:spcBef>
-            </a:pPr>
-            <a:r>
-              <a:rPr sz="1600" b="0" i="0">
-                <a:solidFill>
-                  <a:srgbClr val="555555"/>
-                </a:solidFill>
-                <a:latin typeface="Arial"/>
-              </a:rPr>
-              <a:t>One excited state, scalar dipoles </a:t>
-            </a:r>
-            <a:r>
-              <a:rPr sz="1600" b="1" i="0">
-                <a:solidFill>
-                  <a:srgbClr val="7F96C2"/>
-                </a:solidFill>
-                <a:latin typeface="Arial"/>
-              </a:rPr>
-              <a:t>→</a:t>
-            </a:r>
-            <a:r>
-              <a:rPr sz="1600" b="0" i="0">
-                <a:solidFill>
-                  <a:srgbClr val="1A1A1A"/>
-                </a:solidFill>
-                <a:latin typeface="Arial"/>
-              </a:rPr>
-              <a:t>   Ξ = γ_g / (Aγ_g + β)   = the standard Λ-system result</a:t>
-            </a:r>
-          </a:p>
-        </p:txBody>
-      </p:sp>
-      <p:sp>
-        <p:nvSpPr>
-          <p:cNvPr id="5" name="TextBox 4"/>
-          <p:cNvSpPr txBox="1"/>
-          <p:nvPr/>
-        </p:nvSpPr>
-        <p:spPr>
-          <a:xfrm>
-            <a:off x="128016" y="3182112"/>
-            <a:ext cx="8887968" cy="1645920"/>
-          </a:xfrm>
-          <a:prstGeom prst="rect">
-            <a:avLst/>
-          </a:prstGeom>
-          <a:noFill/>
-        </p:spPr>
-        <p:txBody>
-          <a:bodyPr wrap="square" anchor="t" lIns="0" rIns="0" tIns="18288" bIns="18288">
-            <a:spAutoFit/>
-          </a:bodyPr>
-          <a:lstStyle/>
-          <a:p>
-            <a:pPr>
-              <a:spcAft>
-                <a:spcPts val="800"/>
-              </a:spcAft>
-            </a:pPr>
-            <a:r>
-              <a:rPr sz="1600" b="0" i="0">
-                <a:solidFill>
-                  <a:srgbClr val="1A1A1A"/>
-                </a:solidFill>
-                <a:latin typeface="Arial"/>
-              </a:rPr>
-              <a:t>•  </a:t>
-            </a:r>
-            <a:r>
-              <a:rPr sz="1600" b="0" i="0">
-                <a:solidFill>
-                  <a:srgbClr val="1A1A1A"/>
-                </a:solidFill>
-                <a:latin typeface="Arial"/>
-              </a:rPr>
-              <a:t>Recovers the published three-level susceptibility exactly — no adiabatic approximation is used anywhere.</a:t>
-            </a:r>
-          </a:p>
-          <a:p>
-            <a:pPr>
-              <a:spcAft>
-                <a:spcPts val="800"/>
-              </a:spcAft>
-            </a:pPr>
-            <a:r>
-              <a:rPr sz="1600" b="0" i="0">
-                <a:solidFill>
-                  <a:srgbClr val="1A1A1A"/>
-                </a:solidFill>
-                <a:latin typeface="Arial"/>
-              </a:rPr>
-              <a:t>•  </a:t>
-            </a:r>
-            <a:r>
-              <a:rPr sz="1600" b="0" i="0">
-                <a:solidFill>
-                  <a:srgbClr val="1A1A1A"/>
-                </a:solidFill>
-                <a:latin typeface="Arial"/>
-              </a:rPr>
-              <a:t>Holds for multi-branch excited manifolds: K₁₂ becomes a coherent sum over branches.</a:t>
-            </a:r>
-          </a:p>
-          <a:p>
-            <a:pPr>
-              <a:spcAft>
-                <a:spcPts val="800"/>
-              </a:spcAft>
-            </a:pPr>
-            <a:r>
-              <a:rPr sz="1600" b="0" i="0">
-                <a:solidFill>
-                  <a:srgbClr val="1A1A1A"/>
-                </a:solidFill>
-                <a:latin typeface="Arial"/>
-              </a:rPr>
-              <a:t>•  </a:t>
-            </a:r>
-            <a:r>
-              <a:rPr sz="1600" b="0" i="0">
-                <a:solidFill>
-                  <a:srgbClr val="1A1A1A"/>
-                </a:solidFill>
-                <a:latin typeface="Arial"/>
-              </a:rPr>
-              <a:t>Full Liouvillian reproduces the archived 70 K benchmark to </a:t>
-            </a:r>
-            <a:r>
-              <a:rPr sz="1600" b="1" i="0">
-                <a:solidFill>
-                  <a:srgbClr val="1C3077"/>
-                </a:solidFill>
-                <a:latin typeface="Arial"/>
-              </a:rPr>
-              <a:t>0.25 %</a:t>
-            </a:r>
-            <a:r>
-              <a:rPr sz="1600" b="0" i="0">
-                <a:solidFill>
-                  <a:srgbClr val="1A1A1A"/>
-                </a:solidFill>
-                <a:latin typeface="Arial"/>
-              </a:rPr>
-              <a:t>.</a:t>
-            </a:r>
-          </a:p>
-        </p:txBody>
-      </p:sp>
-      <p:sp>
-        <p:nvSpPr>
-          <p:cNvPr id="6" name="Rounded Rectangle 5"/>
-          <p:cNvSpPr/>
-          <p:nvPr/>
-        </p:nvSpPr>
-        <p:spPr>
-          <a:xfrm>
-            <a:off x="128016" y="4919472"/>
-            <a:ext cx="8887968" cy="731520"/>
-          </a:xfrm>
-          <a:prstGeom prst="roundRect">
-            <a:avLst>
-              <a:gd name="adj" fmla="val 12000"/>
-            </a:avLst>
-          </a:prstGeom>
-          <a:solidFill>
-            <a:srgbClr val="EEF4FF"/>
-          </a:solidFill>
-          <a:ln>
-            <a:noFill/>
-          </a:ln>
-          <a:effectLst/>
-        </p:spPr>
-        <p:style>
-          <a:lnRef idx="1">
-            <a:schemeClr val="accent1"/>
-          </a:lnRef>
-          <a:fillRef idx="3">
-            <a:schemeClr val="accent1"/>
-          </a:fillRef>
-          <a:effectRef idx="2">
-            <a:schemeClr val="accent1"/>
-          </a:effectRef>
-          <a:fontRef idx="minor">
-            <a:schemeClr val="lt1"/>
-          </a:fontRef>
-        </p:style>
-        <p:txBody>
-          <a:bodyPr rtlCol="0" anchor="ctr" wrap="square" lIns="146304" rIns="146304" tIns="36576" bIns="36576"/>
-          <a:lstStyle/>
-          <a:p>
-            <a:pPr algn="l"/>
-            <a:r>
-              <a:rPr sz="2000" b="0" i="0">
-                <a:solidFill>
-                  <a:srgbClr val="1A1A1A"/>
-                </a:solidFill>
-                <a:latin typeface="Arial"/>
-              </a:rPr>
-              <a:t>Textbook Λ susceptibility recovered as a special case; 70 K contrast C = 0.01387 against the archived 0.01384.</a:t>
-            </a:r>
-          </a:p>
-        </p:txBody>
-      </p:sp>
-      <p:cxnSp>
-        <p:nvCxnSpPr>
-          <p:cNvPr id="7" name="Connector 6"/>
-          <p:cNvCxnSpPr/>
-          <p:nvPr/>
-        </p:nvCxnSpPr>
-        <p:spPr>
-          <a:xfrm>
-            <a:off x="128016" y="5870448"/>
-            <a:ext cx="8887968" cy="0"/>
-          </a:xfrm>
-          <a:prstGeom prst="line">
-            <a:avLst/>
-          </a:prstGeom>
-          <a:ln w="9525">
-            <a:solidFill>
-              <a:srgbClr val="BBBBBB"/>
-            </a:solidFill>
-          </a:ln>
-        </p:spPr>
-        <p:style>
-          <a:lnRef idx="2">
-            <a:schemeClr val="accent1"/>
-          </a:lnRef>
-          <a:fillRef idx="0">
-            <a:schemeClr val="accent1"/>
-          </a:fillRef>
-          <a:effectRef idx="1">
-            <a:schemeClr val="accent1"/>
-          </a:effectRef>
-          <a:fontRef idx="minor">
-            <a:schemeClr val="tx1"/>
-          </a:fontRef>
-        </p:style>
-      </p:cxnSp>
-      <p:sp>
-        <p:nvSpPr>
-          <p:cNvPr id="8" name="RefBand"/>
-          <p:cNvSpPr txBox="1"/>
-          <p:nvPr/>
-        </p:nvSpPr>
-        <p:spPr>
-          <a:xfrm>
-            <a:off x="128016" y="5916168"/>
-            <a:ext cx="8321040" cy="548640"/>
-          </a:xfrm>
-          <a:prstGeom prst="rect">
-            <a:avLst/>
-          </a:prstGeom>
-          <a:noFill/>
-        </p:spPr>
-        <p:txBody>
-          <a:bodyPr wrap="square" anchor="t" lIns="0" rIns="0" tIns="18288" bIns="18288">
-            <a:spAutoFit/>
-          </a:bodyPr>
-          <a:lstStyle/>
-          <a:p>
-            <a:r>
-              <a:rPr sz="1000" b="0" i="1">
-                <a:solidFill>
-                  <a:srgbClr val="555555"/>
-                </a:solidFill>
-                <a:latin typeface="Arial"/>
-              </a:rPr>
-              <a:t>[1] M. Fleischhauer, A. Imamoğlu and J. P. Marangos, Rev. Mod. Phys. 77, 633 (2005).   Benchmark: [4].</a:t>
+              <a:t>Results</a:t>
             </a:r>
           </a:p>
         </p:txBody>
@@ -9821,7 +9858,7 @@
                 </a:solidFill>
                 <a:latin typeface="Arial"/>
               </a:rPr>
-              <a:t>Result 2: The temperature–field island</a:t>
+              <a:t>Result 1: The temperature–field island</a:t>
             </a:r>
           </a:p>
         </p:txBody>
@@ -10099,7 +10136,7 @@
                 </a:solidFill>
                 <a:latin typeface="Arial"/>
               </a:rPr>
-              <a:t>Result 3: Room temperature</a:t>
+              <a:t>Result 2: Room temperature</a:t>
             </a:r>
           </a:p>
         </p:txBody>
@@ -10533,7 +10570,7 @@
                 </a:solidFill>
                 <a:latin typeface="Arial"/>
               </a:rPr>
-              <a:t>Result 4: Sign reversal at 103 K</a:t>
+              <a:t>Result 3: Sign reversal at 103 K</a:t>
             </a:r>
           </a:p>
         </p:txBody>
@@ -10967,7 +11004,7 @@
                 </a:solidFill>
                 <a:latin typeface="Arial"/>
               </a:rPr>
-              <a:t>Result 5: The role of the transverse field</a:t>
+              <a:t>Result 4: The role of the transverse field</a:t>
             </a:r>
           </a:p>
         </p:txBody>
@@ -13229,7 +13266,7 @@
                 </a:solidFill>
                 <a:latin typeface="Arial"/>
               </a:rPr>
-              <a:t>The no-go criterion and how each operating point is judged</a:t>
+              <a:t>The criterion, how each point is judged, and the check against the literature</a:t>
             </a:r>
           </a:p>
         </p:txBody>
@@ -13304,7 +13341,7 @@
                 </a:solidFill>
                 <a:latin typeface="Arial"/>
               </a:rPr>
-              <a:t>Sanity check, the island, room temperature, the field</a:t>
+              <a:t>The island, room temperature, the sign reversal, the field</a:t>
             </a:r>
           </a:p>
         </p:txBody>

--- a/presentations/lab_seminar/nv_eit_seminar.pptx
+++ b/presentations/lab_seminar/nv_eit_seminar.pptx
@@ -9547,8 +9547,8 @@
         </p:nvSpPr>
         <p:spPr>
           <a:xfrm>
-            <a:off x="128016" y="4151376"/>
-            <a:ext cx="8887968" cy="640080"/>
+            <a:off x="128016" y="4133087"/>
+            <a:ext cx="8887968" cy="658368"/>
           </a:xfrm>
           <a:prstGeom prst="rect">
             <a:avLst/>
@@ -9568,7 +9568,7 @@
                 </a:solidFill>
                 <a:latin typeface="Arial"/>
               </a:rPr>
-              <a:t>And at δ_p = δ_c = 0 with γ₂₁ → 0:  </a:t>
+              <a:t>N_e branches — the NV case: </a:t>
             </a:r>
             <a:r>
               <a:rPr sz="1600" b="1" i="0">
@@ -9577,6 +9577,40 @@
                 </a:solidFill>
                 <a:latin typeface="Arial"/>
               </a:rPr>
+              <a:t>K₁₂ = Σⱼ d₁ⱼ* d₂ⱼ / aⱼ</a:t>
+            </a:r>
+            <a:r>
+              <a:rPr sz="1600" b="0" i="0">
+                <a:solidFill>
+                  <a:srgbClr val="1A1A1A"/>
+                </a:solidFill>
+                <a:latin typeface="Arial"/>
+              </a:rPr>
+              <a:t>, a coherent sum, same Ξ.</a:t>
+            </a:r>
+          </a:p>
+          <a:p>
+            <a:pPr>
+              <a:spcBef>
+                <a:spcPts val="300"/>
+              </a:spcBef>
+            </a:pPr>
+            <a:r>
+              <a:rPr sz="1600" b="0" i="0">
+                <a:solidFill>
+                  <a:srgbClr val="1A1A1A"/>
+                </a:solidFill>
+                <a:latin typeface="Arial"/>
+              </a:rPr>
+              <a:t>δ_p = δ_c = 0, γ₂₁ → 0:  </a:t>
+            </a:r>
+            <a:r>
+              <a:rPr sz="1600" b="1" i="0">
+                <a:solidFill>
+                  <a:srgbClr val="1C3077"/>
+                </a:solidFill>
+                <a:latin typeface="Arial"/>
+              </a:rPr>
               <a:t>χ_full = 0 while δΞₛ = −1</a:t>
             </a:r>
             <a:r>
@@ -9586,7 +9620,7 @@
                 </a:solidFill>
                 <a:latin typeface="Arial"/>
               </a:rPr>
-              <a:t> — the Method 1 claim, derived rather than asserted.</a:t>
+              <a:t> — Method 1, derived.</a:t>
             </a:r>
           </a:p>
         </p:txBody>
@@ -9710,7 +9744,18 @@
                 </a:solidFill>
                 <a:latin typeface="Arial"/>
               </a:rPr>
-              <a:t>[1] M. Fleischhauer, A. Imamoğlu and J. P. Marangos, Rev. Mod. Phys. 77, 633 (2005).   Symbolic check: calculations/symbolic/verify_lambda_reduction.py.   Benchmark: [4].</a:t>
+              <a:t>[1] M. Fleischhauer, A. Imamoğlu and J. P. Marangos, Rev. Mod. Phys. 77, 633 (2005).   Multilevel form: [16] O. S. Mishina et al., Phys. Rev. A 83, 053809 (2011); group theory note §9.6–9.7.</a:t>
+            </a:r>
+          </a:p>
+          <a:p>
+            <a:r>
+              <a:rPr sz="1000" b="0" i="1">
+                <a:solidFill>
+                  <a:srgbClr val="555555"/>
+                </a:solidFill>
+                <a:latin typeface="Arial"/>
+              </a:rPr>
+              <a:t>Symbolic check (N_e = 1–4): calculations/symbolic/verify_lambda_reduction.py.   Benchmark: [4].</a:t>
             </a:r>
           </a:p>
         </p:txBody>
